--- a/Lec-29-ipc.pptx
+++ b/Lec-29-ipc.pptx
@@ -5,10 +5,24 @@
     <p:sldMasterId id="2147483648" r:id="rId1"/>
   </p:sldMasterIdLst>
   <p:notesMasterIdLst>
-    <p:notesMasterId r:id="rId3"/>
+    <p:notesMasterId r:id="rId17"/>
   </p:notesMasterIdLst>
   <p:sldIdLst>
     <p:sldId id="337" r:id="rId2"/>
+    <p:sldId id="338" r:id="rId3"/>
+    <p:sldId id="339" r:id="rId4"/>
+    <p:sldId id="340" r:id="rId5"/>
+    <p:sldId id="341" r:id="rId6"/>
+    <p:sldId id="342" r:id="rId7"/>
+    <p:sldId id="346" r:id="rId8"/>
+    <p:sldId id="347" r:id="rId9"/>
+    <p:sldId id="348" r:id="rId10"/>
+    <p:sldId id="350" r:id="rId11"/>
+    <p:sldId id="351" r:id="rId12"/>
+    <p:sldId id="352" r:id="rId13"/>
+    <p:sldId id="343" r:id="rId14"/>
+    <p:sldId id="353" r:id="rId15"/>
+    <p:sldId id="354" r:id="rId16"/>
   </p:sldIdLst>
   <p:sldSz cx="9144000" cy="6858000" type="screen4x3"/>
   <p:notesSz cx="6858000" cy="9144000"/>
@@ -5830,6 +5844,9578 @@
         </p:txBody>
       </p:sp>
     </p:spTree>
+  </p:cSld>
+  <p:clrMapOvr>
+    <a:masterClrMapping/>
+  </p:clrMapOvr>
+</p:sld>
+</file>
+
+<file path=ppt/slides/slide10.xml><?xml version="1.0" encoding="utf-8"?>
+<p:sld xmlns:a="http://schemas.openxmlformats.org/drawingml/2006/main" xmlns:r="http://schemas.openxmlformats.org/officeDocument/2006/relationships" xmlns:p="http://schemas.openxmlformats.org/presentationml/2006/main">
+  <p:cSld>
+    <p:spTree>
+      <p:nvGrpSpPr>
+        <p:cNvPr id="1" name=""/>
+        <p:cNvGrpSpPr/>
+        <p:nvPr/>
+      </p:nvGrpSpPr>
+      <p:grpSpPr>
+        <a:xfrm>
+          <a:off x="0" y="0"/>
+          <a:ext cx="0" cy="0"/>
+          <a:chOff x="0" y="0"/>
+          <a:chExt cx="0" cy="0"/>
+        </a:xfrm>
+      </p:grpSpPr>
+      <p:sp>
+        <p:nvSpPr>
+          <p:cNvPr id="2" name="Title 1">
+            <a:extLst>
+              <a:ext uri="{FF2B5EF4-FFF2-40B4-BE49-F238E27FC236}">
+                <a16:creationId xmlns:a16="http://schemas.microsoft.com/office/drawing/2014/main" id="{5A3D2510-5935-8E34-AAC5-BA18E4F90132}"/>
+              </a:ext>
+            </a:extLst>
+          </p:cNvPr>
+          <p:cNvSpPr>
+            <a:spLocks noGrp="1"/>
+          </p:cNvSpPr>
+          <p:nvPr>
+            <p:ph type="title"/>
+          </p:nvPr>
+        </p:nvSpPr>
+        <p:spPr/>
+        <p:txBody>
+          <a:bodyPr/>
+          <a:lstStyle/>
+          <a:p>
+            <a:r>
+              <a:rPr lang="en-US" dirty="0"/>
+              <a:t>Message passing</a:t>
+            </a:r>
+            <a:endParaRPr lang="en-IN" dirty="0"/>
+          </a:p>
+        </p:txBody>
+      </p:sp>
+      <p:sp>
+        <p:nvSpPr>
+          <p:cNvPr id="4" name="Date Placeholder 3">
+            <a:extLst>
+              <a:ext uri="{FF2B5EF4-FFF2-40B4-BE49-F238E27FC236}">
+                <a16:creationId xmlns:a16="http://schemas.microsoft.com/office/drawing/2014/main" id="{39E72551-3256-1DC3-C3AD-FC0105212E03}"/>
+              </a:ext>
+            </a:extLst>
+          </p:cNvPr>
+          <p:cNvSpPr>
+            <a:spLocks noGrp="1"/>
+          </p:cNvSpPr>
+          <p:nvPr>
+            <p:ph type="dt" sz="half" idx="10"/>
+          </p:nvPr>
+        </p:nvSpPr>
+        <p:spPr/>
+        <p:txBody>
+          <a:bodyPr/>
+          <a:lstStyle/>
+          <a:p>
+            <a:pPr>
+              <a:defRPr/>
+            </a:pPr>
+            <a:r>
+              <a:rPr lang="en-US"/>
+              <a:t>21/12/2020</a:t>
+            </a:r>
+          </a:p>
+        </p:txBody>
+      </p:sp>
+      <p:sp>
+        <p:nvSpPr>
+          <p:cNvPr id="5" name="Slide Number Placeholder 4">
+            <a:extLst>
+              <a:ext uri="{FF2B5EF4-FFF2-40B4-BE49-F238E27FC236}">
+                <a16:creationId xmlns:a16="http://schemas.microsoft.com/office/drawing/2014/main" id="{B22F25BA-2C9E-D48D-D98E-3E1A541462A5}"/>
+              </a:ext>
+            </a:extLst>
+          </p:cNvPr>
+          <p:cNvSpPr>
+            <a:spLocks noGrp="1"/>
+          </p:cNvSpPr>
+          <p:nvPr>
+            <p:ph type="sldNum" sz="quarter" idx="12"/>
+          </p:nvPr>
+        </p:nvSpPr>
+        <p:spPr/>
+        <p:txBody>
+          <a:bodyPr/>
+          <a:lstStyle/>
+          <a:p>
+            <a:pPr>
+              <a:defRPr/>
+            </a:pPr>
+            <a:fld id="{CA887A73-1AE0-46F8-856A-18EA1CF30A1B}" type="slidenum">
+              <a:rPr lang="en-US" altLang="en-US" smtClean="0"/>
+              <a:pPr>
+                <a:defRPr/>
+              </a:pPr>
+              <a:t>10</a:t>
+            </a:fld>
+            <a:endParaRPr lang="en-US" altLang="en-US"/>
+          </a:p>
+        </p:txBody>
+      </p:sp>
+      <p:pic>
+        <p:nvPicPr>
+          <p:cNvPr id="7" name="Picture 6">
+            <a:extLst>
+              <a:ext uri="{FF2B5EF4-FFF2-40B4-BE49-F238E27FC236}">
+                <a16:creationId xmlns:a16="http://schemas.microsoft.com/office/drawing/2014/main" id="{68464700-65D3-B9D0-FC46-66017863E907}"/>
+              </a:ext>
+            </a:extLst>
+          </p:cNvPr>
+          <p:cNvPicPr>
+            <a:picLocks noChangeAspect="1"/>
+          </p:cNvPicPr>
+          <p:nvPr/>
+        </p:nvPicPr>
+        <p:blipFill>
+          <a:blip r:embed="rId2"/>
+          <a:stretch>
+            <a:fillRect/>
+          </a:stretch>
+        </p:blipFill>
+        <p:spPr>
+          <a:xfrm>
+            <a:off x="165798" y="1447800"/>
+            <a:ext cx="1594208" cy="1066800"/>
+          </a:xfrm>
+          <a:prstGeom prst="rect">
+            <a:avLst/>
+          </a:prstGeom>
+        </p:spPr>
+      </p:pic>
+      <p:sp>
+        <p:nvSpPr>
+          <p:cNvPr id="8" name="Content Placeholder 2">
+            <a:extLst>
+              <a:ext uri="{FF2B5EF4-FFF2-40B4-BE49-F238E27FC236}">
+                <a16:creationId xmlns:a16="http://schemas.microsoft.com/office/drawing/2014/main" id="{E62F6F77-81D4-DD62-1A10-E67859142662}"/>
+              </a:ext>
+            </a:extLst>
+          </p:cNvPr>
+          <p:cNvSpPr>
+            <a:spLocks noGrp="1"/>
+          </p:cNvSpPr>
+          <p:nvPr>
+            <p:ph idx="1"/>
+          </p:nvPr>
+        </p:nvSpPr>
+        <p:spPr>
+          <a:xfrm>
+            <a:off x="152400" y="2590800"/>
+            <a:ext cx="3033765" cy="381000"/>
+          </a:xfrm>
+        </p:spPr>
+        <p:txBody>
+          <a:bodyPr/>
+          <a:lstStyle/>
+          <a:p>
+            <a:pPr marL="0" indent="0">
+              <a:buNone/>
+            </a:pPr>
+            <a:r>
+              <a:rPr lang="en-US" sz="2000" dirty="0">
+                <a:solidFill>
+                  <a:schemeClr val="tx1"/>
+                </a:solidFill>
+              </a:rPr>
+              <a:t>Message = type + payload</a:t>
+            </a:r>
+            <a:endParaRPr lang="en-IN" sz="2000" dirty="0">
+              <a:solidFill>
+                <a:schemeClr val="tx1"/>
+              </a:solidFill>
+            </a:endParaRPr>
+          </a:p>
+        </p:txBody>
+      </p:sp>
+      <p:pic>
+        <p:nvPicPr>
+          <p:cNvPr id="10" name="Picture 9">
+            <a:extLst>
+              <a:ext uri="{FF2B5EF4-FFF2-40B4-BE49-F238E27FC236}">
+                <a16:creationId xmlns:a16="http://schemas.microsoft.com/office/drawing/2014/main" id="{EB0FC105-EFFD-500C-6A56-E2ECB4B4A8A7}"/>
+              </a:ext>
+            </a:extLst>
+          </p:cNvPr>
+          <p:cNvPicPr>
+            <a:picLocks noChangeAspect="1"/>
+          </p:cNvPicPr>
+          <p:nvPr/>
+        </p:nvPicPr>
+        <p:blipFill>
+          <a:blip r:embed="rId3"/>
+          <a:stretch>
+            <a:fillRect/>
+          </a:stretch>
+        </p:blipFill>
+        <p:spPr>
+          <a:xfrm>
+            <a:off x="152400" y="3124200"/>
+            <a:ext cx="2770226" cy="2286000"/>
+          </a:xfrm>
+          <a:prstGeom prst="rect">
+            <a:avLst/>
+          </a:prstGeom>
+        </p:spPr>
+      </p:pic>
+      <p:sp>
+        <p:nvSpPr>
+          <p:cNvPr id="11" name="Content Placeholder 2">
+            <a:extLst>
+              <a:ext uri="{FF2B5EF4-FFF2-40B4-BE49-F238E27FC236}">
+                <a16:creationId xmlns:a16="http://schemas.microsoft.com/office/drawing/2014/main" id="{FA50955F-13A3-A4AA-FC49-AFF3C96473C7}"/>
+              </a:ext>
+            </a:extLst>
+          </p:cNvPr>
+          <p:cNvSpPr txBox="1">
+            <a:spLocks/>
+          </p:cNvSpPr>
+          <p:nvPr/>
+        </p:nvSpPr>
+        <p:spPr bwMode="auto">
+          <a:xfrm>
+            <a:off x="165798" y="5444532"/>
+            <a:ext cx="3033765" cy="381000"/>
+          </a:xfrm>
+          <a:prstGeom prst="rect">
+            <a:avLst/>
+          </a:prstGeom>
+          <a:noFill/>
+          <a:ln>
+            <a:noFill/>
+          </a:ln>
+          <a:extLst>
+            <a:ext uri="{909E8E84-426E-40DD-AFC4-6F175D3DCCD1}">
+              <a14:hiddenFill xmlns:a14="http://schemas.microsoft.com/office/drawing/2010/main">
+                <a:solidFill>
+                  <a:srgbClr val="FFFFFF"/>
+                </a:solidFill>
+              </a14:hiddenFill>
+            </a:ext>
+            <a:ext uri="{91240B29-F687-4F45-9708-019B960494DF}">
+              <a14:hiddenLine xmlns:a14="http://schemas.microsoft.com/office/drawing/2010/main" w="9525">
+                <a:solidFill>
+                  <a:srgbClr val="000000"/>
+                </a:solidFill>
+                <a:miter lim="800000"/>
+                <a:headEnd/>
+                <a:tailEnd/>
+              </a14:hiddenLine>
+            </a:ext>
+          </a:extLst>
+        </p:spPr>
+        <p:txBody>
+          <a:bodyPr vert="horz" wrap="square" lIns="91440" tIns="45720" rIns="91440" bIns="45720" numCol="1" anchor="t" anchorCtr="0" compatLnSpc="1">
+            <a:prstTxWarp prst="textNoShape">
+              <a:avLst/>
+            </a:prstTxWarp>
+          </a:bodyPr>
+          <a:lstStyle>
+            <a:lvl1pPr marL="342900" indent="-342900" algn="l" rtl="0" eaLnBrk="0" fontAlgn="base" hangingPunct="0">
+              <a:spcBef>
+                <a:spcPct val="20000"/>
+              </a:spcBef>
+              <a:spcAft>
+                <a:spcPct val="0"/>
+              </a:spcAft>
+              <a:buFont typeface="Arial" panose="020B0604020202020204" pitchFamily="34" charset="0"/>
+              <a:buChar char="•"/>
+              <a:defRPr sz="3200" kern="1200">
+                <a:solidFill>
+                  <a:schemeClr val="tx1">
+                    <a:lumMod val="50000"/>
+                    <a:lumOff val="50000"/>
+                  </a:schemeClr>
+                </a:solidFill>
+                <a:latin typeface="+mn-lt"/>
+                <a:ea typeface="+mn-ea"/>
+                <a:cs typeface="+mn-cs"/>
+              </a:defRPr>
+            </a:lvl1pPr>
+            <a:lvl2pPr marL="742950" indent="-285750" algn="l" rtl="0" eaLnBrk="0" fontAlgn="base" hangingPunct="0">
+              <a:spcBef>
+                <a:spcPct val="20000"/>
+              </a:spcBef>
+              <a:spcAft>
+                <a:spcPct val="0"/>
+              </a:spcAft>
+              <a:buFont typeface="Arial" panose="020B0604020202020204" pitchFamily="34" charset="0"/>
+              <a:buChar char="–"/>
+              <a:defRPr sz="2800" kern="1200">
+                <a:solidFill>
+                  <a:schemeClr val="tx1">
+                    <a:lumMod val="50000"/>
+                    <a:lumOff val="50000"/>
+                  </a:schemeClr>
+                </a:solidFill>
+                <a:latin typeface="+mn-lt"/>
+                <a:ea typeface="+mn-ea"/>
+                <a:cs typeface="+mn-cs"/>
+              </a:defRPr>
+            </a:lvl2pPr>
+            <a:lvl3pPr marL="1143000" indent="-228600" algn="l" rtl="0" eaLnBrk="0" fontAlgn="base" hangingPunct="0">
+              <a:spcBef>
+                <a:spcPct val="20000"/>
+              </a:spcBef>
+              <a:spcAft>
+                <a:spcPct val="0"/>
+              </a:spcAft>
+              <a:buFont typeface="Arial" panose="020B0604020202020204" pitchFamily="34" charset="0"/>
+              <a:buChar char="•"/>
+              <a:defRPr sz="2400" kern="1200">
+                <a:solidFill>
+                  <a:schemeClr val="tx1">
+                    <a:lumMod val="50000"/>
+                    <a:lumOff val="50000"/>
+                  </a:schemeClr>
+                </a:solidFill>
+                <a:latin typeface="+mn-lt"/>
+                <a:ea typeface="+mn-ea"/>
+                <a:cs typeface="+mn-cs"/>
+              </a:defRPr>
+            </a:lvl3pPr>
+            <a:lvl4pPr marL="1600200" indent="-228600" algn="l" rtl="0" eaLnBrk="0" fontAlgn="base" hangingPunct="0">
+              <a:spcBef>
+                <a:spcPct val="20000"/>
+              </a:spcBef>
+              <a:spcAft>
+                <a:spcPct val="0"/>
+              </a:spcAft>
+              <a:buFont typeface="Arial" panose="020B0604020202020204" pitchFamily="34" charset="0"/>
+              <a:buChar char="–"/>
+              <a:defRPr sz="2000" kern="1200">
+                <a:solidFill>
+                  <a:schemeClr val="tx1">
+                    <a:lumMod val="50000"/>
+                    <a:lumOff val="50000"/>
+                  </a:schemeClr>
+                </a:solidFill>
+                <a:latin typeface="+mn-lt"/>
+                <a:ea typeface="+mn-ea"/>
+                <a:cs typeface="+mn-cs"/>
+              </a:defRPr>
+            </a:lvl4pPr>
+            <a:lvl5pPr marL="2057400" indent="-228600" algn="l" rtl="0" eaLnBrk="0" fontAlgn="base" hangingPunct="0">
+              <a:spcBef>
+                <a:spcPct val="20000"/>
+              </a:spcBef>
+              <a:spcAft>
+                <a:spcPct val="0"/>
+              </a:spcAft>
+              <a:buFont typeface="Arial" panose="020B0604020202020204" pitchFamily="34" charset="0"/>
+              <a:buChar char="»"/>
+              <a:defRPr sz="2000" kern="1200">
+                <a:solidFill>
+                  <a:schemeClr val="tx1">
+                    <a:lumMod val="50000"/>
+                    <a:lumOff val="50000"/>
+                  </a:schemeClr>
+                </a:solidFill>
+                <a:latin typeface="+mn-lt"/>
+                <a:ea typeface="+mn-ea"/>
+                <a:cs typeface="+mn-cs"/>
+              </a:defRPr>
+            </a:lvl5pPr>
+            <a:lvl6pPr marL="2514600" indent="-228600" algn="l" defTabSz="914400" rtl="0" eaLnBrk="1" latinLnBrk="0" hangingPunct="1">
+              <a:spcBef>
+                <a:spcPct val="20000"/>
+              </a:spcBef>
+              <a:buFont typeface="Arial" pitchFamily="34" charset="0"/>
+              <a:buChar char="•"/>
+              <a:defRPr sz="2000" kern="1200">
+                <a:solidFill>
+                  <a:schemeClr val="tx1"/>
+                </a:solidFill>
+                <a:latin typeface="+mn-lt"/>
+                <a:ea typeface="+mn-ea"/>
+                <a:cs typeface="+mn-cs"/>
+              </a:defRPr>
+            </a:lvl6pPr>
+            <a:lvl7pPr marL="2971800" indent="-228600" algn="l" defTabSz="914400" rtl="0" eaLnBrk="1" latinLnBrk="0" hangingPunct="1">
+              <a:spcBef>
+                <a:spcPct val="20000"/>
+              </a:spcBef>
+              <a:buFont typeface="Arial" pitchFamily="34" charset="0"/>
+              <a:buChar char="•"/>
+              <a:defRPr sz="2000" kern="1200">
+                <a:solidFill>
+                  <a:schemeClr val="tx1"/>
+                </a:solidFill>
+                <a:latin typeface="+mn-lt"/>
+                <a:ea typeface="+mn-ea"/>
+                <a:cs typeface="+mn-cs"/>
+              </a:defRPr>
+            </a:lvl7pPr>
+            <a:lvl8pPr marL="3429000" indent="-228600" algn="l" defTabSz="914400" rtl="0" eaLnBrk="1" latinLnBrk="0" hangingPunct="1">
+              <a:spcBef>
+                <a:spcPct val="20000"/>
+              </a:spcBef>
+              <a:buFont typeface="Arial" pitchFamily="34" charset="0"/>
+              <a:buChar char="•"/>
+              <a:defRPr sz="2000" kern="1200">
+                <a:solidFill>
+                  <a:schemeClr val="tx1"/>
+                </a:solidFill>
+                <a:latin typeface="+mn-lt"/>
+                <a:ea typeface="+mn-ea"/>
+                <a:cs typeface="+mn-cs"/>
+              </a:defRPr>
+            </a:lvl8pPr>
+            <a:lvl9pPr marL="3886200" indent="-228600" algn="l" defTabSz="914400" rtl="0" eaLnBrk="1" latinLnBrk="0" hangingPunct="1">
+              <a:spcBef>
+                <a:spcPct val="20000"/>
+              </a:spcBef>
+              <a:buFont typeface="Arial" pitchFamily="34" charset="0"/>
+              <a:buChar char="•"/>
+              <a:defRPr sz="2000" kern="1200">
+                <a:solidFill>
+                  <a:schemeClr val="tx1"/>
+                </a:solidFill>
+                <a:latin typeface="+mn-lt"/>
+                <a:ea typeface="+mn-ea"/>
+                <a:cs typeface="+mn-cs"/>
+              </a:defRPr>
+            </a:lvl9pPr>
+          </a:lstStyle>
+          <a:p>
+            <a:pPr marL="0" indent="0">
+              <a:buFont typeface="Arial" panose="020B0604020202020204" pitchFamily="34" charset="0"/>
+              <a:buNone/>
+            </a:pPr>
+            <a:r>
+              <a:rPr lang="en-US" sz="2000" dirty="0">
+                <a:solidFill>
+                  <a:schemeClr val="tx1"/>
+                </a:solidFill>
+              </a:rPr>
+              <a:t>Queue = buffer for messages + pointers to head and tail + queue size</a:t>
+            </a:r>
+            <a:endParaRPr lang="en-IN" sz="2000" dirty="0">
+              <a:solidFill>
+                <a:schemeClr val="tx1"/>
+              </a:solidFill>
+            </a:endParaRPr>
+          </a:p>
+        </p:txBody>
+      </p:sp>
+      <p:pic>
+        <p:nvPicPr>
+          <p:cNvPr id="13" name="Picture 12">
+            <a:extLst>
+              <a:ext uri="{FF2B5EF4-FFF2-40B4-BE49-F238E27FC236}">
+                <a16:creationId xmlns:a16="http://schemas.microsoft.com/office/drawing/2014/main" id="{2271861F-E98D-F1F4-C728-73A761543F82}"/>
+              </a:ext>
+            </a:extLst>
+          </p:cNvPr>
+          <p:cNvPicPr>
+            <a:picLocks noChangeAspect="1"/>
+          </p:cNvPicPr>
+          <p:nvPr/>
+        </p:nvPicPr>
+        <p:blipFill>
+          <a:blip r:embed="rId4"/>
+          <a:stretch>
+            <a:fillRect/>
+          </a:stretch>
+        </p:blipFill>
+        <p:spPr>
+          <a:xfrm>
+            <a:off x="3744374" y="1447800"/>
+            <a:ext cx="2758584" cy="1195386"/>
+          </a:xfrm>
+          <a:prstGeom prst="rect">
+            <a:avLst/>
+          </a:prstGeom>
+        </p:spPr>
+      </p:pic>
+      <p:sp>
+        <p:nvSpPr>
+          <p:cNvPr id="14" name="Content Placeholder 2">
+            <a:extLst>
+              <a:ext uri="{FF2B5EF4-FFF2-40B4-BE49-F238E27FC236}">
+                <a16:creationId xmlns:a16="http://schemas.microsoft.com/office/drawing/2014/main" id="{7D11ED82-5F20-4B4F-E48E-CCE77D25E18C}"/>
+              </a:ext>
+            </a:extLst>
+          </p:cNvPr>
+          <p:cNvSpPr txBox="1">
+            <a:spLocks/>
+          </p:cNvSpPr>
+          <p:nvPr/>
+        </p:nvSpPr>
+        <p:spPr bwMode="auto">
+          <a:xfrm>
+            <a:off x="3744374" y="2651125"/>
+            <a:ext cx="3033765" cy="381000"/>
+          </a:xfrm>
+          <a:prstGeom prst="rect">
+            <a:avLst/>
+          </a:prstGeom>
+          <a:noFill/>
+          <a:ln>
+            <a:noFill/>
+          </a:ln>
+          <a:extLst>
+            <a:ext uri="{909E8E84-426E-40DD-AFC4-6F175D3DCCD1}">
+              <a14:hiddenFill xmlns:a14="http://schemas.microsoft.com/office/drawing/2010/main">
+                <a:solidFill>
+                  <a:srgbClr val="FFFFFF"/>
+                </a:solidFill>
+              </a14:hiddenFill>
+            </a:ext>
+            <a:ext uri="{91240B29-F687-4F45-9708-019B960494DF}">
+              <a14:hiddenLine xmlns:a14="http://schemas.microsoft.com/office/drawing/2010/main" w="9525">
+                <a:solidFill>
+                  <a:srgbClr val="000000"/>
+                </a:solidFill>
+                <a:miter lim="800000"/>
+                <a:headEnd/>
+                <a:tailEnd/>
+              </a14:hiddenLine>
+            </a:ext>
+          </a:extLst>
+        </p:spPr>
+        <p:txBody>
+          <a:bodyPr vert="horz" wrap="square" lIns="91440" tIns="45720" rIns="91440" bIns="45720" numCol="1" anchor="t" anchorCtr="0" compatLnSpc="1">
+            <a:prstTxWarp prst="textNoShape">
+              <a:avLst/>
+            </a:prstTxWarp>
+          </a:bodyPr>
+          <a:lstStyle>
+            <a:lvl1pPr marL="342900" indent="-342900" algn="l" rtl="0" eaLnBrk="0" fontAlgn="base" hangingPunct="0">
+              <a:spcBef>
+                <a:spcPct val="20000"/>
+              </a:spcBef>
+              <a:spcAft>
+                <a:spcPct val="0"/>
+              </a:spcAft>
+              <a:buFont typeface="Arial" panose="020B0604020202020204" pitchFamily="34" charset="0"/>
+              <a:buChar char="•"/>
+              <a:defRPr sz="3200" kern="1200">
+                <a:solidFill>
+                  <a:schemeClr val="tx1">
+                    <a:lumMod val="50000"/>
+                    <a:lumOff val="50000"/>
+                  </a:schemeClr>
+                </a:solidFill>
+                <a:latin typeface="+mn-lt"/>
+                <a:ea typeface="+mn-ea"/>
+                <a:cs typeface="+mn-cs"/>
+              </a:defRPr>
+            </a:lvl1pPr>
+            <a:lvl2pPr marL="742950" indent="-285750" algn="l" rtl="0" eaLnBrk="0" fontAlgn="base" hangingPunct="0">
+              <a:spcBef>
+                <a:spcPct val="20000"/>
+              </a:spcBef>
+              <a:spcAft>
+                <a:spcPct val="0"/>
+              </a:spcAft>
+              <a:buFont typeface="Arial" panose="020B0604020202020204" pitchFamily="34" charset="0"/>
+              <a:buChar char="–"/>
+              <a:defRPr sz="2800" kern="1200">
+                <a:solidFill>
+                  <a:schemeClr val="tx1">
+                    <a:lumMod val="50000"/>
+                    <a:lumOff val="50000"/>
+                  </a:schemeClr>
+                </a:solidFill>
+                <a:latin typeface="+mn-lt"/>
+                <a:ea typeface="+mn-ea"/>
+                <a:cs typeface="+mn-cs"/>
+              </a:defRPr>
+            </a:lvl2pPr>
+            <a:lvl3pPr marL="1143000" indent="-228600" algn="l" rtl="0" eaLnBrk="0" fontAlgn="base" hangingPunct="0">
+              <a:spcBef>
+                <a:spcPct val="20000"/>
+              </a:spcBef>
+              <a:spcAft>
+                <a:spcPct val="0"/>
+              </a:spcAft>
+              <a:buFont typeface="Arial" panose="020B0604020202020204" pitchFamily="34" charset="0"/>
+              <a:buChar char="•"/>
+              <a:defRPr sz="2400" kern="1200">
+                <a:solidFill>
+                  <a:schemeClr val="tx1">
+                    <a:lumMod val="50000"/>
+                    <a:lumOff val="50000"/>
+                  </a:schemeClr>
+                </a:solidFill>
+                <a:latin typeface="+mn-lt"/>
+                <a:ea typeface="+mn-ea"/>
+                <a:cs typeface="+mn-cs"/>
+              </a:defRPr>
+            </a:lvl3pPr>
+            <a:lvl4pPr marL="1600200" indent="-228600" algn="l" rtl="0" eaLnBrk="0" fontAlgn="base" hangingPunct="0">
+              <a:spcBef>
+                <a:spcPct val="20000"/>
+              </a:spcBef>
+              <a:spcAft>
+                <a:spcPct val="0"/>
+              </a:spcAft>
+              <a:buFont typeface="Arial" panose="020B0604020202020204" pitchFamily="34" charset="0"/>
+              <a:buChar char="–"/>
+              <a:defRPr sz="2000" kern="1200">
+                <a:solidFill>
+                  <a:schemeClr val="tx1">
+                    <a:lumMod val="50000"/>
+                    <a:lumOff val="50000"/>
+                  </a:schemeClr>
+                </a:solidFill>
+                <a:latin typeface="+mn-lt"/>
+                <a:ea typeface="+mn-ea"/>
+                <a:cs typeface="+mn-cs"/>
+              </a:defRPr>
+            </a:lvl4pPr>
+            <a:lvl5pPr marL="2057400" indent="-228600" algn="l" rtl="0" eaLnBrk="0" fontAlgn="base" hangingPunct="0">
+              <a:spcBef>
+                <a:spcPct val="20000"/>
+              </a:spcBef>
+              <a:spcAft>
+                <a:spcPct val="0"/>
+              </a:spcAft>
+              <a:buFont typeface="Arial" panose="020B0604020202020204" pitchFamily="34" charset="0"/>
+              <a:buChar char="»"/>
+              <a:defRPr sz="2000" kern="1200">
+                <a:solidFill>
+                  <a:schemeClr val="tx1">
+                    <a:lumMod val="50000"/>
+                    <a:lumOff val="50000"/>
+                  </a:schemeClr>
+                </a:solidFill>
+                <a:latin typeface="+mn-lt"/>
+                <a:ea typeface="+mn-ea"/>
+                <a:cs typeface="+mn-cs"/>
+              </a:defRPr>
+            </a:lvl5pPr>
+            <a:lvl6pPr marL="2514600" indent="-228600" algn="l" defTabSz="914400" rtl="0" eaLnBrk="1" latinLnBrk="0" hangingPunct="1">
+              <a:spcBef>
+                <a:spcPct val="20000"/>
+              </a:spcBef>
+              <a:buFont typeface="Arial" pitchFamily="34" charset="0"/>
+              <a:buChar char="•"/>
+              <a:defRPr sz="2000" kern="1200">
+                <a:solidFill>
+                  <a:schemeClr val="tx1"/>
+                </a:solidFill>
+                <a:latin typeface="+mn-lt"/>
+                <a:ea typeface="+mn-ea"/>
+                <a:cs typeface="+mn-cs"/>
+              </a:defRPr>
+            </a:lvl6pPr>
+            <a:lvl7pPr marL="2971800" indent="-228600" algn="l" defTabSz="914400" rtl="0" eaLnBrk="1" latinLnBrk="0" hangingPunct="1">
+              <a:spcBef>
+                <a:spcPct val="20000"/>
+              </a:spcBef>
+              <a:buFont typeface="Arial" pitchFamily="34" charset="0"/>
+              <a:buChar char="•"/>
+              <a:defRPr sz="2000" kern="1200">
+                <a:solidFill>
+                  <a:schemeClr val="tx1"/>
+                </a:solidFill>
+                <a:latin typeface="+mn-lt"/>
+                <a:ea typeface="+mn-ea"/>
+                <a:cs typeface="+mn-cs"/>
+              </a:defRPr>
+            </a:lvl7pPr>
+            <a:lvl8pPr marL="3429000" indent="-228600" algn="l" defTabSz="914400" rtl="0" eaLnBrk="1" latinLnBrk="0" hangingPunct="1">
+              <a:spcBef>
+                <a:spcPct val="20000"/>
+              </a:spcBef>
+              <a:buFont typeface="Arial" pitchFamily="34" charset="0"/>
+              <a:buChar char="•"/>
+              <a:defRPr sz="2000" kern="1200">
+                <a:solidFill>
+                  <a:schemeClr val="tx1"/>
+                </a:solidFill>
+                <a:latin typeface="+mn-lt"/>
+                <a:ea typeface="+mn-ea"/>
+                <a:cs typeface="+mn-cs"/>
+              </a:defRPr>
+            </a:lvl8pPr>
+            <a:lvl9pPr marL="3886200" indent="-228600" algn="l" defTabSz="914400" rtl="0" eaLnBrk="1" latinLnBrk="0" hangingPunct="1">
+              <a:spcBef>
+                <a:spcPct val="20000"/>
+              </a:spcBef>
+              <a:buFont typeface="Arial" pitchFamily="34" charset="0"/>
+              <a:buChar char="•"/>
+              <a:defRPr sz="2000" kern="1200">
+                <a:solidFill>
+                  <a:schemeClr val="tx1"/>
+                </a:solidFill>
+                <a:latin typeface="+mn-lt"/>
+                <a:ea typeface="+mn-ea"/>
+                <a:cs typeface="+mn-cs"/>
+              </a:defRPr>
+            </a:lvl9pPr>
+          </a:lstStyle>
+          <a:p>
+            <a:pPr marL="0" indent="0">
+              <a:buFont typeface="Arial" panose="020B0604020202020204" pitchFamily="34" charset="0"/>
+              <a:buNone/>
+            </a:pPr>
+            <a:r>
+              <a:rPr lang="en-US" sz="2000" dirty="0">
+                <a:solidFill>
+                  <a:schemeClr val="tx1"/>
+                </a:solidFill>
+              </a:rPr>
+              <a:t>Initialization of a queue</a:t>
+            </a:r>
+            <a:endParaRPr lang="en-IN" sz="2000" dirty="0">
+              <a:solidFill>
+                <a:schemeClr val="tx1"/>
+              </a:solidFill>
+            </a:endParaRPr>
+          </a:p>
+        </p:txBody>
+      </p:sp>
+      <p:pic>
+        <p:nvPicPr>
+          <p:cNvPr id="16" name="Picture 15">
+            <a:extLst>
+              <a:ext uri="{FF2B5EF4-FFF2-40B4-BE49-F238E27FC236}">
+                <a16:creationId xmlns:a16="http://schemas.microsoft.com/office/drawing/2014/main" id="{DA89D3A3-A685-266A-D31D-6A4B61053458}"/>
+              </a:ext>
+            </a:extLst>
+          </p:cNvPr>
+          <p:cNvPicPr>
+            <a:picLocks noChangeAspect="1"/>
+          </p:cNvPicPr>
+          <p:nvPr/>
+        </p:nvPicPr>
+        <p:blipFill>
+          <a:blip r:embed="rId5"/>
+          <a:stretch>
+            <a:fillRect/>
+          </a:stretch>
+        </p:blipFill>
+        <p:spPr>
+          <a:xfrm>
+            <a:off x="3744374" y="3124200"/>
+            <a:ext cx="3570826" cy="3648694"/>
+          </a:xfrm>
+          <a:prstGeom prst="rect">
+            <a:avLst/>
+          </a:prstGeom>
+        </p:spPr>
+      </p:pic>
+      <p:sp>
+        <p:nvSpPr>
+          <p:cNvPr id="17" name="Content Placeholder 2">
+            <a:extLst>
+              <a:ext uri="{FF2B5EF4-FFF2-40B4-BE49-F238E27FC236}">
+                <a16:creationId xmlns:a16="http://schemas.microsoft.com/office/drawing/2014/main" id="{8B6E83EA-DBD3-CF9E-7F82-DD1C42D63806}"/>
+              </a:ext>
+            </a:extLst>
+          </p:cNvPr>
+          <p:cNvSpPr txBox="1">
+            <a:spLocks/>
+          </p:cNvSpPr>
+          <p:nvPr/>
+        </p:nvSpPr>
+        <p:spPr bwMode="auto">
+          <a:xfrm>
+            <a:off x="5867400" y="5999286"/>
+            <a:ext cx="3179885" cy="381000"/>
+          </a:xfrm>
+          <a:prstGeom prst="rect">
+            <a:avLst/>
+          </a:prstGeom>
+          <a:noFill/>
+          <a:ln>
+            <a:noFill/>
+          </a:ln>
+          <a:extLst>
+            <a:ext uri="{909E8E84-426E-40DD-AFC4-6F175D3DCCD1}">
+              <a14:hiddenFill xmlns:a14="http://schemas.microsoft.com/office/drawing/2010/main">
+                <a:solidFill>
+                  <a:srgbClr val="FFFFFF"/>
+                </a:solidFill>
+              </a14:hiddenFill>
+            </a:ext>
+            <a:ext uri="{91240B29-F687-4F45-9708-019B960494DF}">
+              <a14:hiddenLine xmlns:a14="http://schemas.microsoft.com/office/drawing/2010/main" w="9525">
+                <a:solidFill>
+                  <a:srgbClr val="000000"/>
+                </a:solidFill>
+                <a:miter lim="800000"/>
+                <a:headEnd/>
+                <a:tailEnd/>
+              </a14:hiddenLine>
+            </a:ext>
+          </a:extLst>
+        </p:spPr>
+        <p:txBody>
+          <a:bodyPr vert="horz" wrap="square" lIns="91440" tIns="45720" rIns="91440" bIns="45720" numCol="1" anchor="t" anchorCtr="0" compatLnSpc="1">
+            <a:prstTxWarp prst="textNoShape">
+              <a:avLst/>
+            </a:prstTxWarp>
+          </a:bodyPr>
+          <a:lstStyle>
+            <a:lvl1pPr marL="342900" indent="-342900" algn="l" rtl="0" eaLnBrk="0" fontAlgn="base" hangingPunct="0">
+              <a:spcBef>
+                <a:spcPct val="20000"/>
+              </a:spcBef>
+              <a:spcAft>
+                <a:spcPct val="0"/>
+              </a:spcAft>
+              <a:buFont typeface="Arial" panose="020B0604020202020204" pitchFamily="34" charset="0"/>
+              <a:buChar char="•"/>
+              <a:defRPr sz="3200" kern="1200">
+                <a:solidFill>
+                  <a:schemeClr val="tx1">
+                    <a:lumMod val="50000"/>
+                    <a:lumOff val="50000"/>
+                  </a:schemeClr>
+                </a:solidFill>
+                <a:latin typeface="+mn-lt"/>
+                <a:ea typeface="+mn-ea"/>
+                <a:cs typeface="+mn-cs"/>
+              </a:defRPr>
+            </a:lvl1pPr>
+            <a:lvl2pPr marL="742950" indent="-285750" algn="l" rtl="0" eaLnBrk="0" fontAlgn="base" hangingPunct="0">
+              <a:spcBef>
+                <a:spcPct val="20000"/>
+              </a:spcBef>
+              <a:spcAft>
+                <a:spcPct val="0"/>
+              </a:spcAft>
+              <a:buFont typeface="Arial" panose="020B0604020202020204" pitchFamily="34" charset="0"/>
+              <a:buChar char="–"/>
+              <a:defRPr sz="2800" kern="1200">
+                <a:solidFill>
+                  <a:schemeClr val="tx1">
+                    <a:lumMod val="50000"/>
+                    <a:lumOff val="50000"/>
+                  </a:schemeClr>
+                </a:solidFill>
+                <a:latin typeface="+mn-lt"/>
+                <a:ea typeface="+mn-ea"/>
+                <a:cs typeface="+mn-cs"/>
+              </a:defRPr>
+            </a:lvl2pPr>
+            <a:lvl3pPr marL="1143000" indent="-228600" algn="l" rtl="0" eaLnBrk="0" fontAlgn="base" hangingPunct="0">
+              <a:spcBef>
+                <a:spcPct val="20000"/>
+              </a:spcBef>
+              <a:spcAft>
+                <a:spcPct val="0"/>
+              </a:spcAft>
+              <a:buFont typeface="Arial" panose="020B0604020202020204" pitchFamily="34" charset="0"/>
+              <a:buChar char="•"/>
+              <a:defRPr sz="2400" kern="1200">
+                <a:solidFill>
+                  <a:schemeClr val="tx1">
+                    <a:lumMod val="50000"/>
+                    <a:lumOff val="50000"/>
+                  </a:schemeClr>
+                </a:solidFill>
+                <a:latin typeface="+mn-lt"/>
+                <a:ea typeface="+mn-ea"/>
+                <a:cs typeface="+mn-cs"/>
+              </a:defRPr>
+            </a:lvl3pPr>
+            <a:lvl4pPr marL="1600200" indent="-228600" algn="l" rtl="0" eaLnBrk="0" fontAlgn="base" hangingPunct="0">
+              <a:spcBef>
+                <a:spcPct val="20000"/>
+              </a:spcBef>
+              <a:spcAft>
+                <a:spcPct val="0"/>
+              </a:spcAft>
+              <a:buFont typeface="Arial" panose="020B0604020202020204" pitchFamily="34" charset="0"/>
+              <a:buChar char="–"/>
+              <a:defRPr sz="2000" kern="1200">
+                <a:solidFill>
+                  <a:schemeClr val="tx1">
+                    <a:lumMod val="50000"/>
+                    <a:lumOff val="50000"/>
+                  </a:schemeClr>
+                </a:solidFill>
+                <a:latin typeface="+mn-lt"/>
+                <a:ea typeface="+mn-ea"/>
+                <a:cs typeface="+mn-cs"/>
+              </a:defRPr>
+            </a:lvl4pPr>
+            <a:lvl5pPr marL="2057400" indent="-228600" algn="l" rtl="0" eaLnBrk="0" fontAlgn="base" hangingPunct="0">
+              <a:spcBef>
+                <a:spcPct val="20000"/>
+              </a:spcBef>
+              <a:spcAft>
+                <a:spcPct val="0"/>
+              </a:spcAft>
+              <a:buFont typeface="Arial" panose="020B0604020202020204" pitchFamily="34" charset="0"/>
+              <a:buChar char="»"/>
+              <a:defRPr sz="2000" kern="1200">
+                <a:solidFill>
+                  <a:schemeClr val="tx1">
+                    <a:lumMod val="50000"/>
+                    <a:lumOff val="50000"/>
+                  </a:schemeClr>
+                </a:solidFill>
+                <a:latin typeface="+mn-lt"/>
+                <a:ea typeface="+mn-ea"/>
+                <a:cs typeface="+mn-cs"/>
+              </a:defRPr>
+            </a:lvl5pPr>
+            <a:lvl6pPr marL="2514600" indent="-228600" algn="l" defTabSz="914400" rtl="0" eaLnBrk="1" latinLnBrk="0" hangingPunct="1">
+              <a:spcBef>
+                <a:spcPct val="20000"/>
+              </a:spcBef>
+              <a:buFont typeface="Arial" pitchFamily="34" charset="0"/>
+              <a:buChar char="•"/>
+              <a:defRPr sz="2000" kern="1200">
+                <a:solidFill>
+                  <a:schemeClr val="tx1"/>
+                </a:solidFill>
+                <a:latin typeface="+mn-lt"/>
+                <a:ea typeface="+mn-ea"/>
+                <a:cs typeface="+mn-cs"/>
+              </a:defRPr>
+            </a:lvl6pPr>
+            <a:lvl7pPr marL="2971800" indent="-228600" algn="l" defTabSz="914400" rtl="0" eaLnBrk="1" latinLnBrk="0" hangingPunct="1">
+              <a:spcBef>
+                <a:spcPct val="20000"/>
+              </a:spcBef>
+              <a:buFont typeface="Arial" pitchFamily="34" charset="0"/>
+              <a:buChar char="•"/>
+              <a:defRPr sz="2000" kern="1200">
+                <a:solidFill>
+                  <a:schemeClr val="tx1"/>
+                </a:solidFill>
+                <a:latin typeface="+mn-lt"/>
+                <a:ea typeface="+mn-ea"/>
+                <a:cs typeface="+mn-cs"/>
+              </a:defRPr>
+            </a:lvl7pPr>
+            <a:lvl8pPr marL="3429000" indent="-228600" algn="l" defTabSz="914400" rtl="0" eaLnBrk="1" latinLnBrk="0" hangingPunct="1">
+              <a:spcBef>
+                <a:spcPct val="20000"/>
+              </a:spcBef>
+              <a:buFont typeface="Arial" pitchFamily="34" charset="0"/>
+              <a:buChar char="•"/>
+              <a:defRPr sz="2000" kern="1200">
+                <a:solidFill>
+                  <a:schemeClr val="tx1"/>
+                </a:solidFill>
+                <a:latin typeface="+mn-lt"/>
+                <a:ea typeface="+mn-ea"/>
+                <a:cs typeface="+mn-cs"/>
+              </a:defRPr>
+            </a:lvl8pPr>
+            <a:lvl9pPr marL="3886200" indent="-228600" algn="l" defTabSz="914400" rtl="0" eaLnBrk="1" latinLnBrk="0" hangingPunct="1">
+              <a:spcBef>
+                <a:spcPct val="20000"/>
+              </a:spcBef>
+              <a:buFont typeface="Arial" pitchFamily="34" charset="0"/>
+              <a:buChar char="•"/>
+              <a:defRPr sz="2000" kern="1200">
+                <a:solidFill>
+                  <a:schemeClr val="tx1"/>
+                </a:solidFill>
+                <a:latin typeface="+mn-lt"/>
+                <a:ea typeface="+mn-ea"/>
+                <a:cs typeface="+mn-cs"/>
+              </a:defRPr>
+            </a:lvl9pPr>
+          </a:lstStyle>
+          <a:p>
+            <a:pPr marL="0" indent="0">
+              <a:buFont typeface="Arial" panose="020B0604020202020204" pitchFamily="34" charset="0"/>
+              <a:buNone/>
+            </a:pPr>
+            <a:r>
+              <a:rPr lang="en-US" sz="2000" dirty="0">
+                <a:solidFill>
+                  <a:schemeClr val="tx1"/>
+                </a:solidFill>
+              </a:rPr>
+              <a:t>Adding an item to the queue</a:t>
+            </a:r>
+            <a:endParaRPr lang="en-IN" sz="2000" dirty="0">
+              <a:solidFill>
+                <a:schemeClr val="tx1"/>
+              </a:solidFill>
+            </a:endParaRPr>
+          </a:p>
+        </p:txBody>
+      </p:sp>
+    </p:spTree>
+    <p:extLst>
+      <p:ext uri="{BB962C8B-B14F-4D97-AF65-F5344CB8AC3E}">
+        <p14:creationId xmlns:p14="http://schemas.microsoft.com/office/powerpoint/2010/main" val="1975233674"/>
+      </p:ext>
+    </p:extLst>
+  </p:cSld>
+  <p:clrMapOvr>
+    <a:masterClrMapping/>
+  </p:clrMapOvr>
+  <p:timing>
+    <p:tnLst>
+      <p:par>
+        <p:cTn id="1" dur="indefinite" restart="never" nodeType="tmRoot">
+          <p:childTnLst>
+            <p:seq concurrent="1" nextAc="seek">
+              <p:cTn id="2" dur="indefinite" nodeType="mainSeq">
+                <p:childTnLst>
+                  <p:par>
+                    <p:cTn id="3" fill="hold">
+                      <p:stCondLst>
+                        <p:cond delay="indefinite"/>
+                      </p:stCondLst>
+                      <p:childTnLst>
+                        <p:par>
+                          <p:cTn id="4" fill="hold">
+                            <p:stCondLst>
+                              <p:cond delay="0"/>
+                            </p:stCondLst>
+                            <p:childTnLst>
+                              <p:par>
+                                <p:cTn id="5" presetID="1" presetClass="entr" presetSubtype="0" fill="hold" nodeType="clickEffect">
+                                  <p:stCondLst>
+                                    <p:cond delay="0"/>
+                                  </p:stCondLst>
+                                  <p:childTnLst>
+                                    <p:set>
+                                      <p:cBhvr>
+                                        <p:cTn id="6" dur="1" fill="hold">
+                                          <p:stCondLst>
+                                            <p:cond delay="0"/>
+                                          </p:stCondLst>
+                                        </p:cTn>
+                                        <p:tgtEl>
+                                          <p:spTgt spid="7"/>
+                                        </p:tgtEl>
+                                        <p:attrNameLst>
+                                          <p:attrName>style.visibility</p:attrName>
+                                        </p:attrNameLst>
+                                      </p:cBhvr>
+                                      <p:to>
+                                        <p:strVal val="visible"/>
+                                      </p:to>
+                                    </p:set>
+                                  </p:childTnLst>
+                                </p:cTn>
+                              </p:par>
+                            </p:childTnLst>
+                          </p:cTn>
+                        </p:par>
+                      </p:childTnLst>
+                    </p:cTn>
+                  </p:par>
+                  <p:par>
+                    <p:cTn id="7" fill="hold">
+                      <p:stCondLst>
+                        <p:cond delay="indefinite"/>
+                      </p:stCondLst>
+                      <p:childTnLst>
+                        <p:par>
+                          <p:cTn id="8" fill="hold">
+                            <p:stCondLst>
+                              <p:cond delay="0"/>
+                            </p:stCondLst>
+                            <p:childTnLst>
+                              <p:par>
+                                <p:cTn id="9" presetID="1" presetClass="entr" presetSubtype="0" fill="hold" grpId="0" nodeType="clickEffect">
+                                  <p:stCondLst>
+                                    <p:cond delay="0"/>
+                                  </p:stCondLst>
+                                  <p:childTnLst>
+                                    <p:set>
+                                      <p:cBhvr>
+                                        <p:cTn id="10" dur="1" fill="hold">
+                                          <p:stCondLst>
+                                            <p:cond delay="0"/>
+                                          </p:stCondLst>
+                                        </p:cTn>
+                                        <p:tgtEl>
+                                          <p:spTgt spid="8">
+                                            <p:txEl>
+                                              <p:pRg st="0" end="0"/>
+                                            </p:txEl>
+                                          </p:spTgt>
+                                        </p:tgtEl>
+                                        <p:attrNameLst>
+                                          <p:attrName>style.visibility</p:attrName>
+                                        </p:attrNameLst>
+                                      </p:cBhvr>
+                                      <p:to>
+                                        <p:strVal val="visible"/>
+                                      </p:to>
+                                    </p:set>
+                                  </p:childTnLst>
+                                </p:cTn>
+                              </p:par>
+                            </p:childTnLst>
+                          </p:cTn>
+                        </p:par>
+                      </p:childTnLst>
+                    </p:cTn>
+                  </p:par>
+                  <p:par>
+                    <p:cTn id="11" fill="hold">
+                      <p:stCondLst>
+                        <p:cond delay="indefinite"/>
+                      </p:stCondLst>
+                      <p:childTnLst>
+                        <p:par>
+                          <p:cTn id="12" fill="hold">
+                            <p:stCondLst>
+                              <p:cond delay="0"/>
+                            </p:stCondLst>
+                            <p:childTnLst>
+                              <p:par>
+                                <p:cTn id="13" presetID="1" presetClass="entr" presetSubtype="0" fill="hold" nodeType="clickEffect">
+                                  <p:stCondLst>
+                                    <p:cond delay="0"/>
+                                  </p:stCondLst>
+                                  <p:childTnLst>
+                                    <p:set>
+                                      <p:cBhvr>
+                                        <p:cTn id="14" dur="1" fill="hold">
+                                          <p:stCondLst>
+                                            <p:cond delay="0"/>
+                                          </p:stCondLst>
+                                        </p:cTn>
+                                        <p:tgtEl>
+                                          <p:spTgt spid="10"/>
+                                        </p:tgtEl>
+                                        <p:attrNameLst>
+                                          <p:attrName>style.visibility</p:attrName>
+                                        </p:attrNameLst>
+                                      </p:cBhvr>
+                                      <p:to>
+                                        <p:strVal val="visible"/>
+                                      </p:to>
+                                    </p:set>
+                                  </p:childTnLst>
+                                </p:cTn>
+                              </p:par>
+                            </p:childTnLst>
+                          </p:cTn>
+                        </p:par>
+                      </p:childTnLst>
+                    </p:cTn>
+                  </p:par>
+                  <p:par>
+                    <p:cTn id="15" fill="hold">
+                      <p:stCondLst>
+                        <p:cond delay="indefinite"/>
+                      </p:stCondLst>
+                      <p:childTnLst>
+                        <p:par>
+                          <p:cTn id="16" fill="hold">
+                            <p:stCondLst>
+                              <p:cond delay="0"/>
+                            </p:stCondLst>
+                            <p:childTnLst>
+                              <p:par>
+                                <p:cTn id="17" presetID="1" presetClass="entr" presetSubtype="0" fill="hold" grpId="0" nodeType="clickEffect">
+                                  <p:stCondLst>
+                                    <p:cond delay="0"/>
+                                  </p:stCondLst>
+                                  <p:childTnLst>
+                                    <p:set>
+                                      <p:cBhvr>
+                                        <p:cTn id="18" dur="1" fill="hold">
+                                          <p:stCondLst>
+                                            <p:cond delay="0"/>
+                                          </p:stCondLst>
+                                        </p:cTn>
+                                        <p:tgtEl>
+                                          <p:spTgt spid="11">
+                                            <p:txEl>
+                                              <p:pRg st="0" end="0"/>
+                                            </p:txEl>
+                                          </p:spTgt>
+                                        </p:tgtEl>
+                                        <p:attrNameLst>
+                                          <p:attrName>style.visibility</p:attrName>
+                                        </p:attrNameLst>
+                                      </p:cBhvr>
+                                      <p:to>
+                                        <p:strVal val="visible"/>
+                                      </p:to>
+                                    </p:set>
+                                  </p:childTnLst>
+                                </p:cTn>
+                              </p:par>
+                            </p:childTnLst>
+                          </p:cTn>
+                        </p:par>
+                      </p:childTnLst>
+                    </p:cTn>
+                  </p:par>
+                  <p:par>
+                    <p:cTn id="19" fill="hold">
+                      <p:stCondLst>
+                        <p:cond delay="indefinite"/>
+                      </p:stCondLst>
+                      <p:childTnLst>
+                        <p:par>
+                          <p:cTn id="20" fill="hold">
+                            <p:stCondLst>
+                              <p:cond delay="0"/>
+                            </p:stCondLst>
+                            <p:childTnLst>
+                              <p:par>
+                                <p:cTn id="21" presetID="1" presetClass="entr" presetSubtype="0" fill="hold" nodeType="clickEffect">
+                                  <p:stCondLst>
+                                    <p:cond delay="0"/>
+                                  </p:stCondLst>
+                                  <p:childTnLst>
+                                    <p:set>
+                                      <p:cBhvr>
+                                        <p:cTn id="22" dur="1" fill="hold">
+                                          <p:stCondLst>
+                                            <p:cond delay="0"/>
+                                          </p:stCondLst>
+                                        </p:cTn>
+                                        <p:tgtEl>
+                                          <p:spTgt spid="13"/>
+                                        </p:tgtEl>
+                                        <p:attrNameLst>
+                                          <p:attrName>style.visibility</p:attrName>
+                                        </p:attrNameLst>
+                                      </p:cBhvr>
+                                      <p:to>
+                                        <p:strVal val="visible"/>
+                                      </p:to>
+                                    </p:set>
+                                  </p:childTnLst>
+                                </p:cTn>
+                              </p:par>
+                            </p:childTnLst>
+                          </p:cTn>
+                        </p:par>
+                      </p:childTnLst>
+                    </p:cTn>
+                  </p:par>
+                  <p:par>
+                    <p:cTn id="23" fill="hold">
+                      <p:stCondLst>
+                        <p:cond delay="indefinite"/>
+                      </p:stCondLst>
+                      <p:childTnLst>
+                        <p:par>
+                          <p:cTn id="24" fill="hold">
+                            <p:stCondLst>
+                              <p:cond delay="0"/>
+                            </p:stCondLst>
+                            <p:childTnLst>
+                              <p:par>
+                                <p:cTn id="25" presetID="1" presetClass="entr" presetSubtype="0" fill="hold" grpId="0" nodeType="clickEffect">
+                                  <p:stCondLst>
+                                    <p:cond delay="0"/>
+                                  </p:stCondLst>
+                                  <p:childTnLst>
+                                    <p:set>
+                                      <p:cBhvr>
+                                        <p:cTn id="26" dur="1" fill="hold">
+                                          <p:stCondLst>
+                                            <p:cond delay="0"/>
+                                          </p:stCondLst>
+                                        </p:cTn>
+                                        <p:tgtEl>
+                                          <p:spTgt spid="14">
+                                            <p:txEl>
+                                              <p:pRg st="0" end="0"/>
+                                            </p:txEl>
+                                          </p:spTgt>
+                                        </p:tgtEl>
+                                        <p:attrNameLst>
+                                          <p:attrName>style.visibility</p:attrName>
+                                        </p:attrNameLst>
+                                      </p:cBhvr>
+                                      <p:to>
+                                        <p:strVal val="visible"/>
+                                      </p:to>
+                                    </p:set>
+                                  </p:childTnLst>
+                                </p:cTn>
+                              </p:par>
+                            </p:childTnLst>
+                          </p:cTn>
+                        </p:par>
+                      </p:childTnLst>
+                    </p:cTn>
+                  </p:par>
+                  <p:par>
+                    <p:cTn id="27" fill="hold">
+                      <p:stCondLst>
+                        <p:cond delay="indefinite"/>
+                      </p:stCondLst>
+                      <p:childTnLst>
+                        <p:par>
+                          <p:cTn id="28" fill="hold">
+                            <p:stCondLst>
+                              <p:cond delay="0"/>
+                            </p:stCondLst>
+                            <p:childTnLst>
+                              <p:par>
+                                <p:cTn id="29" presetID="1" presetClass="entr" presetSubtype="0" fill="hold" nodeType="clickEffect">
+                                  <p:stCondLst>
+                                    <p:cond delay="0"/>
+                                  </p:stCondLst>
+                                  <p:childTnLst>
+                                    <p:set>
+                                      <p:cBhvr>
+                                        <p:cTn id="30" dur="1" fill="hold">
+                                          <p:stCondLst>
+                                            <p:cond delay="0"/>
+                                          </p:stCondLst>
+                                        </p:cTn>
+                                        <p:tgtEl>
+                                          <p:spTgt spid="16"/>
+                                        </p:tgtEl>
+                                        <p:attrNameLst>
+                                          <p:attrName>style.visibility</p:attrName>
+                                        </p:attrNameLst>
+                                      </p:cBhvr>
+                                      <p:to>
+                                        <p:strVal val="visible"/>
+                                      </p:to>
+                                    </p:set>
+                                  </p:childTnLst>
+                                </p:cTn>
+                              </p:par>
+                            </p:childTnLst>
+                          </p:cTn>
+                        </p:par>
+                      </p:childTnLst>
+                    </p:cTn>
+                  </p:par>
+                  <p:par>
+                    <p:cTn id="31" fill="hold">
+                      <p:stCondLst>
+                        <p:cond delay="indefinite"/>
+                      </p:stCondLst>
+                      <p:childTnLst>
+                        <p:par>
+                          <p:cTn id="32" fill="hold">
+                            <p:stCondLst>
+                              <p:cond delay="0"/>
+                            </p:stCondLst>
+                            <p:childTnLst>
+                              <p:par>
+                                <p:cTn id="33" presetID="1" presetClass="entr" presetSubtype="0" fill="hold" grpId="0" nodeType="clickEffect">
+                                  <p:stCondLst>
+                                    <p:cond delay="0"/>
+                                  </p:stCondLst>
+                                  <p:childTnLst>
+                                    <p:set>
+                                      <p:cBhvr>
+                                        <p:cTn id="34" dur="1" fill="hold">
+                                          <p:stCondLst>
+                                            <p:cond delay="0"/>
+                                          </p:stCondLst>
+                                        </p:cTn>
+                                        <p:tgtEl>
+                                          <p:spTgt spid="17">
+                                            <p:txEl>
+                                              <p:pRg st="0" end="0"/>
+                                            </p:txEl>
+                                          </p:spTgt>
+                                        </p:tgtEl>
+                                        <p:attrNameLst>
+                                          <p:attrName>style.visibility</p:attrName>
+                                        </p:attrNameLst>
+                                      </p:cBhvr>
+                                      <p:to>
+                                        <p:strVal val="visible"/>
+                                      </p:to>
+                                    </p:set>
+                                  </p:childTnLst>
+                                </p:cTn>
+                              </p:par>
+                            </p:childTnLst>
+                          </p:cTn>
+                        </p:par>
+                      </p:childTnLst>
+                    </p:cTn>
+                  </p:par>
+                </p:childTnLst>
+              </p:cTn>
+              <p:prevCondLst>
+                <p:cond evt="onPrev" delay="0">
+                  <p:tgtEl>
+                    <p:sldTgt/>
+                  </p:tgtEl>
+                </p:cond>
+              </p:prevCondLst>
+              <p:nextCondLst>
+                <p:cond evt="onNext" delay="0">
+                  <p:tgtEl>
+                    <p:sldTgt/>
+                  </p:tgtEl>
+                </p:cond>
+              </p:nextCondLst>
+            </p:seq>
+          </p:childTnLst>
+        </p:cTn>
+      </p:par>
+    </p:tnLst>
+    <p:bldLst>
+      <p:bldP spid="8" grpId="0" build="p"/>
+      <p:bldP spid="11" grpId="0" build="p"/>
+      <p:bldP spid="14" grpId="0" build="p"/>
+      <p:bldP spid="17" grpId="0" build="p"/>
+    </p:bldLst>
+  </p:timing>
+</p:sld>
+</file>
+
+<file path=ppt/slides/slide11.xml><?xml version="1.0" encoding="utf-8"?>
+<p:sld xmlns:a="http://schemas.openxmlformats.org/drawingml/2006/main" xmlns:r="http://schemas.openxmlformats.org/officeDocument/2006/relationships" xmlns:p="http://schemas.openxmlformats.org/presentationml/2006/main">
+  <p:cSld>
+    <p:spTree>
+      <p:nvGrpSpPr>
+        <p:cNvPr id="1" name=""/>
+        <p:cNvGrpSpPr/>
+        <p:nvPr/>
+      </p:nvGrpSpPr>
+      <p:grpSpPr>
+        <a:xfrm>
+          <a:off x="0" y="0"/>
+          <a:ext cx="0" cy="0"/>
+          <a:chOff x="0" y="0"/>
+          <a:chExt cx="0" cy="0"/>
+        </a:xfrm>
+      </p:grpSpPr>
+      <p:sp>
+        <p:nvSpPr>
+          <p:cNvPr id="2" name="Title 1">
+            <a:extLst>
+              <a:ext uri="{FF2B5EF4-FFF2-40B4-BE49-F238E27FC236}">
+                <a16:creationId xmlns:a16="http://schemas.microsoft.com/office/drawing/2014/main" id="{A4CA0BBB-FA60-F3F1-0DFA-3163A35CB535}"/>
+              </a:ext>
+            </a:extLst>
+          </p:cNvPr>
+          <p:cNvSpPr>
+            <a:spLocks noGrp="1"/>
+          </p:cNvSpPr>
+          <p:nvPr>
+            <p:ph type="title"/>
+          </p:nvPr>
+        </p:nvSpPr>
+        <p:spPr/>
+        <p:txBody>
+          <a:bodyPr/>
+          <a:lstStyle/>
+          <a:p>
+            <a:r>
+              <a:rPr lang="en-US" dirty="0"/>
+              <a:t>Message passing</a:t>
+            </a:r>
+            <a:endParaRPr lang="en-IN" dirty="0"/>
+          </a:p>
+        </p:txBody>
+      </p:sp>
+      <p:sp>
+        <p:nvSpPr>
+          <p:cNvPr id="4" name="Date Placeholder 3">
+            <a:extLst>
+              <a:ext uri="{FF2B5EF4-FFF2-40B4-BE49-F238E27FC236}">
+                <a16:creationId xmlns:a16="http://schemas.microsoft.com/office/drawing/2014/main" id="{DB3F0935-25EB-2D39-DAAB-30ECD3B2E5AD}"/>
+              </a:ext>
+            </a:extLst>
+          </p:cNvPr>
+          <p:cNvSpPr>
+            <a:spLocks noGrp="1"/>
+          </p:cNvSpPr>
+          <p:nvPr>
+            <p:ph type="dt" sz="half" idx="10"/>
+          </p:nvPr>
+        </p:nvSpPr>
+        <p:spPr/>
+        <p:txBody>
+          <a:bodyPr/>
+          <a:lstStyle/>
+          <a:p>
+            <a:pPr>
+              <a:defRPr/>
+            </a:pPr>
+            <a:r>
+              <a:rPr lang="en-US"/>
+              <a:t>21/12/2020</a:t>
+            </a:r>
+          </a:p>
+        </p:txBody>
+      </p:sp>
+      <p:sp>
+        <p:nvSpPr>
+          <p:cNvPr id="5" name="Slide Number Placeholder 4">
+            <a:extLst>
+              <a:ext uri="{FF2B5EF4-FFF2-40B4-BE49-F238E27FC236}">
+                <a16:creationId xmlns:a16="http://schemas.microsoft.com/office/drawing/2014/main" id="{2F881EE8-3BA7-295B-60C4-9941744670D1}"/>
+              </a:ext>
+            </a:extLst>
+          </p:cNvPr>
+          <p:cNvSpPr>
+            <a:spLocks noGrp="1"/>
+          </p:cNvSpPr>
+          <p:nvPr>
+            <p:ph type="sldNum" sz="quarter" idx="12"/>
+          </p:nvPr>
+        </p:nvSpPr>
+        <p:spPr/>
+        <p:txBody>
+          <a:bodyPr/>
+          <a:lstStyle/>
+          <a:p>
+            <a:pPr>
+              <a:defRPr/>
+            </a:pPr>
+            <a:fld id="{CA887A73-1AE0-46F8-856A-18EA1CF30A1B}" type="slidenum">
+              <a:rPr lang="en-US" altLang="en-US" smtClean="0"/>
+              <a:pPr>
+                <a:defRPr/>
+              </a:pPr>
+              <a:t>11</a:t>
+            </a:fld>
+            <a:endParaRPr lang="en-US" altLang="en-US"/>
+          </a:p>
+        </p:txBody>
+      </p:sp>
+      <p:pic>
+        <p:nvPicPr>
+          <p:cNvPr id="6" name="Picture 5">
+            <a:extLst>
+              <a:ext uri="{FF2B5EF4-FFF2-40B4-BE49-F238E27FC236}">
+                <a16:creationId xmlns:a16="http://schemas.microsoft.com/office/drawing/2014/main" id="{8BE226B4-38D2-3B4A-1BD1-48BC986CAA85}"/>
+              </a:ext>
+            </a:extLst>
+          </p:cNvPr>
+          <p:cNvPicPr>
+            <a:picLocks noChangeAspect="1"/>
+          </p:cNvPicPr>
+          <p:nvPr/>
+        </p:nvPicPr>
+        <p:blipFill>
+          <a:blip r:embed="rId2"/>
+          <a:stretch>
+            <a:fillRect/>
+          </a:stretch>
+        </p:blipFill>
+        <p:spPr>
+          <a:xfrm>
+            <a:off x="152400" y="1447800"/>
+            <a:ext cx="3570826" cy="3648694"/>
+          </a:xfrm>
+          <a:prstGeom prst="rect">
+            <a:avLst/>
+          </a:prstGeom>
+        </p:spPr>
+      </p:pic>
+      <p:sp>
+        <p:nvSpPr>
+          <p:cNvPr id="7" name="Content Placeholder 2">
+            <a:extLst>
+              <a:ext uri="{FF2B5EF4-FFF2-40B4-BE49-F238E27FC236}">
+                <a16:creationId xmlns:a16="http://schemas.microsoft.com/office/drawing/2014/main" id="{DD505C8C-4440-8891-4335-7479F195FE9B}"/>
+              </a:ext>
+            </a:extLst>
+          </p:cNvPr>
+          <p:cNvSpPr txBox="1">
+            <a:spLocks/>
+          </p:cNvSpPr>
+          <p:nvPr/>
+        </p:nvSpPr>
+        <p:spPr bwMode="auto">
+          <a:xfrm>
+            <a:off x="76200" y="5040923"/>
+            <a:ext cx="3179885" cy="381000"/>
+          </a:xfrm>
+          <a:prstGeom prst="rect">
+            <a:avLst/>
+          </a:prstGeom>
+          <a:noFill/>
+          <a:ln>
+            <a:noFill/>
+          </a:ln>
+          <a:extLst>
+            <a:ext uri="{909E8E84-426E-40DD-AFC4-6F175D3DCCD1}">
+              <a14:hiddenFill xmlns:a14="http://schemas.microsoft.com/office/drawing/2010/main">
+                <a:solidFill>
+                  <a:srgbClr val="FFFFFF"/>
+                </a:solidFill>
+              </a14:hiddenFill>
+            </a:ext>
+            <a:ext uri="{91240B29-F687-4F45-9708-019B960494DF}">
+              <a14:hiddenLine xmlns:a14="http://schemas.microsoft.com/office/drawing/2010/main" w="9525">
+                <a:solidFill>
+                  <a:srgbClr val="000000"/>
+                </a:solidFill>
+                <a:miter lim="800000"/>
+                <a:headEnd/>
+                <a:tailEnd/>
+              </a14:hiddenLine>
+            </a:ext>
+          </a:extLst>
+        </p:spPr>
+        <p:txBody>
+          <a:bodyPr vert="horz" wrap="square" lIns="91440" tIns="45720" rIns="91440" bIns="45720" numCol="1" anchor="t" anchorCtr="0" compatLnSpc="1">
+            <a:prstTxWarp prst="textNoShape">
+              <a:avLst/>
+            </a:prstTxWarp>
+          </a:bodyPr>
+          <a:lstStyle>
+            <a:lvl1pPr marL="342900" indent="-342900" algn="l" rtl="0" eaLnBrk="0" fontAlgn="base" hangingPunct="0">
+              <a:spcBef>
+                <a:spcPct val="20000"/>
+              </a:spcBef>
+              <a:spcAft>
+                <a:spcPct val="0"/>
+              </a:spcAft>
+              <a:buFont typeface="Arial" panose="020B0604020202020204" pitchFamily="34" charset="0"/>
+              <a:buChar char="•"/>
+              <a:defRPr sz="3200" kern="1200">
+                <a:solidFill>
+                  <a:schemeClr val="tx1">
+                    <a:lumMod val="50000"/>
+                    <a:lumOff val="50000"/>
+                  </a:schemeClr>
+                </a:solidFill>
+                <a:latin typeface="+mn-lt"/>
+                <a:ea typeface="+mn-ea"/>
+                <a:cs typeface="+mn-cs"/>
+              </a:defRPr>
+            </a:lvl1pPr>
+            <a:lvl2pPr marL="742950" indent="-285750" algn="l" rtl="0" eaLnBrk="0" fontAlgn="base" hangingPunct="0">
+              <a:spcBef>
+                <a:spcPct val="20000"/>
+              </a:spcBef>
+              <a:spcAft>
+                <a:spcPct val="0"/>
+              </a:spcAft>
+              <a:buFont typeface="Arial" panose="020B0604020202020204" pitchFamily="34" charset="0"/>
+              <a:buChar char="–"/>
+              <a:defRPr sz="2800" kern="1200">
+                <a:solidFill>
+                  <a:schemeClr val="tx1">
+                    <a:lumMod val="50000"/>
+                    <a:lumOff val="50000"/>
+                  </a:schemeClr>
+                </a:solidFill>
+                <a:latin typeface="+mn-lt"/>
+                <a:ea typeface="+mn-ea"/>
+                <a:cs typeface="+mn-cs"/>
+              </a:defRPr>
+            </a:lvl2pPr>
+            <a:lvl3pPr marL="1143000" indent="-228600" algn="l" rtl="0" eaLnBrk="0" fontAlgn="base" hangingPunct="0">
+              <a:spcBef>
+                <a:spcPct val="20000"/>
+              </a:spcBef>
+              <a:spcAft>
+                <a:spcPct val="0"/>
+              </a:spcAft>
+              <a:buFont typeface="Arial" panose="020B0604020202020204" pitchFamily="34" charset="0"/>
+              <a:buChar char="•"/>
+              <a:defRPr sz="2400" kern="1200">
+                <a:solidFill>
+                  <a:schemeClr val="tx1">
+                    <a:lumMod val="50000"/>
+                    <a:lumOff val="50000"/>
+                  </a:schemeClr>
+                </a:solidFill>
+                <a:latin typeface="+mn-lt"/>
+                <a:ea typeface="+mn-ea"/>
+                <a:cs typeface="+mn-cs"/>
+              </a:defRPr>
+            </a:lvl3pPr>
+            <a:lvl4pPr marL="1600200" indent="-228600" algn="l" rtl="0" eaLnBrk="0" fontAlgn="base" hangingPunct="0">
+              <a:spcBef>
+                <a:spcPct val="20000"/>
+              </a:spcBef>
+              <a:spcAft>
+                <a:spcPct val="0"/>
+              </a:spcAft>
+              <a:buFont typeface="Arial" panose="020B0604020202020204" pitchFamily="34" charset="0"/>
+              <a:buChar char="–"/>
+              <a:defRPr sz="2000" kern="1200">
+                <a:solidFill>
+                  <a:schemeClr val="tx1">
+                    <a:lumMod val="50000"/>
+                    <a:lumOff val="50000"/>
+                  </a:schemeClr>
+                </a:solidFill>
+                <a:latin typeface="+mn-lt"/>
+                <a:ea typeface="+mn-ea"/>
+                <a:cs typeface="+mn-cs"/>
+              </a:defRPr>
+            </a:lvl4pPr>
+            <a:lvl5pPr marL="2057400" indent="-228600" algn="l" rtl="0" eaLnBrk="0" fontAlgn="base" hangingPunct="0">
+              <a:spcBef>
+                <a:spcPct val="20000"/>
+              </a:spcBef>
+              <a:spcAft>
+                <a:spcPct val="0"/>
+              </a:spcAft>
+              <a:buFont typeface="Arial" panose="020B0604020202020204" pitchFamily="34" charset="0"/>
+              <a:buChar char="»"/>
+              <a:defRPr sz="2000" kern="1200">
+                <a:solidFill>
+                  <a:schemeClr val="tx1">
+                    <a:lumMod val="50000"/>
+                    <a:lumOff val="50000"/>
+                  </a:schemeClr>
+                </a:solidFill>
+                <a:latin typeface="+mn-lt"/>
+                <a:ea typeface="+mn-ea"/>
+                <a:cs typeface="+mn-cs"/>
+              </a:defRPr>
+            </a:lvl5pPr>
+            <a:lvl6pPr marL="2514600" indent="-228600" algn="l" defTabSz="914400" rtl="0" eaLnBrk="1" latinLnBrk="0" hangingPunct="1">
+              <a:spcBef>
+                <a:spcPct val="20000"/>
+              </a:spcBef>
+              <a:buFont typeface="Arial" pitchFamily="34" charset="0"/>
+              <a:buChar char="•"/>
+              <a:defRPr sz="2000" kern="1200">
+                <a:solidFill>
+                  <a:schemeClr val="tx1"/>
+                </a:solidFill>
+                <a:latin typeface="+mn-lt"/>
+                <a:ea typeface="+mn-ea"/>
+                <a:cs typeface="+mn-cs"/>
+              </a:defRPr>
+            </a:lvl6pPr>
+            <a:lvl7pPr marL="2971800" indent="-228600" algn="l" defTabSz="914400" rtl="0" eaLnBrk="1" latinLnBrk="0" hangingPunct="1">
+              <a:spcBef>
+                <a:spcPct val="20000"/>
+              </a:spcBef>
+              <a:buFont typeface="Arial" pitchFamily="34" charset="0"/>
+              <a:buChar char="•"/>
+              <a:defRPr sz="2000" kern="1200">
+                <a:solidFill>
+                  <a:schemeClr val="tx1"/>
+                </a:solidFill>
+                <a:latin typeface="+mn-lt"/>
+                <a:ea typeface="+mn-ea"/>
+                <a:cs typeface="+mn-cs"/>
+              </a:defRPr>
+            </a:lvl7pPr>
+            <a:lvl8pPr marL="3429000" indent="-228600" algn="l" defTabSz="914400" rtl="0" eaLnBrk="1" latinLnBrk="0" hangingPunct="1">
+              <a:spcBef>
+                <a:spcPct val="20000"/>
+              </a:spcBef>
+              <a:buFont typeface="Arial" pitchFamily="34" charset="0"/>
+              <a:buChar char="•"/>
+              <a:defRPr sz="2000" kern="1200">
+                <a:solidFill>
+                  <a:schemeClr val="tx1"/>
+                </a:solidFill>
+                <a:latin typeface="+mn-lt"/>
+                <a:ea typeface="+mn-ea"/>
+                <a:cs typeface="+mn-cs"/>
+              </a:defRPr>
+            </a:lvl8pPr>
+            <a:lvl9pPr marL="3886200" indent="-228600" algn="l" defTabSz="914400" rtl="0" eaLnBrk="1" latinLnBrk="0" hangingPunct="1">
+              <a:spcBef>
+                <a:spcPct val="20000"/>
+              </a:spcBef>
+              <a:buFont typeface="Arial" pitchFamily="34" charset="0"/>
+              <a:buChar char="•"/>
+              <a:defRPr sz="2000" kern="1200">
+                <a:solidFill>
+                  <a:schemeClr val="tx1"/>
+                </a:solidFill>
+                <a:latin typeface="+mn-lt"/>
+                <a:ea typeface="+mn-ea"/>
+                <a:cs typeface="+mn-cs"/>
+              </a:defRPr>
+            </a:lvl9pPr>
+          </a:lstStyle>
+          <a:p>
+            <a:pPr marL="0" indent="0">
+              <a:buFont typeface="Arial" panose="020B0604020202020204" pitchFamily="34" charset="0"/>
+              <a:buNone/>
+            </a:pPr>
+            <a:r>
+              <a:rPr lang="en-US" sz="2000" dirty="0">
+                <a:solidFill>
+                  <a:schemeClr val="tx1"/>
+                </a:solidFill>
+              </a:rPr>
+              <a:t>Adding an item to the queue</a:t>
+            </a:r>
+            <a:endParaRPr lang="en-IN" sz="2000" dirty="0">
+              <a:solidFill>
+                <a:schemeClr val="tx1"/>
+              </a:solidFill>
+            </a:endParaRPr>
+          </a:p>
+        </p:txBody>
+      </p:sp>
+      <p:pic>
+        <p:nvPicPr>
+          <p:cNvPr id="9" name="Picture 8">
+            <a:extLst>
+              <a:ext uri="{FF2B5EF4-FFF2-40B4-BE49-F238E27FC236}">
+                <a16:creationId xmlns:a16="http://schemas.microsoft.com/office/drawing/2014/main" id="{8D2458F2-71C4-CE76-8EF5-5AE810AFF67D}"/>
+              </a:ext>
+            </a:extLst>
+          </p:cNvPr>
+          <p:cNvPicPr>
+            <a:picLocks noChangeAspect="1"/>
+          </p:cNvPicPr>
+          <p:nvPr/>
+        </p:nvPicPr>
+        <p:blipFill>
+          <a:blip r:embed="rId3"/>
+          <a:stretch>
+            <a:fillRect/>
+          </a:stretch>
+        </p:blipFill>
+        <p:spPr>
+          <a:xfrm>
+            <a:off x="4114800" y="1447800"/>
+            <a:ext cx="3570826" cy="3672206"/>
+          </a:xfrm>
+          <a:prstGeom prst="rect">
+            <a:avLst/>
+          </a:prstGeom>
+        </p:spPr>
+      </p:pic>
+      <p:sp>
+        <p:nvSpPr>
+          <p:cNvPr id="10" name="Content Placeholder 2">
+            <a:extLst>
+              <a:ext uri="{FF2B5EF4-FFF2-40B4-BE49-F238E27FC236}">
+                <a16:creationId xmlns:a16="http://schemas.microsoft.com/office/drawing/2014/main" id="{8E44FCA2-18E8-476F-D919-D19B19C8D711}"/>
+              </a:ext>
+            </a:extLst>
+          </p:cNvPr>
+          <p:cNvSpPr txBox="1">
+            <a:spLocks/>
+          </p:cNvSpPr>
+          <p:nvPr/>
+        </p:nvSpPr>
+        <p:spPr bwMode="auto">
+          <a:xfrm>
+            <a:off x="4114800" y="5096494"/>
+            <a:ext cx="3810000" cy="381000"/>
+          </a:xfrm>
+          <a:prstGeom prst="rect">
+            <a:avLst/>
+          </a:prstGeom>
+          <a:noFill/>
+          <a:ln>
+            <a:noFill/>
+          </a:ln>
+          <a:extLst>
+            <a:ext uri="{909E8E84-426E-40DD-AFC4-6F175D3DCCD1}">
+              <a14:hiddenFill xmlns:a14="http://schemas.microsoft.com/office/drawing/2010/main">
+                <a:solidFill>
+                  <a:srgbClr val="FFFFFF"/>
+                </a:solidFill>
+              </a14:hiddenFill>
+            </a:ext>
+            <a:ext uri="{91240B29-F687-4F45-9708-019B960494DF}">
+              <a14:hiddenLine xmlns:a14="http://schemas.microsoft.com/office/drawing/2010/main" w="9525">
+                <a:solidFill>
+                  <a:srgbClr val="000000"/>
+                </a:solidFill>
+                <a:miter lim="800000"/>
+                <a:headEnd/>
+                <a:tailEnd/>
+              </a14:hiddenLine>
+            </a:ext>
+          </a:extLst>
+        </p:spPr>
+        <p:txBody>
+          <a:bodyPr vert="horz" wrap="square" lIns="91440" tIns="45720" rIns="91440" bIns="45720" numCol="1" anchor="t" anchorCtr="0" compatLnSpc="1">
+            <a:prstTxWarp prst="textNoShape">
+              <a:avLst/>
+            </a:prstTxWarp>
+          </a:bodyPr>
+          <a:lstStyle>
+            <a:lvl1pPr marL="342900" indent="-342900" algn="l" rtl="0" eaLnBrk="0" fontAlgn="base" hangingPunct="0">
+              <a:spcBef>
+                <a:spcPct val="20000"/>
+              </a:spcBef>
+              <a:spcAft>
+                <a:spcPct val="0"/>
+              </a:spcAft>
+              <a:buFont typeface="Arial" panose="020B0604020202020204" pitchFamily="34" charset="0"/>
+              <a:buChar char="•"/>
+              <a:defRPr sz="3200" kern="1200">
+                <a:solidFill>
+                  <a:schemeClr val="tx1">
+                    <a:lumMod val="50000"/>
+                    <a:lumOff val="50000"/>
+                  </a:schemeClr>
+                </a:solidFill>
+                <a:latin typeface="+mn-lt"/>
+                <a:ea typeface="+mn-ea"/>
+                <a:cs typeface="+mn-cs"/>
+              </a:defRPr>
+            </a:lvl1pPr>
+            <a:lvl2pPr marL="742950" indent="-285750" algn="l" rtl="0" eaLnBrk="0" fontAlgn="base" hangingPunct="0">
+              <a:spcBef>
+                <a:spcPct val="20000"/>
+              </a:spcBef>
+              <a:spcAft>
+                <a:spcPct val="0"/>
+              </a:spcAft>
+              <a:buFont typeface="Arial" panose="020B0604020202020204" pitchFamily="34" charset="0"/>
+              <a:buChar char="–"/>
+              <a:defRPr sz="2800" kern="1200">
+                <a:solidFill>
+                  <a:schemeClr val="tx1">
+                    <a:lumMod val="50000"/>
+                    <a:lumOff val="50000"/>
+                  </a:schemeClr>
+                </a:solidFill>
+                <a:latin typeface="+mn-lt"/>
+                <a:ea typeface="+mn-ea"/>
+                <a:cs typeface="+mn-cs"/>
+              </a:defRPr>
+            </a:lvl2pPr>
+            <a:lvl3pPr marL="1143000" indent="-228600" algn="l" rtl="0" eaLnBrk="0" fontAlgn="base" hangingPunct="0">
+              <a:spcBef>
+                <a:spcPct val="20000"/>
+              </a:spcBef>
+              <a:spcAft>
+                <a:spcPct val="0"/>
+              </a:spcAft>
+              <a:buFont typeface="Arial" panose="020B0604020202020204" pitchFamily="34" charset="0"/>
+              <a:buChar char="•"/>
+              <a:defRPr sz="2400" kern="1200">
+                <a:solidFill>
+                  <a:schemeClr val="tx1">
+                    <a:lumMod val="50000"/>
+                    <a:lumOff val="50000"/>
+                  </a:schemeClr>
+                </a:solidFill>
+                <a:latin typeface="+mn-lt"/>
+                <a:ea typeface="+mn-ea"/>
+                <a:cs typeface="+mn-cs"/>
+              </a:defRPr>
+            </a:lvl3pPr>
+            <a:lvl4pPr marL="1600200" indent="-228600" algn="l" rtl="0" eaLnBrk="0" fontAlgn="base" hangingPunct="0">
+              <a:spcBef>
+                <a:spcPct val="20000"/>
+              </a:spcBef>
+              <a:spcAft>
+                <a:spcPct val="0"/>
+              </a:spcAft>
+              <a:buFont typeface="Arial" panose="020B0604020202020204" pitchFamily="34" charset="0"/>
+              <a:buChar char="–"/>
+              <a:defRPr sz="2000" kern="1200">
+                <a:solidFill>
+                  <a:schemeClr val="tx1">
+                    <a:lumMod val="50000"/>
+                    <a:lumOff val="50000"/>
+                  </a:schemeClr>
+                </a:solidFill>
+                <a:latin typeface="+mn-lt"/>
+                <a:ea typeface="+mn-ea"/>
+                <a:cs typeface="+mn-cs"/>
+              </a:defRPr>
+            </a:lvl4pPr>
+            <a:lvl5pPr marL="2057400" indent="-228600" algn="l" rtl="0" eaLnBrk="0" fontAlgn="base" hangingPunct="0">
+              <a:spcBef>
+                <a:spcPct val="20000"/>
+              </a:spcBef>
+              <a:spcAft>
+                <a:spcPct val="0"/>
+              </a:spcAft>
+              <a:buFont typeface="Arial" panose="020B0604020202020204" pitchFamily="34" charset="0"/>
+              <a:buChar char="»"/>
+              <a:defRPr sz="2000" kern="1200">
+                <a:solidFill>
+                  <a:schemeClr val="tx1">
+                    <a:lumMod val="50000"/>
+                    <a:lumOff val="50000"/>
+                  </a:schemeClr>
+                </a:solidFill>
+                <a:latin typeface="+mn-lt"/>
+                <a:ea typeface="+mn-ea"/>
+                <a:cs typeface="+mn-cs"/>
+              </a:defRPr>
+            </a:lvl5pPr>
+            <a:lvl6pPr marL="2514600" indent="-228600" algn="l" defTabSz="914400" rtl="0" eaLnBrk="1" latinLnBrk="0" hangingPunct="1">
+              <a:spcBef>
+                <a:spcPct val="20000"/>
+              </a:spcBef>
+              <a:buFont typeface="Arial" pitchFamily="34" charset="0"/>
+              <a:buChar char="•"/>
+              <a:defRPr sz="2000" kern="1200">
+                <a:solidFill>
+                  <a:schemeClr val="tx1"/>
+                </a:solidFill>
+                <a:latin typeface="+mn-lt"/>
+                <a:ea typeface="+mn-ea"/>
+                <a:cs typeface="+mn-cs"/>
+              </a:defRPr>
+            </a:lvl6pPr>
+            <a:lvl7pPr marL="2971800" indent="-228600" algn="l" defTabSz="914400" rtl="0" eaLnBrk="1" latinLnBrk="0" hangingPunct="1">
+              <a:spcBef>
+                <a:spcPct val="20000"/>
+              </a:spcBef>
+              <a:buFont typeface="Arial" pitchFamily="34" charset="0"/>
+              <a:buChar char="•"/>
+              <a:defRPr sz="2000" kern="1200">
+                <a:solidFill>
+                  <a:schemeClr val="tx1"/>
+                </a:solidFill>
+                <a:latin typeface="+mn-lt"/>
+                <a:ea typeface="+mn-ea"/>
+                <a:cs typeface="+mn-cs"/>
+              </a:defRPr>
+            </a:lvl7pPr>
+            <a:lvl8pPr marL="3429000" indent="-228600" algn="l" defTabSz="914400" rtl="0" eaLnBrk="1" latinLnBrk="0" hangingPunct="1">
+              <a:spcBef>
+                <a:spcPct val="20000"/>
+              </a:spcBef>
+              <a:buFont typeface="Arial" pitchFamily="34" charset="0"/>
+              <a:buChar char="•"/>
+              <a:defRPr sz="2000" kern="1200">
+                <a:solidFill>
+                  <a:schemeClr val="tx1"/>
+                </a:solidFill>
+                <a:latin typeface="+mn-lt"/>
+                <a:ea typeface="+mn-ea"/>
+                <a:cs typeface="+mn-cs"/>
+              </a:defRPr>
+            </a:lvl8pPr>
+            <a:lvl9pPr marL="3886200" indent="-228600" algn="l" defTabSz="914400" rtl="0" eaLnBrk="1" latinLnBrk="0" hangingPunct="1">
+              <a:spcBef>
+                <a:spcPct val="20000"/>
+              </a:spcBef>
+              <a:buFont typeface="Arial" pitchFamily="34" charset="0"/>
+              <a:buChar char="•"/>
+              <a:defRPr sz="2000" kern="1200">
+                <a:solidFill>
+                  <a:schemeClr val="tx1"/>
+                </a:solidFill>
+                <a:latin typeface="+mn-lt"/>
+                <a:ea typeface="+mn-ea"/>
+                <a:cs typeface="+mn-cs"/>
+              </a:defRPr>
+            </a:lvl9pPr>
+          </a:lstStyle>
+          <a:p>
+            <a:pPr marL="0" indent="0">
+              <a:buFont typeface="Arial" panose="020B0604020202020204" pitchFamily="34" charset="0"/>
+              <a:buNone/>
+            </a:pPr>
+            <a:r>
+              <a:rPr lang="en-US" sz="2000" dirty="0">
+                <a:solidFill>
+                  <a:schemeClr val="tx1"/>
+                </a:solidFill>
+              </a:rPr>
+              <a:t>Receiving an item from the queue</a:t>
+            </a:r>
+            <a:endParaRPr lang="en-IN" sz="2000" dirty="0">
+              <a:solidFill>
+                <a:schemeClr val="tx1"/>
+              </a:solidFill>
+            </a:endParaRPr>
+          </a:p>
+        </p:txBody>
+      </p:sp>
+    </p:spTree>
+    <p:extLst>
+      <p:ext uri="{BB962C8B-B14F-4D97-AF65-F5344CB8AC3E}">
+        <p14:creationId xmlns:p14="http://schemas.microsoft.com/office/powerpoint/2010/main" val="861278090"/>
+      </p:ext>
+    </p:extLst>
+  </p:cSld>
+  <p:clrMapOvr>
+    <a:masterClrMapping/>
+  </p:clrMapOvr>
+  <p:timing>
+    <p:tnLst>
+      <p:par>
+        <p:cTn id="1" dur="indefinite" restart="never" nodeType="tmRoot">
+          <p:childTnLst>
+            <p:seq concurrent="1" nextAc="seek">
+              <p:cTn id="2" dur="indefinite" nodeType="mainSeq">
+                <p:childTnLst>
+                  <p:par>
+                    <p:cTn id="3" fill="hold">
+                      <p:stCondLst>
+                        <p:cond delay="indefinite"/>
+                      </p:stCondLst>
+                      <p:childTnLst>
+                        <p:par>
+                          <p:cTn id="4" fill="hold">
+                            <p:stCondLst>
+                              <p:cond delay="0"/>
+                            </p:stCondLst>
+                            <p:childTnLst>
+                              <p:par>
+                                <p:cTn id="5" presetID="1" presetClass="entr" presetSubtype="0" fill="hold" nodeType="clickEffect">
+                                  <p:stCondLst>
+                                    <p:cond delay="0"/>
+                                  </p:stCondLst>
+                                  <p:childTnLst>
+                                    <p:set>
+                                      <p:cBhvr>
+                                        <p:cTn id="6" dur="1" fill="hold">
+                                          <p:stCondLst>
+                                            <p:cond delay="0"/>
+                                          </p:stCondLst>
+                                        </p:cTn>
+                                        <p:tgtEl>
+                                          <p:spTgt spid="6"/>
+                                        </p:tgtEl>
+                                        <p:attrNameLst>
+                                          <p:attrName>style.visibility</p:attrName>
+                                        </p:attrNameLst>
+                                      </p:cBhvr>
+                                      <p:to>
+                                        <p:strVal val="visible"/>
+                                      </p:to>
+                                    </p:set>
+                                  </p:childTnLst>
+                                </p:cTn>
+                              </p:par>
+                            </p:childTnLst>
+                          </p:cTn>
+                        </p:par>
+                      </p:childTnLst>
+                    </p:cTn>
+                  </p:par>
+                  <p:par>
+                    <p:cTn id="7" fill="hold">
+                      <p:stCondLst>
+                        <p:cond delay="indefinite"/>
+                      </p:stCondLst>
+                      <p:childTnLst>
+                        <p:par>
+                          <p:cTn id="8" fill="hold">
+                            <p:stCondLst>
+                              <p:cond delay="0"/>
+                            </p:stCondLst>
+                            <p:childTnLst>
+                              <p:par>
+                                <p:cTn id="9" presetID="1" presetClass="entr" presetSubtype="0" fill="hold" grpId="0" nodeType="clickEffect">
+                                  <p:stCondLst>
+                                    <p:cond delay="0"/>
+                                  </p:stCondLst>
+                                  <p:childTnLst>
+                                    <p:set>
+                                      <p:cBhvr>
+                                        <p:cTn id="10" dur="1" fill="hold">
+                                          <p:stCondLst>
+                                            <p:cond delay="0"/>
+                                          </p:stCondLst>
+                                        </p:cTn>
+                                        <p:tgtEl>
+                                          <p:spTgt spid="7">
+                                            <p:txEl>
+                                              <p:pRg st="0" end="0"/>
+                                            </p:txEl>
+                                          </p:spTgt>
+                                        </p:tgtEl>
+                                        <p:attrNameLst>
+                                          <p:attrName>style.visibility</p:attrName>
+                                        </p:attrNameLst>
+                                      </p:cBhvr>
+                                      <p:to>
+                                        <p:strVal val="visible"/>
+                                      </p:to>
+                                    </p:set>
+                                  </p:childTnLst>
+                                </p:cTn>
+                              </p:par>
+                            </p:childTnLst>
+                          </p:cTn>
+                        </p:par>
+                      </p:childTnLst>
+                    </p:cTn>
+                  </p:par>
+                  <p:par>
+                    <p:cTn id="11" fill="hold">
+                      <p:stCondLst>
+                        <p:cond delay="indefinite"/>
+                      </p:stCondLst>
+                      <p:childTnLst>
+                        <p:par>
+                          <p:cTn id="12" fill="hold">
+                            <p:stCondLst>
+                              <p:cond delay="0"/>
+                            </p:stCondLst>
+                            <p:childTnLst>
+                              <p:par>
+                                <p:cTn id="13" presetID="1" presetClass="entr" presetSubtype="0" fill="hold" nodeType="clickEffect">
+                                  <p:stCondLst>
+                                    <p:cond delay="0"/>
+                                  </p:stCondLst>
+                                  <p:childTnLst>
+                                    <p:set>
+                                      <p:cBhvr>
+                                        <p:cTn id="14" dur="1" fill="hold">
+                                          <p:stCondLst>
+                                            <p:cond delay="0"/>
+                                          </p:stCondLst>
+                                        </p:cTn>
+                                        <p:tgtEl>
+                                          <p:spTgt spid="9"/>
+                                        </p:tgtEl>
+                                        <p:attrNameLst>
+                                          <p:attrName>style.visibility</p:attrName>
+                                        </p:attrNameLst>
+                                      </p:cBhvr>
+                                      <p:to>
+                                        <p:strVal val="visible"/>
+                                      </p:to>
+                                    </p:set>
+                                  </p:childTnLst>
+                                </p:cTn>
+                              </p:par>
+                            </p:childTnLst>
+                          </p:cTn>
+                        </p:par>
+                      </p:childTnLst>
+                    </p:cTn>
+                  </p:par>
+                  <p:par>
+                    <p:cTn id="15" fill="hold">
+                      <p:stCondLst>
+                        <p:cond delay="indefinite"/>
+                      </p:stCondLst>
+                      <p:childTnLst>
+                        <p:par>
+                          <p:cTn id="16" fill="hold">
+                            <p:stCondLst>
+                              <p:cond delay="0"/>
+                            </p:stCondLst>
+                            <p:childTnLst>
+                              <p:par>
+                                <p:cTn id="17" presetID="1" presetClass="entr" presetSubtype="0" fill="hold" grpId="0" nodeType="clickEffect">
+                                  <p:stCondLst>
+                                    <p:cond delay="0"/>
+                                  </p:stCondLst>
+                                  <p:childTnLst>
+                                    <p:set>
+                                      <p:cBhvr>
+                                        <p:cTn id="18" dur="1" fill="hold">
+                                          <p:stCondLst>
+                                            <p:cond delay="0"/>
+                                          </p:stCondLst>
+                                        </p:cTn>
+                                        <p:tgtEl>
+                                          <p:spTgt spid="10">
+                                            <p:txEl>
+                                              <p:pRg st="0" end="0"/>
+                                            </p:txEl>
+                                          </p:spTgt>
+                                        </p:tgtEl>
+                                        <p:attrNameLst>
+                                          <p:attrName>style.visibility</p:attrName>
+                                        </p:attrNameLst>
+                                      </p:cBhvr>
+                                      <p:to>
+                                        <p:strVal val="visible"/>
+                                      </p:to>
+                                    </p:set>
+                                  </p:childTnLst>
+                                </p:cTn>
+                              </p:par>
+                            </p:childTnLst>
+                          </p:cTn>
+                        </p:par>
+                      </p:childTnLst>
+                    </p:cTn>
+                  </p:par>
+                </p:childTnLst>
+              </p:cTn>
+              <p:prevCondLst>
+                <p:cond evt="onPrev" delay="0">
+                  <p:tgtEl>
+                    <p:sldTgt/>
+                  </p:tgtEl>
+                </p:cond>
+              </p:prevCondLst>
+              <p:nextCondLst>
+                <p:cond evt="onNext" delay="0">
+                  <p:tgtEl>
+                    <p:sldTgt/>
+                  </p:tgtEl>
+                </p:cond>
+              </p:nextCondLst>
+            </p:seq>
+          </p:childTnLst>
+        </p:cTn>
+      </p:par>
+    </p:tnLst>
+    <p:bldLst>
+      <p:bldP spid="7" grpId="0" build="p"/>
+      <p:bldP spid="10" grpId="0" build="p"/>
+    </p:bldLst>
+  </p:timing>
+</p:sld>
+</file>
+
+<file path=ppt/slides/slide12.xml><?xml version="1.0" encoding="utf-8"?>
+<p:sld xmlns:a="http://schemas.openxmlformats.org/drawingml/2006/main" xmlns:r="http://schemas.openxmlformats.org/officeDocument/2006/relationships" xmlns:p="http://schemas.openxmlformats.org/presentationml/2006/main">
+  <p:cSld>
+    <p:spTree>
+      <p:nvGrpSpPr>
+        <p:cNvPr id="1" name=""/>
+        <p:cNvGrpSpPr/>
+        <p:nvPr/>
+      </p:nvGrpSpPr>
+      <p:grpSpPr>
+        <a:xfrm>
+          <a:off x="0" y="0"/>
+          <a:ext cx="0" cy="0"/>
+          <a:chOff x="0" y="0"/>
+          <a:chExt cx="0" cy="0"/>
+        </a:xfrm>
+      </p:grpSpPr>
+      <p:sp>
+        <p:nvSpPr>
+          <p:cNvPr id="2" name="Title 1">
+            <a:extLst>
+              <a:ext uri="{FF2B5EF4-FFF2-40B4-BE49-F238E27FC236}">
+                <a16:creationId xmlns:a16="http://schemas.microsoft.com/office/drawing/2014/main" id="{81145CB9-F062-3642-B47C-E1480877547A}"/>
+              </a:ext>
+            </a:extLst>
+          </p:cNvPr>
+          <p:cNvSpPr>
+            <a:spLocks noGrp="1"/>
+          </p:cNvSpPr>
+          <p:nvPr>
+            <p:ph type="title"/>
+          </p:nvPr>
+        </p:nvSpPr>
+        <p:spPr/>
+        <p:txBody>
+          <a:bodyPr/>
+          <a:lstStyle/>
+          <a:p>
+            <a:r>
+              <a:rPr lang="en-US" dirty="0"/>
+              <a:t>Message passing</a:t>
+            </a:r>
+            <a:endParaRPr lang="en-IN" dirty="0"/>
+          </a:p>
+        </p:txBody>
+      </p:sp>
+      <p:sp>
+        <p:nvSpPr>
+          <p:cNvPr id="4" name="Date Placeholder 3">
+            <a:extLst>
+              <a:ext uri="{FF2B5EF4-FFF2-40B4-BE49-F238E27FC236}">
+                <a16:creationId xmlns:a16="http://schemas.microsoft.com/office/drawing/2014/main" id="{D4405FCC-DB1D-CB07-119E-6ADAC2EAD725}"/>
+              </a:ext>
+            </a:extLst>
+          </p:cNvPr>
+          <p:cNvSpPr>
+            <a:spLocks noGrp="1"/>
+          </p:cNvSpPr>
+          <p:nvPr>
+            <p:ph type="dt" sz="half" idx="10"/>
+          </p:nvPr>
+        </p:nvSpPr>
+        <p:spPr/>
+        <p:txBody>
+          <a:bodyPr/>
+          <a:lstStyle/>
+          <a:p>
+            <a:pPr>
+              <a:defRPr/>
+            </a:pPr>
+            <a:r>
+              <a:rPr lang="en-US"/>
+              <a:t>21/12/2020</a:t>
+            </a:r>
+          </a:p>
+        </p:txBody>
+      </p:sp>
+      <p:sp>
+        <p:nvSpPr>
+          <p:cNvPr id="5" name="Slide Number Placeholder 4">
+            <a:extLst>
+              <a:ext uri="{FF2B5EF4-FFF2-40B4-BE49-F238E27FC236}">
+                <a16:creationId xmlns:a16="http://schemas.microsoft.com/office/drawing/2014/main" id="{B611BB44-2844-7EE6-37DB-11A1F14CE64A}"/>
+              </a:ext>
+            </a:extLst>
+          </p:cNvPr>
+          <p:cNvSpPr>
+            <a:spLocks noGrp="1"/>
+          </p:cNvSpPr>
+          <p:nvPr>
+            <p:ph type="sldNum" sz="quarter" idx="12"/>
+          </p:nvPr>
+        </p:nvSpPr>
+        <p:spPr/>
+        <p:txBody>
+          <a:bodyPr/>
+          <a:lstStyle/>
+          <a:p>
+            <a:pPr>
+              <a:defRPr/>
+            </a:pPr>
+            <a:fld id="{CA887A73-1AE0-46F8-856A-18EA1CF30A1B}" type="slidenum">
+              <a:rPr lang="en-US" altLang="en-US" smtClean="0"/>
+              <a:pPr>
+                <a:defRPr/>
+              </a:pPr>
+              <a:t>12</a:t>
+            </a:fld>
+            <a:endParaRPr lang="en-US" altLang="en-US"/>
+          </a:p>
+        </p:txBody>
+      </p:sp>
+      <p:pic>
+        <p:nvPicPr>
+          <p:cNvPr id="7" name="Picture 6">
+            <a:extLst>
+              <a:ext uri="{FF2B5EF4-FFF2-40B4-BE49-F238E27FC236}">
+                <a16:creationId xmlns:a16="http://schemas.microsoft.com/office/drawing/2014/main" id="{53D52D14-EA1A-5DD9-4662-521784AC2FD3}"/>
+              </a:ext>
+            </a:extLst>
+          </p:cNvPr>
+          <p:cNvPicPr>
+            <a:picLocks noChangeAspect="1"/>
+          </p:cNvPicPr>
+          <p:nvPr/>
+        </p:nvPicPr>
+        <p:blipFill>
+          <a:blip r:embed="rId2"/>
+          <a:stretch>
+            <a:fillRect/>
+          </a:stretch>
+        </p:blipFill>
+        <p:spPr>
+          <a:xfrm>
+            <a:off x="103905" y="1447800"/>
+            <a:ext cx="4191000" cy="3146473"/>
+          </a:xfrm>
+          <a:prstGeom prst="rect">
+            <a:avLst/>
+          </a:prstGeom>
+        </p:spPr>
+      </p:pic>
+      <p:pic>
+        <p:nvPicPr>
+          <p:cNvPr id="9" name="Picture 8">
+            <a:extLst>
+              <a:ext uri="{FF2B5EF4-FFF2-40B4-BE49-F238E27FC236}">
+                <a16:creationId xmlns:a16="http://schemas.microsoft.com/office/drawing/2014/main" id="{DE0C6F9B-10C3-E4D5-2B66-302D2CCE32D5}"/>
+              </a:ext>
+            </a:extLst>
+          </p:cNvPr>
+          <p:cNvPicPr>
+            <a:picLocks noChangeAspect="1"/>
+          </p:cNvPicPr>
+          <p:nvPr/>
+        </p:nvPicPr>
+        <p:blipFill>
+          <a:blip r:embed="rId3"/>
+          <a:stretch>
+            <a:fillRect/>
+          </a:stretch>
+        </p:blipFill>
+        <p:spPr>
+          <a:xfrm>
+            <a:off x="4463191" y="3200400"/>
+            <a:ext cx="3886200" cy="3063081"/>
+          </a:xfrm>
+          <a:prstGeom prst="rect">
+            <a:avLst/>
+          </a:prstGeom>
+        </p:spPr>
+      </p:pic>
+      <p:pic>
+        <p:nvPicPr>
+          <p:cNvPr id="11" name="Picture 10">
+            <a:extLst>
+              <a:ext uri="{FF2B5EF4-FFF2-40B4-BE49-F238E27FC236}">
+                <a16:creationId xmlns:a16="http://schemas.microsoft.com/office/drawing/2014/main" id="{317ACCEE-8F65-BBE8-2BE8-A3B0F60FD6FA}"/>
+              </a:ext>
+            </a:extLst>
+          </p:cNvPr>
+          <p:cNvPicPr>
+            <a:picLocks noChangeAspect="1"/>
+          </p:cNvPicPr>
+          <p:nvPr/>
+        </p:nvPicPr>
+        <p:blipFill>
+          <a:blip r:embed="rId4"/>
+          <a:stretch>
+            <a:fillRect/>
+          </a:stretch>
+        </p:blipFill>
+        <p:spPr>
+          <a:xfrm>
+            <a:off x="4463191" y="2007283"/>
+            <a:ext cx="4647314" cy="1278011"/>
+          </a:xfrm>
+          <a:prstGeom prst="rect">
+            <a:avLst/>
+          </a:prstGeom>
+        </p:spPr>
+      </p:pic>
+    </p:spTree>
+    <p:extLst>
+      <p:ext uri="{BB962C8B-B14F-4D97-AF65-F5344CB8AC3E}">
+        <p14:creationId xmlns:p14="http://schemas.microsoft.com/office/powerpoint/2010/main" val="350083653"/>
+      </p:ext>
+    </p:extLst>
+  </p:cSld>
+  <p:clrMapOvr>
+    <a:masterClrMapping/>
+  </p:clrMapOvr>
+</p:sld>
+</file>
+
+<file path=ppt/slides/slide13.xml><?xml version="1.0" encoding="utf-8"?>
+<p:sld xmlns:a="http://schemas.openxmlformats.org/drawingml/2006/main" xmlns:r="http://schemas.openxmlformats.org/officeDocument/2006/relationships" xmlns:p="http://schemas.openxmlformats.org/presentationml/2006/main">
+  <p:cSld>
+    <p:spTree>
+      <p:nvGrpSpPr>
+        <p:cNvPr id="1" name=""/>
+        <p:cNvGrpSpPr/>
+        <p:nvPr/>
+      </p:nvGrpSpPr>
+      <p:grpSpPr>
+        <a:xfrm>
+          <a:off x="0" y="0"/>
+          <a:ext cx="0" cy="0"/>
+          <a:chOff x="0" y="0"/>
+          <a:chExt cx="0" cy="0"/>
+        </a:xfrm>
+      </p:grpSpPr>
+      <p:sp>
+        <p:nvSpPr>
+          <p:cNvPr id="2" name="Title 1">
+            <a:extLst>
+              <a:ext uri="{FF2B5EF4-FFF2-40B4-BE49-F238E27FC236}">
+                <a16:creationId xmlns:a16="http://schemas.microsoft.com/office/drawing/2014/main" id="{98BA7B4B-C11C-3E01-CBE1-F0BA90956252}"/>
+              </a:ext>
+            </a:extLst>
+          </p:cNvPr>
+          <p:cNvSpPr>
+            <a:spLocks noGrp="1"/>
+          </p:cNvSpPr>
+          <p:nvPr>
+            <p:ph type="title"/>
+          </p:nvPr>
+        </p:nvSpPr>
+        <p:spPr/>
+        <p:txBody>
+          <a:bodyPr/>
+          <a:lstStyle/>
+          <a:p>
+            <a:r>
+              <a:rPr lang="en-US" dirty="0"/>
+              <a:t>Example – Event Driven Systems</a:t>
+            </a:r>
+            <a:endParaRPr lang="en-IN" dirty="0"/>
+          </a:p>
+        </p:txBody>
+      </p:sp>
+      <p:sp>
+        <p:nvSpPr>
+          <p:cNvPr id="3" name="Content Placeholder 2">
+            <a:extLst>
+              <a:ext uri="{FF2B5EF4-FFF2-40B4-BE49-F238E27FC236}">
+                <a16:creationId xmlns:a16="http://schemas.microsoft.com/office/drawing/2014/main" id="{BBEBF774-02F0-77DB-BC72-3CE33F7E1F68}"/>
+              </a:ext>
+            </a:extLst>
+          </p:cNvPr>
+          <p:cNvSpPr>
+            <a:spLocks noGrp="1"/>
+          </p:cNvSpPr>
+          <p:nvPr>
+            <p:ph idx="1"/>
+          </p:nvPr>
+        </p:nvSpPr>
+        <p:spPr/>
+        <p:txBody>
+          <a:bodyPr/>
+          <a:lstStyle/>
+          <a:p>
+            <a:r>
+              <a:rPr lang="en-US" dirty="0"/>
+              <a:t>System reacts to events</a:t>
+            </a:r>
+          </a:p>
+          <a:p>
+            <a:r>
+              <a:rPr lang="en-US" dirty="0"/>
+              <a:t>Event producer process must communicate with event consumer</a:t>
+            </a:r>
+          </a:p>
+          <a:p>
+            <a:r>
+              <a:rPr lang="en-US" dirty="0"/>
+              <a:t>Events placed in queue</a:t>
+            </a:r>
+          </a:p>
+          <a:p>
+            <a:r>
+              <a:rPr lang="en-US" dirty="0"/>
+              <a:t>Tasks consume events</a:t>
+            </a:r>
+          </a:p>
+          <a:p>
+            <a:endParaRPr lang="en-US" dirty="0"/>
+          </a:p>
+          <a:p>
+            <a:r>
+              <a:rPr lang="en-US" dirty="0"/>
+              <a:t>Decouples producers and consumers</a:t>
+            </a:r>
+          </a:p>
+          <a:p>
+            <a:r>
+              <a:rPr lang="en-US" dirty="0"/>
+              <a:t>Supports asynchronous systems</a:t>
+            </a:r>
+            <a:endParaRPr lang="en-IN" dirty="0"/>
+          </a:p>
+        </p:txBody>
+      </p:sp>
+      <p:sp>
+        <p:nvSpPr>
+          <p:cNvPr id="4" name="Date Placeholder 3">
+            <a:extLst>
+              <a:ext uri="{FF2B5EF4-FFF2-40B4-BE49-F238E27FC236}">
+                <a16:creationId xmlns:a16="http://schemas.microsoft.com/office/drawing/2014/main" id="{8F09640A-934D-8FD7-EF81-5BB7C994025D}"/>
+              </a:ext>
+            </a:extLst>
+          </p:cNvPr>
+          <p:cNvSpPr>
+            <a:spLocks noGrp="1"/>
+          </p:cNvSpPr>
+          <p:nvPr>
+            <p:ph type="dt" sz="half" idx="10"/>
+          </p:nvPr>
+        </p:nvSpPr>
+        <p:spPr/>
+        <p:txBody>
+          <a:bodyPr/>
+          <a:lstStyle/>
+          <a:p>
+            <a:pPr>
+              <a:defRPr/>
+            </a:pPr>
+            <a:r>
+              <a:rPr lang="en-US"/>
+              <a:t>21/12/2020</a:t>
+            </a:r>
+          </a:p>
+        </p:txBody>
+      </p:sp>
+      <p:sp>
+        <p:nvSpPr>
+          <p:cNvPr id="5" name="Slide Number Placeholder 4">
+            <a:extLst>
+              <a:ext uri="{FF2B5EF4-FFF2-40B4-BE49-F238E27FC236}">
+                <a16:creationId xmlns:a16="http://schemas.microsoft.com/office/drawing/2014/main" id="{BC07CE91-C5F4-EA98-4258-CC2E65767FB6}"/>
+              </a:ext>
+            </a:extLst>
+          </p:cNvPr>
+          <p:cNvSpPr>
+            <a:spLocks noGrp="1"/>
+          </p:cNvSpPr>
+          <p:nvPr>
+            <p:ph type="sldNum" sz="quarter" idx="12"/>
+          </p:nvPr>
+        </p:nvSpPr>
+        <p:spPr/>
+        <p:txBody>
+          <a:bodyPr/>
+          <a:lstStyle/>
+          <a:p>
+            <a:pPr>
+              <a:defRPr/>
+            </a:pPr>
+            <a:fld id="{CA887A73-1AE0-46F8-856A-18EA1CF30A1B}" type="slidenum">
+              <a:rPr lang="en-US" altLang="en-US" smtClean="0"/>
+              <a:pPr>
+                <a:defRPr/>
+              </a:pPr>
+              <a:t>13</a:t>
+            </a:fld>
+            <a:endParaRPr lang="en-US" altLang="en-US"/>
+          </a:p>
+        </p:txBody>
+      </p:sp>
+    </p:spTree>
+    <p:extLst>
+      <p:ext uri="{BB962C8B-B14F-4D97-AF65-F5344CB8AC3E}">
+        <p14:creationId xmlns:p14="http://schemas.microsoft.com/office/powerpoint/2010/main" val="2183666388"/>
+      </p:ext>
+    </p:extLst>
+  </p:cSld>
+  <p:clrMapOvr>
+    <a:masterClrMapping/>
+  </p:clrMapOvr>
+  <p:timing>
+    <p:tnLst>
+      <p:par>
+        <p:cTn id="1" dur="indefinite" restart="never" nodeType="tmRoot">
+          <p:childTnLst>
+            <p:seq concurrent="1" nextAc="seek">
+              <p:cTn id="2" dur="indefinite" nodeType="mainSeq">
+                <p:childTnLst>
+                  <p:par>
+                    <p:cTn id="3" fill="hold">
+                      <p:stCondLst>
+                        <p:cond delay="indefinite"/>
+                      </p:stCondLst>
+                      <p:childTnLst>
+                        <p:par>
+                          <p:cTn id="4" fill="hold">
+                            <p:stCondLst>
+                              <p:cond delay="0"/>
+                            </p:stCondLst>
+                            <p:childTnLst>
+                              <p:par>
+                                <p:cTn id="5" presetID="1" presetClass="entr" presetSubtype="0" fill="hold" grpId="0" nodeType="clickEffect">
+                                  <p:stCondLst>
+                                    <p:cond delay="0"/>
+                                  </p:stCondLst>
+                                  <p:childTnLst>
+                                    <p:set>
+                                      <p:cBhvr>
+                                        <p:cTn id="6" dur="1" fill="hold">
+                                          <p:stCondLst>
+                                            <p:cond delay="0"/>
+                                          </p:stCondLst>
+                                        </p:cTn>
+                                        <p:tgtEl>
+                                          <p:spTgt spid="3">
+                                            <p:txEl>
+                                              <p:pRg st="0" end="0"/>
+                                            </p:txEl>
+                                          </p:spTgt>
+                                        </p:tgtEl>
+                                        <p:attrNameLst>
+                                          <p:attrName>style.visibility</p:attrName>
+                                        </p:attrNameLst>
+                                      </p:cBhvr>
+                                      <p:to>
+                                        <p:strVal val="visible"/>
+                                      </p:to>
+                                    </p:set>
+                                  </p:childTnLst>
+                                </p:cTn>
+                              </p:par>
+                            </p:childTnLst>
+                          </p:cTn>
+                        </p:par>
+                      </p:childTnLst>
+                    </p:cTn>
+                  </p:par>
+                  <p:par>
+                    <p:cTn id="7" fill="hold">
+                      <p:stCondLst>
+                        <p:cond delay="indefinite"/>
+                      </p:stCondLst>
+                      <p:childTnLst>
+                        <p:par>
+                          <p:cTn id="8" fill="hold">
+                            <p:stCondLst>
+                              <p:cond delay="0"/>
+                            </p:stCondLst>
+                            <p:childTnLst>
+                              <p:par>
+                                <p:cTn id="9" presetID="1" presetClass="entr" presetSubtype="0" fill="hold" grpId="0" nodeType="clickEffect">
+                                  <p:stCondLst>
+                                    <p:cond delay="0"/>
+                                  </p:stCondLst>
+                                  <p:childTnLst>
+                                    <p:set>
+                                      <p:cBhvr>
+                                        <p:cTn id="10" dur="1" fill="hold">
+                                          <p:stCondLst>
+                                            <p:cond delay="0"/>
+                                          </p:stCondLst>
+                                        </p:cTn>
+                                        <p:tgtEl>
+                                          <p:spTgt spid="3">
+                                            <p:txEl>
+                                              <p:pRg st="1" end="1"/>
+                                            </p:txEl>
+                                          </p:spTgt>
+                                        </p:tgtEl>
+                                        <p:attrNameLst>
+                                          <p:attrName>style.visibility</p:attrName>
+                                        </p:attrNameLst>
+                                      </p:cBhvr>
+                                      <p:to>
+                                        <p:strVal val="visible"/>
+                                      </p:to>
+                                    </p:set>
+                                  </p:childTnLst>
+                                </p:cTn>
+                              </p:par>
+                            </p:childTnLst>
+                          </p:cTn>
+                        </p:par>
+                      </p:childTnLst>
+                    </p:cTn>
+                  </p:par>
+                  <p:par>
+                    <p:cTn id="11" fill="hold">
+                      <p:stCondLst>
+                        <p:cond delay="indefinite"/>
+                      </p:stCondLst>
+                      <p:childTnLst>
+                        <p:par>
+                          <p:cTn id="12" fill="hold">
+                            <p:stCondLst>
+                              <p:cond delay="0"/>
+                            </p:stCondLst>
+                            <p:childTnLst>
+                              <p:par>
+                                <p:cTn id="13" presetID="1" presetClass="entr" presetSubtype="0" fill="hold" grpId="0" nodeType="clickEffect">
+                                  <p:stCondLst>
+                                    <p:cond delay="0"/>
+                                  </p:stCondLst>
+                                  <p:childTnLst>
+                                    <p:set>
+                                      <p:cBhvr>
+                                        <p:cTn id="14" dur="1" fill="hold">
+                                          <p:stCondLst>
+                                            <p:cond delay="0"/>
+                                          </p:stCondLst>
+                                        </p:cTn>
+                                        <p:tgtEl>
+                                          <p:spTgt spid="3">
+                                            <p:txEl>
+                                              <p:pRg st="2" end="2"/>
+                                            </p:txEl>
+                                          </p:spTgt>
+                                        </p:tgtEl>
+                                        <p:attrNameLst>
+                                          <p:attrName>style.visibility</p:attrName>
+                                        </p:attrNameLst>
+                                      </p:cBhvr>
+                                      <p:to>
+                                        <p:strVal val="visible"/>
+                                      </p:to>
+                                    </p:set>
+                                  </p:childTnLst>
+                                </p:cTn>
+                              </p:par>
+                            </p:childTnLst>
+                          </p:cTn>
+                        </p:par>
+                      </p:childTnLst>
+                    </p:cTn>
+                  </p:par>
+                  <p:par>
+                    <p:cTn id="15" fill="hold">
+                      <p:stCondLst>
+                        <p:cond delay="indefinite"/>
+                      </p:stCondLst>
+                      <p:childTnLst>
+                        <p:par>
+                          <p:cTn id="16" fill="hold">
+                            <p:stCondLst>
+                              <p:cond delay="0"/>
+                            </p:stCondLst>
+                            <p:childTnLst>
+                              <p:par>
+                                <p:cTn id="17" presetID="1" presetClass="entr" presetSubtype="0" fill="hold" grpId="0" nodeType="clickEffect">
+                                  <p:stCondLst>
+                                    <p:cond delay="0"/>
+                                  </p:stCondLst>
+                                  <p:childTnLst>
+                                    <p:set>
+                                      <p:cBhvr>
+                                        <p:cTn id="18" dur="1" fill="hold">
+                                          <p:stCondLst>
+                                            <p:cond delay="0"/>
+                                          </p:stCondLst>
+                                        </p:cTn>
+                                        <p:tgtEl>
+                                          <p:spTgt spid="3">
+                                            <p:txEl>
+                                              <p:pRg st="3" end="3"/>
+                                            </p:txEl>
+                                          </p:spTgt>
+                                        </p:tgtEl>
+                                        <p:attrNameLst>
+                                          <p:attrName>style.visibility</p:attrName>
+                                        </p:attrNameLst>
+                                      </p:cBhvr>
+                                      <p:to>
+                                        <p:strVal val="visible"/>
+                                      </p:to>
+                                    </p:set>
+                                  </p:childTnLst>
+                                </p:cTn>
+                              </p:par>
+                            </p:childTnLst>
+                          </p:cTn>
+                        </p:par>
+                      </p:childTnLst>
+                    </p:cTn>
+                  </p:par>
+                  <p:par>
+                    <p:cTn id="19" fill="hold">
+                      <p:stCondLst>
+                        <p:cond delay="indefinite"/>
+                      </p:stCondLst>
+                      <p:childTnLst>
+                        <p:par>
+                          <p:cTn id="20" fill="hold">
+                            <p:stCondLst>
+                              <p:cond delay="0"/>
+                            </p:stCondLst>
+                            <p:childTnLst>
+                              <p:par>
+                                <p:cTn id="21" presetID="1" presetClass="entr" presetSubtype="0" fill="hold" grpId="0" nodeType="clickEffect">
+                                  <p:stCondLst>
+                                    <p:cond delay="0"/>
+                                  </p:stCondLst>
+                                  <p:childTnLst>
+                                    <p:set>
+                                      <p:cBhvr>
+                                        <p:cTn id="22" dur="1" fill="hold">
+                                          <p:stCondLst>
+                                            <p:cond delay="0"/>
+                                          </p:stCondLst>
+                                        </p:cTn>
+                                        <p:tgtEl>
+                                          <p:spTgt spid="3">
+                                            <p:txEl>
+                                              <p:pRg st="5" end="5"/>
+                                            </p:txEl>
+                                          </p:spTgt>
+                                        </p:tgtEl>
+                                        <p:attrNameLst>
+                                          <p:attrName>style.visibility</p:attrName>
+                                        </p:attrNameLst>
+                                      </p:cBhvr>
+                                      <p:to>
+                                        <p:strVal val="visible"/>
+                                      </p:to>
+                                    </p:set>
+                                  </p:childTnLst>
+                                </p:cTn>
+                              </p:par>
+                            </p:childTnLst>
+                          </p:cTn>
+                        </p:par>
+                      </p:childTnLst>
+                    </p:cTn>
+                  </p:par>
+                  <p:par>
+                    <p:cTn id="23" fill="hold">
+                      <p:stCondLst>
+                        <p:cond delay="indefinite"/>
+                      </p:stCondLst>
+                      <p:childTnLst>
+                        <p:par>
+                          <p:cTn id="24" fill="hold">
+                            <p:stCondLst>
+                              <p:cond delay="0"/>
+                            </p:stCondLst>
+                            <p:childTnLst>
+                              <p:par>
+                                <p:cTn id="25" presetID="1" presetClass="entr" presetSubtype="0" fill="hold" grpId="0" nodeType="clickEffect">
+                                  <p:stCondLst>
+                                    <p:cond delay="0"/>
+                                  </p:stCondLst>
+                                  <p:childTnLst>
+                                    <p:set>
+                                      <p:cBhvr>
+                                        <p:cTn id="26" dur="1" fill="hold">
+                                          <p:stCondLst>
+                                            <p:cond delay="0"/>
+                                          </p:stCondLst>
+                                        </p:cTn>
+                                        <p:tgtEl>
+                                          <p:spTgt spid="3">
+                                            <p:txEl>
+                                              <p:pRg st="6" end="6"/>
+                                            </p:txEl>
+                                          </p:spTgt>
+                                        </p:tgtEl>
+                                        <p:attrNameLst>
+                                          <p:attrName>style.visibility</p:attrName>
+                                        </p:attrNameLst>
+                                      </p:cBhvr>
+                                      <p:to>
+                                        <p:strVal val="visible"/>
+                                      </p:to>
+                                    </p:set>
+                                  </p:childTnLst>
+                                </p:cTn>
+                              </p:par>
+                            </p:childTnLst>
+                          </p:cTn>
+                        </p:par>
+                      </p:childTnLst>
+                    </p:cTn>
+                  </p:par>
+                </p:childTnLst>
+              </p:cTn>
+              <p:prevCondLst>
+                <p:cond evt="onPrev" delay="0">
+                  <p:tgtEl>
+                    <p:sldTgt/>
+                  </p:tgtEl>
+                </p:cond>
+              </p:prevCondLst>
+              <p:nextCondLst>
+                <p:cond evt="onNext" delay="0">
+                  <p:tgtEl>
+                    <p:sldTgt/>
+                  </p:tgtEl>
+                </p:cond>
+              </p:nextCondLst>
+            </p:seq>
+          </p:childTnLst>
+        </p:cTn>
+      </p:par>
+    </p:tnLst>
+    <p:bldLst>
+      <p:bldP spid="3" grpId="0" build="p"/>
+    </p:bldLst>
+  </p:timing>
+</p:sld>
+</file>
+
+<file path=ppt/slides/slide14.xml><?xml version="1.0" encoding="utf-8"?>
+<p:sld xmlns:a="http://schemas.openxmlformats.org/drawingml/2006/main" xmlns:r="http://schemas.openxmlformats.org/officeDocument/2006/relationships" xmlns:p="http://schemas.openxmlformats.org/presentationml/2006/main">
+  <p:cSld>
+    <p:spTree>
+      <p:nvGrpSpPr>
+        <p:cNvPr id="1" name=""/>
+        <p:cNvGrpSpPr/>
+        <p:nvPr/>
+      </p:nvGrpSpPr>
+      <p:grpSpPr>
+        <a:xfrm>
+          <a:off x="0" y="0"/>
+          <a:ext cx="0" cy="0"/>
+          <a:chOff x="0" y="0"/>
+          <a:chExt cx="0" cy="0"/>
+        </a:xfrm>
+      </p:grpSpPr>
+      <p:sp>
+        <p:nvSpPr>
+          <p:cNvPr id="2" name="Title 1">
+            <a:extLst>
+              <a:ext uri="{FF2B5EF4-FFF2-40B4-BE49-F238E27FC236}">
+                <a16:creationId xmlns:a16="http://schemas.microsoft.com/office/drawing/2014/main" id="{D7607E2C-924A-9932-1E48-053A1C1D2DBC}"/>
+              </a:ext>
+            </a:extLst>
+          </p:cNvPr>
+          <p:cNvSpPr>
+            <a:spLocks noGrp="1"/>
+          </p:cNvSpPr>
+          <p:nvPr>
+            <p:ph type="title"/>
+          </p:nvPr>
+        </p:nvSpPr>
+        <p:spPr/>
+        <p:txBody>
+          <a:bodyPr/>
+          <a:lstStyle/>
+          <a:p>
+            <a:r>
+              <a:rPr lang="en-US" dirty="0"/>
+              <a:t>Shared memory vs message passing</a:t>
+            </a:r>
+            <a:endParaRPr lang="en-IN" dirty="0"/>
+          </a:p>
+        </p:txBody>
+      </p:sp>
+      <p:graphicFrame>
+        <p:nvGraphicFramePr>
+          <p:cNvPr id="6" name="Content Placeholder 5">
+            <a:extLst>
+              <a:ext uri="{FF2B5EF4-FFF2-40B4-BE49-F238E27FC236}">
+                <a16:creationId xmlns:a16="http://schemas.microsoft.com/office/drawing/2014/main" id="{777FD49B-C2BC-02DF-759D-8D236CD9EA8A}"/>
+              </a:ext>
+            </a:extLst>
+          </p:cNvPr>
+          <p:cNvGraphicFramePr>
+            <a:graphicFrameLocks noGrp="1"/>
+          </p:cNvGraphicFramePr>
+          <p:nvPr>
+            <p:ph idx="1"/>
+            <p:extLst>
+              <p:ext uri="{D42A27DB-BD31-4B8C-83A1-F6EECF244321}">
+                <p14:modId xmlns:p14="http://schemas.microsoft.com/office/powerpoint/2010/main" val="1697858511"/>
+              </p:ext>
+            </p:extLst>
+          </p:nvPr>
+        </p:nvGraphicFramePr>
+        <p:xfrm>
+          <a:off x="152400" y="2707799"/>
+          <a:ext cx="8839200" cy="2217420"/>
+        </p:xfrm>
+        <a:graphic>
+          <a:graphicData uri="http://schemas.openxmlformats.org/drawingml/2006/table">
+            <a:tbl>
+              <a:tblPr/>
+              <a:tblGrid>
+                <a:gridCol w="1981200">
+                  <a:extLst>
+                    <a:ext uri="{9D8B030D-6E8A-4147-A177-3AD203B41FA5}">
+                      <a16:colId xmlns:a16="http://schemas.microsoft.com/office/drawing/2014/main" val="2300731622"/>
+                    </a:ext>
+                  </a:extLst>
+                </a:gridCol>
+                <a:gridCol w="3911600">
+                  <a:extLst>
+                    <a:ext uri="{9D8B030D-6E8A-4147-A177-3AD203B41FA5}">
+                      <a16:colId xmlns:a16="http://schemas.microsoft.com/office/drawing/2014/main" val="39064587"/>
+                    </a:ext>
+                  </a:extLst>
+                </a:gridCol>
+                <a:gridCol w="2946400">
+                  <a:extLst>
+                    <a:ext uri="{9D8B030D-6E8A-4147-A177-3AD203B41FA5}">
+                      <a16:colId xmlns:a16="http://schemas.microsoft.com/office/drawing/2014/main" val="2593755212"/>
+                    </a:ext>
+                  </a:extLst>
+                </a:gridCol>
+              </a:tblGrid>
+              <a:tr h="0">
+                <a:tc>
+                  <a:txBody>
+                    <a:bodyPr/>
+                    <a:lstStyle/>
+                    <a:p>
+                      <a:pPr fontAlgn="t">
+                        <a:buNone/>
+                      </a:pPr>
+                      <a:r>
+                        <a:rPr lang="en-US" b="1" dirty="0">
+                          <a:effectLst/>
+                        </a:rPr>
+                        <a:t>Feature</a:t>
+                      </a:r>
+                    </a:p>
+                  </a:txBody>
+                  <a:tcPr marL="47625" marR="47625" marT="47625" marB="47625">
+                    <a:lnL w="19050" cap="flat" cmpd="sng" algn="ctr">
+                      <a:solidFill>
+                        <a:srgbClr val="FFFFFF"/>
+                      </a:solidFill>
+                      <a:prstDash val="solid"/>
+                      <a:round/>
+                      <a:headEnd type="none" w="med" len="med"/>
+                      <a:tailEnd type="none" w="med" len="med"/>
+                    </a:lnL>
+                    <a:lnR w="19050" cap="flat" cmpd="sng" algn="ctr">
+                      <a:solidFill>
+                        <a:srgbClr val="FFFFFF"/>
+                      </a:solidFill>
+                      <a:prstDash val="solid"/>
+                      <a:round/>
+                      <a:headEnd type="none" w="med" len="med"/>
+                      <a:tailEnd type="none" w="med" len="med"/>
+                    </a:lnR>
+                    <a:lnT>
+                      <a:noFill/>
+                    </a:lnT>
+                    <a:lnB>
+                      <a:noFill/>
+                    </a:lnB>
+                    <a:noFill/>
+                  </a:tcPr>
+                </a:tc>
+                <a:tc>
+                  <a:txBody>
+                    <a:bodyPr/>
+                    <a:lstStyle/>
+                    <a:p>
+                      <a:pPr fontAlgn="t">
+                        <a:buNone/>
+                      </a:pPr>
+                      <a:r>
+                        <a:rPr lang="en-IN" b="1" dirty="0">
+                          <a:effectLst/>
+                        </a:rPr>
+                        <a:t>Shared Memory (with Mutex) </a:t>
+                      </a:r>
+                    </a:p>
+                  </a:txBody>
+                  <a:tcPr marL="47625" marR="47625" marT="47625" marB="47625">
+                    <a:lnL w="19050" cap="flat" cmpd="sng" algn="ctr">
+                      <a:solidFill>
+                        <a:srgbClr val="FFFFFF"/>
+                      </a:solidFill>
+                      <a:prstDash val="solid"/>
+                      <a:round/>
+                      <a:headEnd type="none" w="med" len="med"/>
+                      <a:tailEnd type="none" w="med" len="med"/>
+                    </a:lnL>
+                    <a:lnR w="19050" cap="flat" cmpd="sng" algn="ctr">
+                      <a:solidFill>
+                        <a:srgbClr val="FFFFFF"/>
+                      </a:solidFill>
+                      <a:prstDash val="solid"/>
+                      <a:round/>
+                      <a:headEnd type="none" w="med" len="med"/>
+                      <a:tailEnd type="none" w="med" len="med"/>
+                    </a:lnR>
+                    <a:lnT>
+                      <a:noFill/>
+                    </a:lnT>
+                    <a:lnB>
+                      <a:noFill/>
+                    </a:lnB>
+                    <a:noFill/>
+                  </a:tcPr>
+                </a:tc>
+                <a:tc>
+                  <a:txBody>
+                    <a:bodyPr/>
+                    <a:lstStyle/>
+                    <a:p>
+                      <a:pPr fontAlgn="t">
+                        <a:buNone/>
+                      </a:pPr>
+                      <a:r>
+                        <a:rPr lang="en-IN" b="1" dirty="0">
+                          <a:effectLst/>
+                        </a:rPr>
+                        <a:t>Message Passing </a:t>
+                      </a:r>
+                    </a:p>
+                  </a:txBody>
+                  <a:tcPr marL="47625" marR="47625" marT="47625" marB="47625">
+                    <a:lnL w="19050" cap="flat" cmpd="sng" algn="ctr">
+                      <a:solidFill>
+                        <a:srgbClr val="FFFFFF"/>
+                      </a:solidFill>
+                      <a:prstDash val="solid"/>
+                      <a:round/>
+                      <a:headEnd type="none" w="med" len="med"/>
+                      <a:tailEnd type="none" w="med" len="med"/>
+                    </a:lnL>
+                    <a:lnR w="19050" cap="flat" cmpd="sng" algn="ctr">
+                      <a:solidFill>
+                        <a:srgbClr val="FFFFFF"/>
+                      </a:solidFill>
+                      <a:prstDash val="solid"/>
+                      <a:round/>
+                      <a:headEnd type="none" w="med" len="med"/>
+                      <a:tailEnd type="none" w="med" len="med"/>
+                    </a:lnR>
+                    <a:lnT>
+                      <a:noFill/>
+                    </a:lnT>
+                    <a:lnB>
+                      <a:noFill/>
+                    </a:lnB>
+                    <a:noFill/>
+                  </a:tcPr>
+                </a:tc>
+                <a:extLst>
+                  <a:ext uri="{0D108BD9-81ED-4DB2-BD59-A6C34878D82A}">
+                    <a16:rowId xmlns:a16="http://schemas.microsoft.com/office/drawing/2014/main" val="3642073437"/>
+                  </a:ext>
+                </a:extLst>
+              </a:tr>
+              <a:tr h="0">
+                <a:tc>
+                  <a:txBody>
+                    <a:bodyPr/>
+                    <a:lstStyle/>
+                    <a:p>
+                      <a:pPr fontAlgn="t">
+                        <a:buNone/>
+                      </a:pPr>
+                      <a:r>
+                        <a:rPr lang="en-IN" b="1">
+                          <a:effectLst/>
+                        </a:rPr>
+                        <a:t>Speed</a:t>
+                      </a:r>
+                      <a:r>
+                        <a:rPr lang="en-IN">
+                          <a:effectLst/>
+                        </a:rPr>
+                        <a:t> </a:t>
+                      </a:r>
+                    </a:p>
+                  </a:txBody>
+                  <a:tcPr marL="47625" marR="47625" marT="47625" marB="47625">
+                    <a:lnL w="19050" cap="flat" cmpd="sng" algn="ctr">
+                      <a:solidFill>
+                        <a:srgbClr val="FFFFFF"/>
+                      </a:solidFill>
+                      <a:prstDash val="solid"/>
+                      <a:round/>
+                      <a:headEnd type="none" w="med" len="med"/>
+                      <a:tailEnd type="none" w="med" len="med"/>
+                    </a:lnL>
+                    <a:lnR w="19050" cap="flat" cmpd="sng" algn="ctr">
+                      <a:solidFill>
+                        <a:srgbClr val="FFFFFF"/>
+                      </a:solidFill>
+                      <a:prstDash val="solid"/>
+                      <a:round/>
+                      <a:headEnd type="none" w="med" len="med"/>
+                      <a:tailEnd type="none" w="med" len="med"/>
+                    </a:lnR>
+                    <a:lnT>
+                      <a:noFill/>
+                    </a:lnT>
+                    <a:lnB>
+                      <a:noFill/>
+                    </a:lnB>
+                    <a:noFill/>
+                  </a:tcPr>
+                </a:tc>
+                <a:tc>
+                  <a:txBody>
+                    <a:bodyPr/>
+                    <a:lstStyle/>
+                    <a:p>
+                      <a:pPr fontAlgn="t">
+                        <a:buNone/>
+                      </a:pPr>
+                      <a:r>
+                        <a:rPr lang="en-IN">
+                          <a:effectLst/>
+                        </a:rPr>
+                        <a:t>Maximum (zero-copy) </a:t>
+                      </a:r>
+                    </a:p>
+                  </a:txBody>
+                  <a:tcPr marL="47625" marR="47625" marT="47625" marB="47625">
+                    <a:lnL w="19050" cap="flat" cmpd="sng" algn="ctr">
+                      <a:solidFill>
+                        <a:srgbClr val="FFFFFF"/>
+                      </a:solidFill>
+                      <a:prstDash val="solid"/>
+                      <a:round/>
+                      <a:headEnd type="none" w="med" len="med"/>
+                      <a:tailEnd type="none" w="med" len="med"/>
+                    </a:lnL>
+                    <a:lnR w="19050" cap="flat" cmpd="sng" algn="ctr">
+                      <a:solidFill>
+                        <a:srgbClr val="FFFFFF"/>
+                      </a:solidFill>
+                      <a:prstDash val="solid"/>
+                      <a:round/>
+                      <a:headEnd type="none" w="med" len="med"/>
+                      <a:tailEnd type="none" w="med" len="med"/>
+                    </a:lnR>
+                    <a:lnT>
+                      <a:noFill/>
+                    </a:lnT>
+                    <a:lnB>
+                      <a:noFill/>
+                    </a:lnB>
+                    <a:noFill/>
+                  </a:tcPr>
+                </a:tc>
+                <a:tc>
+                  <a:txBody>
+                    <a:bodyPr/>
+                    <a:lstStyle/>
+                    <a:p>
+                      <a:pPr fontAlgn="t">
+                        <a:buNone/>
+                      </a:pPr>
+                      <a:r>
+                        <a:rPr lang="en-IN">
+                          <a:effectLst/>
+                        </a:rPr>
+                        <a:t>Slower (copy overhead) </a:t>
+                      </a:r>
+                    </a:p>
+                  </a:txBody>
+                  <a:tcPr marL="47625" marR="47625" marT="47625" marB="47625">
+                    <a:lnL w="19050" cap="flat" cmpd="sng" algn="ctr">
+                      <a:solidFill>
+                        <a:srgbClr val="FFFFFF"/>
+                      </a:solidFill>
+                      <a:prstDash val="solid"/>
+                      <a:round/>
+                      <a:headEnd type="none" w="med" len="med"/>
+                      <a:tailEnd type="none" w="med" len="med"/>
+                    </a:lnL>
+                    <a:lnR w="19050" cap="flat" cmpd="sng" algn="ctr">
+                      <a:solidFill>
+                        <a:srgbClr val="FFFFFF"/>
+                      </a:solidFill>
+                      <a:prstDash val="solid"/>
+                      <a:round/>
+                      <a:headEnd type="none" w="med" len="med"/>
+                      <a:tailEnd type="none" w="med" len="med"/>
+                    </a:lnR>
+                    <a:lnT>
+                      <a:noFill/>
+                    </a:lnT>
+                    <a:lnB>
+                      <a:noFill/>
+                    </a:lnB>
+                    <a:noFill/>
+                  </a:tcPr>
+                </a:tc>
+                <a:extLst>
+                  <a:ext uri="{0D108BD9-81ED-4DB2-BD59-A6C34878D82A}">
+                    <a16:rowId xmlns:a16="http://schemas.microsoft.com/office/drawing/2014/main" val="1115941821"/>
+                  </a:ext>
+                </a:extLst>
+              </a:tr>
+              <a:tr h="0">
+                <a:tc>
+                  <a:txBody>
+                    <a:bodyPr/>
+                    <a:lstStyle/>
+                    <a:p>
+                      <a:pPr fontAlgn="t">
+                        <a:buNone/>
+                      </a:pPr>
+                      <a:r>
+                        <a:rPr lang="en-IN" b="1">
+                          <a:effectLst/>
+                        </a:rPr>
+                        <a:t>Safety</a:t>
+                      </a:r>
+                      <a:r>
+                        <a:rPr lang="en-IN">
+                          <a:effectLst/>
+                        </a:rPr>
+                        <a:t> </a:t>
+                      </a:r>
+                    </a:p>
+                  </a:txBody>
+                  <a:tcPr marL="47625" marR="47625" marT="47625" marB="47625">
+                    <a:lnL w="19050" cap="flat" cmpd="sng" algn="ctr">
+                      <a:solidFill>
+                        <a:srgbClr val="FFFFFF"/>
+                      </a:solidFill>
+                      <a:prstDash val="solid"/>
+                      <a:round/>
+                      <a:headEnd type="none" w="med" len="med"/>
+                      <a:tailEnd type="none" w="med" len="med"/>
+                    </a:lnL>
+                    <a:lnR w="19050" cap="flat" cmpd="sng" algn="ctr">
+                      <a:solidFill>
+                        <a:srgbClr val="FFFFFF"/>
+                      </a:solidFill>
+                      <a:prstDash val="solid"/>
+                      <a:round/>
+                      <a:headEnd type="none" w="med" len="med"/>
+                      <a:tailEnd type="none" w="med" len="med"/>
+                    </a:lnR>
+                    <a:lnT>
+                      <a:noFill/>
+                    </a:lnT>
+                    <a:lnB>
+                      <a:noFill/>
+                    </a:lnB>
+                    <a:noFill/>
+                  </a:tcPr>
+                </a:tc>
+                <a:tc>
+                  <a:txBody>
+                    <a:bodyPr/>
+                    <a:lstStyle/>
+                    <a:p>
+                      <a:pPr fontAlgn="t">
+                        <a:buNone/>
+                      </a:pPr>
+                      <a:r>
+                        <a:rPr lang="en-US">
+                          <a:effectLst/>
+                        </a:rPr>
+                        <a:t>High risk of race conditions </a:t>
+                      </a:r>
+                    </a:p>
+                  </a:txBody>
+                  <a:tcPr marL="47625" marR="47625" marT="47625" marB="47625">
+                    <a:lnL w="19050" cap="flat" cmpd="sng" algn="ctr">
+                      <a:solidFill>
+                        <a:srgbClr val="FFFFFF"/>
+                      </a:solidFill>
+                      <a:prstDash val="solid"/>
+                      <a:round/>
+                      <a:headEnd type="none" w="med" len="med"/>
+                      <a:tailEnd type="none" w="med" len="med"/>
+                    </a:lnL>
+                    <a:lnR w="19050" cap="flat" cmpd="sng" algn="ctr">
+                      <a:solidFill>
+                        <a:srgbClr val="FFFFFF"/>
+                      </a:solidFill>
+                      <a:prstDash val="solid"/>
+                      <a:round/>
+                      <a:headEnd type="none" w="med" len="med"/>
+                      <a:tailEnd type="none" w="med" len="med"/>
+                    </a:lnR>
+                    <a:lnT>
+                      <a:noFill/>
+                    </a:lnT>
+                    <a:lnB>
+                      <a:noFill/>
+                    </a:lnB>
+                    <a:noFill/>
+                  </a:tcPr>
+                </a:tc>
+                <a:tc>
+                  <a:txBody>
+                    <a:bodyPr/>
+                    <a:lstStyle/>
+                    <a:p>
+                      <a:pPr fontAlgn="t">
+                        <a:buNone/>
+                      </a:pPr>
+                      <a:r>
+                        <a:rPr lang="en-IN">
+                          <a:effectLst/>
+                        </a:rPr>
+                        <a:t>Safer, encapsulated data </a:t>
+                      </a:r>
+                    </a:p>
+                  </a:txBody>
+                  <a:tcPr marL="47625" marR="47625" marT="47625" marB="47625">
+                    <a:lnL w="19050" cap="flat" cmpd="sng" algn="ctr">
+                      <a:solidFill>
+                        <a:srgbClr val="FFFFFF"/>
+                      </a:solidFill>
+                      <a:prstDash val="solid"/>
+                      <a:round/>
+                      <a:headEnd type="none" w="med" len="med"/>
+                      <a:tailEnd type="none" w="med" len="med"/>
+                    </a:lnL>
+                    <a:lnR w="19050" cap="flat" cmpd="sng" algn="ctr">
+                      <a:solidFill>
+                        <a:srgbClr val="FFFFFF"/>
+                      </a:solidFill>
+                      <a:prstDash val="solid"/>
+                      <a:round/>
+                      <a:headEnd type="none" w="med" len="med"/>
+                      <a:tailEnd type="none" w="med" len="med"/>
+                    </a:lnR>
+                    <a:lnT>
+                      <a:noFill/>
+                    </a:lnT>
+                    <a:lnB>
+                      <a:noFill/>
+                    </a:lnB>
+                    <a:noFill/>
+                  </a:tcPr>
+                </a:tc>
+                <a:extLst>
+                  <a:ext uri="{0D108BD9-81ED-4DB2-BD59-A6C34878D82A}">
+                    <a16:rowId xmlns:a16="http://schemas.microsoft.com/office/drawing/2014/main" val="1876507862"/>
+                  </a:ext>
+                </a:extLst>
+              </a:tr>
+              <a:tr h="0">
+                <a:tc>
+                  <a:txBody>
+                    <a:bodyPr/>
+                    <a:lstStyle/>
+                    <a:p>
+                      <a:pPr fontAlgn="t">
+                        <a:buNone/>
+                      </a:pPr>
+                      <a:r>
+                        <a:rPr lang="en-IN" b="1">
+                          <a:effectLst/>
+                        </a:rPr>
+                        <a:t>Synchronization</a:t>
+                      </a:r>
+                      <a:r>
+                        <a:rPr lang="en-IN">
+                          <a:effectLst/>
+                        </a:rPr>
+                        <a:t> </a:t>
+                      </a:r>
+                    </a:p>
+                  </a:txBody>
+                  <a:tcPr marL="47625" marR="47625" marT="47625" marB="47625">
+                    <a:lnL w="19050" cap="flat" cmpd="sng" algn="ctr">
+                      <a:solidFill>
+                        <a:srgbClr val="FFFFFF"/>
+                      </a:solidFill>
+                      <a:prstDash val="solid"/>
+                      <a:round/>
+                      <a:headEnd type="none" w="med" len="med"/>
+                      <a:tailEnd type="none" w="med" len="med"/>
+                    </a:lnL>
+                    <a:lnR w="19050" cap="flat" cmpd="sng" algn="ctr">
+                      <a:solidFill>
+                        <a:srgbClr val="FFFFFF"/>
+                      </a:solidFill>
+                      <a:prstDash val="solid"/>
+                      <a:round/>
+                      <a:headEnd type="none" w="med" len="med"/>
+                      <a:tailEnd type="none" w="med" len="med"/>
+                    </a:lnR>
+                    <a:lnT>
+                      <a:noFill/>
+                    </a:lnT>
+                    <a:lnB>
+                      <a:noFill/>
+                    </a:lnB>
+                    <a:noFill/>
+                  </a:tcPr>
+                </a:tc>
+                <a:tc>
+                  <a:txBody>
+                    <a:bodyPr/>
+                    <a:lstStyle/>
+                    <a:p>
+                      <a:pPr fontAlgn="t">
+                        <a:buNone/>
+                      </a:pPr>
+                      <a:r>
+                        <a:rPr lang="en-IN">
+                          <a:effectLst/>
+                        </a:rPr>
+                        <a:t>Explicit (Mutex/Semaphore) </a:t>
+                      </a:r>
+                    </a:p>
+                  </a:txBody>
+                  <a:tcPr marL="47625" marR="47625" marT="47625" marB="47625">
+                    <a:lnL w="19050" cap="flat" cmpd="sng" algn="ctr">
+                      <a:solidFill>
+                        <a:srgbClr val="FFFFFF"/>
+                      </a:solidFill>
+                      <a:prstDash val="solid"/>
+                      <a:round/>
+                      <a:headEnd type="none" w="med" len="med"/>
+                      <a:tailEnd type="none" w="med" len="med"/>
+                    </a:lnL>
+                    <a:lnR w="19050" cap="flat" cmpd="sng" algn="ctr">
+                      <a:solidFill>
+                        <a:srgbClr val="FFFFFF"/>
+                      </a:solidFill>
+                      <a:prstDash val="solid"/>
+                      <a:round/>
+                      <a:headEnd type="none" w="med" len="med"/>
+                      <a:tailEnd type="none" w="med" len="med"/>
+                    </a:lnR>
+                    <a:lnT>
+                      <a:noFill/>
+                    </a:lnT>
+                    <a:lnB>
+                      <a:noFill/>
+                    </a:lnB>
+                    <a:noFill/>
+                  </a:tcPr>
+                </a:tc>
+                <a:tc>
+                  <a:txBody>
+                    <a:bodyPr/>
+                    <a:lstStyle/>
+                    <a:p>
+                      <a:pPr fontAlgn="t">
+                        <a:buNone/>
+                      </a:pPr>
+                      <a:r>
+                        <a:rPr lang="en-IN">
+                          <a:effectLst/>
+                        </a:rPr>
+                        <a:t>Implicit (Send/Receive) </a:t>
+                      </a:r>
+                    </a:p>
+                  </a:txBody>
+                  <a:tcPr marL="47625" marR="47625" marT="47625" marB="47625">
+                    <a:lnL w="19050" cap="flat" cmpd="sng" algn="ctr">
+                      <a:solidFill>
+                        <a:srgbClr val="FFFFFF"/>
+                      </a:solidFill>
+                      <a:prstDash val="solid"/>
+                      <a:round/>
+                      <a:headEnd type="none" w="med" len="med"/>
+                      <a:tailEnd type="none" w="med" len="med"/>
+                    </a:lnL>
+                    <a:lnR w="19050" cap="flat" cmpd="sng" algn="ctr">
+                      <a:solidFill>
+                        <a:srgbClr val="FFFFFF"/>
+                      </a:solidFill>
+                      <a:prstDash val="solid"/>
+                      <a:round/>
+                      <a:headEnd type="none" w="med" len="med"/>
+                      <a:tailEnd type="none" w="med" len="med"/>
+                    </a:lnR>
+                    <a:lnT>
+                      <a:noFill/>
+                    </a:lnT>
+                    <a:lnB>
+                      <a:noFill/>
+                    </a:lnB>
+                    <a:noFill/>
+                  </a:tcPr>
+                </a:tc>
+                <a:extLst>
+                  <a:ext uri="{0D108BD9-81ED-4DB2-BD59-A6C34878D82A}">
+                    <a16:rowId xmlns:a16="http://schemas.microsoft.com/office/drawing/2014/main" val="2254055236"/>
+                  </a:ext>
+                </a:extLst>
+              </a:tr>
+              <a:tr h="0">
+                <a:tc>
+                  <a:txBody>
+                    <a:bodyPr/>
+                    <a:lstStyle/>
+                    <a:p>
+                      <a:pPr fontAlgn="t">
+                        <a:buNone/>
+                      </a:pPr>
+                      <a:r>
+                        <a:rPr lang="en-IN" b="1">
+                          <a:effectLst/>
+                        </a:rPr>
+                        <a:t>Topology</a:t>
+                      </a:r>
+                      <a:r>
+                        <a:rPr lang="en-IN">
+                          <a:effectLst/>
+                        </a:rPr>
+                        <a:t> </a:t>
+                      </a:r>
+                    </a:p>
+                  </a:txBody>
+                  <a:tcPr marL="47625" marR="47625" marT="47625" marB="47625">
+                    <a:lnL w="19050" cap="flat" cmpd="sng" algn="ctr">
+                      <a:solidFill>
+                        <a:srgbClr val="FFFFFF"/>
+                      </a:solidFill>
+                      <a:prstDash val="solid"/>
+                      <a:round/>
+                      <a:headEnd type="none" w="med" len="med"/>
+                      <a:tailEnd type="none" w="med" len="med"/>
+                    </a:lnL>
+                    <a:lnR w="19050" cap="flat" cmpd="sng" algn="ctr">
+                      <a:solidFill>
+                        <a:srgbClr val="FFFFFF"/>
+                      </a:solidFill>
+                      <a:prstDash val="solid"/>
+                      <a:round/>
+                      <a:headEnd type="none" w="med" len="med"/>
+                      <a:tailEnd type="none" w="med" len="med"/>
+                    </a:lnR>
+                    <a:lnT>
+                      <a:noFill/>
+                    </a:lnT>
+                    <a:lnB>
+                      <a:noFill/>
+                    </a:lnB>
+                    <a:noFill/>
+                  </a:tcPr>
+                </a:tc>
+                <a:tc>
+                  <a:txBody>
+                    <a:bodyPr/>
+                    <a:lstStyle/>
+                    <a:p>
+                      <a:pPr fontAlgn="t">
+                        <a:buNone/>
+                      </a:pPr>
+                      <a:r>
+                        <a:rPr lang="en-IN">
+                          <a:effectLst/>
+                        </a:rPr>
+                        <a:t>Single system only </a:t>
+                      </a:r>
+                    </a:p>
+                  </a:txBody>
+                  <a:tcPr marL="47625" marR="47625" marT="47625" marB="47625">
+                    <a:lnL w="19050" cap="flat" cmpd="sng" algn="ctr">
+                      <a:solidFill>
+                        <a:srgbClr val="FFFFFF"/>
+                      </a:solidFill>
+                      <a:prstDash val="solid"/>
+                      <a:round/>
+                      <a:headEnd type="none" w="med" len="med"/>
+                      <a:tailEnd type="none" w="med" len="med"/>
+                    </a:lnL>
+                    <a:lnR w="19050" cap="flat" cmpd="sng" algn="ctr">
+                      <a:solidFill>
+                        <a:srgbClr val="FFFFFF"/>
+                      </a:solidFill>
+                      <a:prstDash val="solid"/>
+                      <a:round/>
+                      <a:headEnd type="none" w="med" len="med"/>
+                      <a:tailEnd type="none" w="med" len="med"/>
+                    </a:lnR>
+                    <a:lnT>
+                      <a:noFill/>
+                    </a:lnT>
+                    <a:lnB>
+                      <a:noFill/>
+                    </a:lnB>
+                    <a:noFill/>
+                  </a:tcPr>
+                </a:tc>
+                <a:tc>
+                  <a:txBody>
+                    <a:bodyPr/>
+                    <a:lstStyle/>
+                    <a:p>
+                      <a:pPr fontAlgn="t">
+                        <a:buNone/>
+                      </a:pPr>
+                      <a:r>
+                        <a:rPr lang="en-IN">
+                          <a:effectLst/>
+                        </a:rPr>
+                        <a:t>Distributed/Multi-processor </a:t>
+                      </a:r>
+                    </a:p>
+                  </a:txBody>
+                  <a:tcPr marL="47625" marR="47625" marT="47625" marB="47625">
+                    <a:lnL w="19050" cap="flat" cmpd="sng" algn="ctr">
+                      <a:solidFill>
+                        <a:srgbClr val="FFFFFF"/>
+                      </a:solidFill>
+                      <a:prstDash val="solid"/>
+                      <a:round/>
+                      <a:headEnd type="none" w="med" len="med"/>
+                      <a:tailEnd type="none" w="med" len="med"/>
+                    </a:lnL>
+                    <a:lnR w="19050" cap="flat" cmpd="sng" algn="ctr">
+                      <a:solidFill>
+                        <a:srgbClr val="FFFFFF"/>
+                      </a:solidFill>
+                      <a:prstDash val="solid"/>
+                      <a:round/>
+                      <a:headEnd type="none" w="med" len="med"/>
+                      <a:tailEnd type="none" w="med" len="med"/>
+                    </a:lnR>
+                    <a:lnT>
+                      <a:noFill/>
+                    </a:lnT>
+                    <a:lnB>
+                      <a:noFill/>
+                    </a:lnB>
+                    <a:noFill/>
+                  </a:tcPr>
+                </a:tc>
+                <a:extLst>
+                  <a:ext uri="{0D108BD9-81ED-4DB2-BD59-A6C34878D82A}">
+                    <a16:rowId xmlns:a16="http://schemas.microsoft.com/office/drawing/2014/main" val="358292627"/>
+                  </a:ext>
+                </a:extLst>
+              </a:tr>
+              <a:tr h="0">
+                <a:tc>
+                  <a:txBody>
+                    <a:bodyPr/>
+                    <a:lstStyle/>
+                    <a:p>
+                      <a:pPr fontAlgn="t">
+                        <a:buNone/>
+                      </a:pPr>
+                      <a:r>
+                        <a:rPr lang="en-IN" b="1">
+                          <a:effectLst/>
+                        </a:rPr>
+                        <a:t>Kernel Role</a:t>
+                      </a:r>
+                      <a:r>
+                        <a:rPr lang="en-IN">
+                          <a:effectLst/>
+                        </a:rPr>
+                        <a:t> </a:t>
+                      </a:r>
+                    </a:p>
+                  </a:txBody>
+                  <a:tcPr marL="47625" marR="47625" marT="47625" marB="47625">
+                    <a:lnL w="19050" cap="flat" cmpd="sng" algn="ctr">
+                      <a:solidFill>
+                        <a:srgbClr val="FFFFFF"/>
+                      </a:solidFill>
+                      <a:prstDash val="solid"/>
+                      <a:round/>
+                      <a:headEnd type="none" w="med" len="med"/>
+                      <a:tailEnd type="none" w="med" len="med"/>
+                    </a:lnL>
+                    <a:lnR w="19050" cap="flat" cmpd="sng" algn="ctr">
+                      <a:solidFill>
+                        <a:srgbClr val="FFFFFF"/>
+                      </a:solidFill>
+                      <a:prstDash val="solid"/>
+                      <a:round/>
+                      <a:headEnd type="none" w="med" len="med"/>
+                      <a:tailEnd type="none" w="med" len="med"/>
+                    </a:lnR>
+                    <a:lnT>
+                      <a:noFill/>
+                    </a:lnT>
+                    <a:lnB>
+                      <a:noFill/>
+                    </a:lnB>
+                    <a:noFill/>
+                  </a:tcPr>
+                </a:tc>
+                <a:tc>
+                  <a:txBody>
+                    <a:bodyPr/>
+                    <a:lstStyle/>
+                    <a:p>
+                      <a:pPr fontAlgn="t">
+                        <a:buNone/>
+                      </a:pPr>
+                      <a:r>
+                        <a:rPr lang="en-IN">
+                          <a:effectLst/>
+                        </a:rPr>
+                        <a:t>Setup only </a:t>
+                      </a:r>
+                    </a:p>
+                  </a:txBody>
+                  <a:tcPr marL="47625" marR="47625" marT="47625" marB="47625">
+                    <a:lnL w="19050" cap="flat" cmpd="sng" algn="ctr">
+                      <a:solidFill>
+                        <a:srgbClr val="FFFFFF"/>
+                      </a:solidFill>
+                      <a:prstDash val="solid"/>
+                      <a:round/>
+                      <a:headEnd type="none" w="med" len="med"/>
+                      <a:tailEnd type="none" w="med" len="med"/>
+                    </a:lnL>
+                    <a:lnR w="19050" cap="flat" cmpd="sng" algn="ctr">
+                      <a:solidFill>
+                        <a:srgbClr val="FFFFFF"/>
+                      </a:solidFill>
+                      <a:prstDash val="solid"/>
+                      <a:round/>
+                      <a:headEnd type="none" w="med" len="med"/>
+                      <a:tailEnd type="none" w="med" len="med"/>
+                    </a:lnR>
+                    <a:lnT>
+                      <a:noFill/>
+                    </a:lnT>
+                    <a:lnB>
+                      <a:noFill/>
+                    </a:lnB>
+                    <a:noFill/>
+                  </a:tcPr>
+                </a:tc>
+                <a:tc>
+                  <a:txBody>
+                    <a:bodyPr/>
+                    <a:lstStyle/>
+                    <a:p>
+                      <a:pPr fontAlgn="t">
+                        <a:buNone/>
+                      </a:pPr>
+                      <a:r>
+                        <a:rPr lang="en-IN" dirty="0">
+                          <a:effectLst/>
+                        </a:rPr>
+                        <a:t>Involved in every transfer </a:t>
+                      </a:r>
+                    </a:p>
+                  </a:txBody>
+                  <a:tcPr marL="47625" marR="47625" marT="47625" marB="47625">
+                    <a:lnL w="19050" cap="flat" cmpd="sng" algn="ctr">
+                      <a:solidFill>
+                        <a:srgbClr val="FFFFFF"/>
+                      </a:solidFill>
+                      <a:prstDash val="solid"/>
+                      <a:round/>
+                      <a:headEnd type="none" w="med" len="med"/>
+                      <a:tailEnd type="none" w="med" len="med"/>
+                    </a:lnL>
+                    <a:lnR w="19050" cap="flat" cmpd="sng" algn="ctr">
+                      <a:solidFill>
+                        <a:srgbClr val="FFFFFF"/>
+                      </a:solidFill>
+                      <a:prstDash val="solid"/>
+                      <a:round/>
+                      <a:headEnd type="none" w="med" len="med"/>
+                      <a:tailEnd type="none" w="med" len="med"/>
+                    </a:lnR>
+                    <a:lnT>
+                      <a:noFill/>
+                    </a:lnT>
+                    <a:lnB>
+                      <a:noFill/>
+                    </a:lnB>
+                    <a:noFill/>
+                  </a:tcPr>
+                </a:tc>
+                <a:extLst>
+                  <a:ext uri="{0D108BD9-81ED-4DB2-BD59-A6C34878D82A}">
+                    <a16:rowId xmlns:a16="http://schemas.microsoft.com/office/drawing/2014/main" val="441337671"/>
+                  </a:ext>
+                </a:extLst>
+              </a:tr>
+            </a:tbl>
+          </a:graphicData>
+        </a:graphic>
+      </p:graphicFrame>
+      <p:sp>
+        <p:nvSpPr>
+          <p:cNvPr id="4" name="Date Placeholder 3">
+            <a:extLst>
+              <a:ext uri="{FF2B5EF4-FFF2-40B4-BE49-F238E27FC236}">
+                <a16:creationId xmlns:a16="http://schemas.microsoft.com/office/drawing/2014/main" id="{5245A286-6A22-3FE0-2371-4ECCE08E717A}"/>
+              </a:ext>
+            </a:extLst>
+          </p:cNvPr>
+          <p:cNvSpPr>
+            <a:spLocks noGrp="1"/>
+          </p:cNvSpPr>
+          <p:nvPr>
+            <p:ph type="dt" sz="half" idx="10"/>
+          </p:nvPr>
+        </p:nvSpPr>
+        <p:spPr/>
+        <p:txBody>
+          <a:bodyPr/>
+          <a:lstStyle/>
+          <a:p>
+            <a:pPr>
+              <a:defRPr/>
+            </a:pPr>
+            <a:r>
+              <a:rPr lang="en-US"/>
+              <a:t>21/12/2020</a:t>
+            </a:r>
+          </a:p>
+        </p:txBody>
+      </p:sp>
+      <p:sp>
+        <p:nvSpPr>
+          <p:cNvPr id="5" name="Slide Number Placeholder 4">
+            <a:extLst>
+              <a:ext uri="{FF2B5EF4-FFF2-40B4-BE49-F238E27FC236}">
+                <a16:creationId xmlns:a16="http://schemas.microsoft.com/office/drawing/2014/main" id="{EF39BB72-4B65-294C-4531-0ED9EF370EC3}"/>
+              </a:ext>
+            </a:extLst>
+          </p:cNvPr>
+          <p:cNvSpPr>
+            <a:spLocks noGrp="1"/>
+          </p:cNvSpPr>
+          <p:nvPr>
+            <p:ph type="sldNum" sz="quarter" idx="12"/>
+          </p:nvPr>
+        </p:nvSpPr>
+        <p:spPr/>
+        <p:txBody>
+          <a:bodyPr/>
+          <a:lstStyle/>
+          <a:p>
+            <a:pPr>
+              <a:defRPr/>
+            </a:pPr>
+            <a:fld id="{CA887A73-1AE0-46F8-856A-18EA1CF30A1B}" type="slidenum">
+              <a:rPr lang="en-US" altLang="en-US" smtClean="0"/>
+              <a:pPr>
+                <a:defRPr/>
+              </a:pPr>
+              <a:t>14</a:t>
+            </a:fld>
+            <a:endParaRPr lang="en-US" altLang="en-US"/>
+          </a:p>
+        </p:txBody>
+      </p:sp>
+    </p:spTree>
+    <p:extLst>
+      <p:ext uri="{BB962C8B-B14F-4D97-AF65-F5344CB8AC3E}">
+        <p14:creationId xmlns:p14="http://schemas.microsoft.com/office/powerpoint/2010/main" val="427264491"/>
+      </p:ext>
+    </p:extLst>
+  </p:cSld>
+  <p:clrMapOvr>
+    <a:masterClrMapping/>
+  </p:clrMapOvr>
+</p:sld>
+</file>
+
+<file path=ppt/slides/slide15.xml><?xml version="1.0" encoding="utf-8"?>
+<p:sld xmlns:a="http://schemas.openxmlformats.org/drawingml/2006/main" xmlns:r="http://schemas.openxmlformats.org/officeDocument/2006/relationships" xmlns:p="http://schemas.openxmlformats.org/presentationml/2006/main">
+  <p:cSld>
+    <p:spTree>
+      <p:nvGrpSpPr>
+        <p:cNvPr id="1" name=""/>
+        <p:cNvGrpSpPr/>
+        <p:nvPr/>
+      </p:nvGrpSpPr>
+      <p:grpSpPr>
+        <a:xfrm>
+          <a:off x="0" y="0"/>
+          <a:ext cx="0" cy="0"/>
+          <a:chOff x="0" y="0"/>
+          <a:chExt cx="0" cy="0"/>
+        </a:xfrm>
+      </p:grpSpPr>
+      <p:sp>
+        <p:nvSpPr>
+          <p:cNvPr id="2" name="Title 1">
+            <a:extLst>
+              <a:ext uri="{FF2B5EF4-FFF2-40B4-BE49-F238E27FC236}">
+                <a16:creationId xmlns:a16="http://schemas.microsoft.com/office/drawing/2014/main" id="{9F7871B7-34F7-2862-B5DC-FD7B62A20E85}"/>
+              </a:ext>
+            </a:extLst>
+          </p:cNvPr>
+          <p:cNvSpPr>
+            <a:spLocks noGrp="1"/>
+          </p:cNvSpPr>
+          <p:nvPr>
+            <p:ph type="title"/>
+          </p:nvPr>
+        </p:nvSpPr>
+        <p:spPr/>
+        <p:txBody>
+          <a:bodyPr/>
+          <a:lstStyle/>
+          <a:p>
+            <a:r>
+              <a:rPr lang="en-US" dirty="0"/>
+              <a:t>Practical guidelines</a:t>
+            </a:r>
+            <a:endParaRPr lang="en-IN" dirty="0"/>
+          </a:p>
+        </p:txBody>
+      </p:sp>
+      <p:sp>
+        <p:nvSpPr>
+          <p:cNvPr id="3" name="Content Placeholder 2">
+            <a:extLst>
+              <a:ext uri="{FF2B5EF4-FFF2-40B4-BE49-F238E27FC236}">
+                <a16:creationId xmlns:a16="http://schemas.microsoft.com/office/drawing/2014/main" id="{933709D2-A086-425A-6650-CB724ED8091F}"/>
+              </a:ext>
+            </a:extLst>
+          </p:cNvPr>
+          <p:cNvSpPr>
+            <a:spLocks noGrp="1"/>
+          </p:cNvSpPr>
+          <p:nvPr>
+            <p:ph idx="1"/>
+          </p:nvPr>
+        </p:nvSpPr>
+        <p:spPr/>
+        <p:txBody>
+          <a:bodyPr/>
+          <a:lstStyle/>
+          <a:p>
+            <a:r>
+              <a:rPr lang="en-US" dirty="0"/>
+              <a:t>Keep critical sections short</a:t>
+            </a:r>
+          </a:p>
+          <a:p>
+            <a:r>
+              <a:rPr lang="en-US" dirty="0"/>
+              <a:t>Prefer message passing for complex systems</a:t>
+            </a:r>
+          </a:p>
+          <a:p>
+            <a:r>
+              <a:rPr lang="en-US" dirty="0"/>
+              <a:t>Use bounded queues</a:t>
+            </a:r>
+          </a:p>
+          <a:p>
+            <a:r>
+              <a:rPr lang="en-US" dirty="0"/>
+              <a:t>Avoid nested locks</a:t>
+            </a:r>
+          </a:p>
+          <a:p>
+            <a:r>
+              <a:rPr lang="en-US" dirty="0"/>
+              <a:t>Use priority protocols</a:t>
+            </a:r>
+            <a:endParaRPr lang="en-IN" dirty="0"/>
+          </a:p>
+        </p:txBody>
+      </p:sp>
+      <p:sp>
+        <p:nvSpPr>
+          <p:cNvPr id="4" name="Date Placeholder 3">
+            <a:extLst>
+              <a:ext uri="{FF2B5EF4-FFF2-40B4-BE49-F238E27FC236}">
+                <a16:creationId xmlns:a16="http://schemas.microsoft.com/office/drawing/2014/main" id="{F778564E-8263-C394-EAD4-F6CAAA67F129}"/>
+              </a:ext>
+            </a:extLst>
+          </p:cNvPr>
+          <p:cNvSpPr>
+            <a:spLocks noGrp="1"/>
+          </p:cNvSpPr>
+          <p:nvPr>
+            <p:ph type="dt" sz="half" idx="10"/>
+          </p:nvPr>
+        </p:nvSpPr>
+        <p:spPr/>
+        <p:txBody>
+          <a:bodyPr/>
+          <a:lstStyle/>
+          <a:p>
+            <a:pPr>
+              <a:defRPr/>
+            </a:pPr>
+            <a:r>
+              <a:rPr lang="en-US"/>
+              <a:t>21/12/2020</a:t>
+            </a:r>
+          </a:p>
+        </p:txBody>
+      </p:sp>
+      <p:sp>
+        <p:nvSpPr>
+          <p:cNvPr id="5" name="Slide Number Placeholder 4">
+            <a:extLst>
+              <a:ext uri="{FF2B5EF4-FFF2-40B4-BE49-F238E27FC236}">
+                <a16:creationId xmlns:a16="http://schemas.microsoft.com/office/drawing/2014/main" id="{05F0C162-4B78-9979-0792-8BC54194E527}"/>
+              </a:ext>
+            </a:extLst>
+          </p:cNvPr>
+          <p:cNvSpPr>
+            <a:spLocks noGrp="1"/>
+          </p:cNvSpPr>
+          <p:nvPr>
+            <p:ph type="sldNum" sz="quarter" idx="12"/>
+          </p:nvPr>
+        </p:nvSpPr>
+        <p:spPr/>
+        <p:txBody>
+          <a:bodyPr/>
+          <a:lstStyle/>
+          <a:p>
+            <a:pPr>
+              <a:defRPr/>
+            </a:pPr>
+            <a:fld id="{CA887A73-1AE0-46F8-856A-18EA1CF30A1B}" type="slidenum">
+              <a:rPr lang="en-US" altLang="en-US" smtClean="0"/>
+              <a:pPr>
+                <a:defRPr/>
+              </a:pPr>
+              <a:t>15</a:t>
+            </a:fld>
+            <a:endParaRPr lang="en-US" altLang="en-US"/>
+          </a:p>
+        </p:txBody>
+      </p:sp>
+    </p:spTree>
+    <p:extLst>
+      <p:ext uri="{BB962C8B-B14F-4D97-AF65-F5344CB8AC3E}">
+        <p14:creationId xmlns:p14="http://schemas.microsoft.com/office/powerpoint/2010/main" val="593977080"/>
+      </p:ext>
+    </p:extLst>
+  </p:cSld>
+  <p:clrMapOvr>
+    <a:masterClrMapping/>
+  </p:clrMapOvr>
+  <p:timing>
+    <p:tnLst>
+      <p:par>
+        <p:cTn id="1" dur="indefinite" restart="never" nodeType="tmRoot">
+          <p:childTnLst>
+            <p:seq concurrent="1" nextAc="seek">
+              <p:cTn id="2" dur="indefinite" nodeType="mainSeq">
+                <p:childTnLst>
+                  <p:par>
+                    <p:cTn id="3" fill="hold">
+                      <p:stCondLst>
+                        <p:cond delay="indefinite"/>
+                      </p:stCondLst>
+                      <p:childTnLst>
+                        <p:par>
+                          <p:cTn id="4" fill="hold">
+                            <p:stCondLst>
+                              <p:cond delay="0"/>
+                            </p:stCondLst>
+                            <p:childTnLst>
+                              <p:par>
+                                <p:cTn id="5" presetID="1" presetClass="entr" presetSubtype="0" fill="hold" grpId="0" nodeType="clickEffect">
+                                  <p:stCondLst>
+                                    <p:cond delay="0"/>
+                                  </p:stCondLst>
+                                  <p:childTnLst>
+                                    <p:set>
+                                      <p:cBhvr>
+                                        <p:cTn id="6" dur="1" fill="hold">
+                                          <p:stCondLst>
+                                            <p:cond delay="0"/>
+                                          </p:stCondLst>
+                                        </p:cTn>
+                                        <p:tgtEl>
+                                          <p:spTgt spid="3">
+                                            <p:txEl>
+                                              <p:pRg st="0" end="0"/>
+                                            </p:txEl>
+                                          </p:spTgt>
+                                        </p:tgtEl>
+                                        <p:attrNameLst>
+                                          <p:attrName>style.visibility</p:attrName>
+                                        </p:attrNameLst>
+                                      </p:cBhvr>
+                                      <p:to>
+                                        <p:strVal val="visible"/>
+                                      </p:to>
+                                    </p:set>
+                                  </p:childTnLst>
+                                </p:cTn>
+                              </p:par>
+                            </p:childTnLst>
+                          </p:cTn>
+                        </p:par>
+                      </p:childTnLst>
+                    </p:cTn>
+                  </p:par>
+                  <p:par>
+                    <p:cTn id="7" fill="hold">
+                      <p:stCondLst>
+                        <p:cond delay="indefinite"/>
+                      </p:stCondLst>
+                      <p:childTnLst>
+                        <p:par>
+                          <p:cTn id="8" fill="hold">
+                            <p:stCondLst>
+                              <p:cond delay="0"/>
+                            </p:stCondLst>
+                            <p:childTnLst>
+                              <p:par>
+                                <p:cTn id="9" presetID="1" presetClass="entr" presetSubtype="0" fill="hold" grpId="0" nodeType="clickEffect">
+                                  <p:stCondLst>
+                                    <p:cond delay="0"/>
+                                  </p:stCondLst>
+                                  <p:childTnLst>
+                                    <p:set>
+                                      <p:cBhvr>
+                                        <p:cTn id="10" dur="1" fill="hold">
+                                          <p:stCondLst>
+                                            <p:cond delay="0"/>
+                                          </p:stCondLst>
+                                        </p:cTn>
+                                        <p:tgtEl>
+                                          <p:spTgt spid="3">
+                                            <p:txEl>
+                                              <p:pRg st="1" end="1"/>
+                                            </p:txEl>
+                                          </p:spTgt>
+                                        </p:tgtEl>
+                                        <p:attrNameLst>
+                                          <p:attrName>style.visibility</p:attrName>
+                                        </p:attrNameLst>
+                                      </p:cBhvr>
+                                      <p:to>
+                                        <p:strVal val="visible"/>
+                                      </p:to>
+                                    </p:set>
+                                  </p:childTnLst>
+                                </p:cTn>
+                              </p:par>
+                            </p:childTnLst>
+                          </p:cTn>
+                        </p:par>
+                      </p:childTnLst>
+                    </p:cTn>
+                  </p:par>
+                  <p:par>
+                    <p:cTn id="11" fill="hold">
+                      <p:stCondLst>
+                        <p:cond delay="indefinite"/>
+                      </p:stCondLst>
+                      <p:childTnLst>
+                        <p:par>
+                          <p:cTn id="12" fill="hold">
+                            <p:stCondLst>
+                              <p:cond delay="0"/>
+                            </p:stCondLst>
+                            <p:childTnLst>
+                              <p:par>
+                                <p:cTn id="13" presetID="1" presetClass="entr" presetSubtype="0" fill="hold" grpId="0" nodeType="clickEffect">
+                                  <p:stCondLst>
+                                    <p:cond delay="0"/>
+                                  </p:stCondLst>
+                                  <p:childTnLst>
+                                    <p:set>
+                                      <p:cBhvr>
+                                        <p:cTn id="14" dur="1" fill="hold">
+                                          <p:stCondLst>
+                                            <p:cond delay="0"/>
+                                          </p:stCondLst>
+                                        </p:cTn>
+                                        <p:tgtEl>
+                                          <p:spTgt spid="3">
+                                            <p:txEl>
+                                              <p:pRg st="2" end="2"/>
+                                            </p:txEl>
+                                          </p:spTgt>
+                                        </p:tgtEl>
+                                        <p:attrNameLst>
+                                          <p:attrName>style.visibility</p:attrName>
+                                        </p:attrNameLst>
+                                      </p:cBhvr>
+                                      <p:to>
+                                        <p:strVal val="visible"/>
+                                      </p:to>
+                                    </p:set>
+                                  </p:childTnLst>
+                                </p:cTn>
+                              </p:par>
+                            </p:childTnLst>
+                          </p:cTn>
+                        </p:par>
+                      </p:childTnLst>
+                    </p:cTn>
+                  </p:par>
+                  <p:par>
+                    <p:cTn id="15" fill="hold">
+                      <p:stCondLst>
+                        <p:cond delay="indefinite"/>
+                      </p:stCondLst>
+                      <p:childTnLst>
+                        <p:par>
+                          <p:cTn id="16" fill="hold">
+                            <p:stCondLst>
+                              <p:cond delay="0"/>
+                            </p:stCondLst>
+                            <p:childTnLst>
+                              <p:par>
+                                <p:cTn id="17" presetID="1" presetClass="entr" presetSubtype="0" fill="hold" grpId="0" nodeType="clickEffect">
+                                  <p:stCondLst>
+                                    <p:cond delay="0"/>
+                                  </p:stCondLst>
+                                  <p:childTnLst>
+                                    <p:set>
+                                      <p:cBhvr>
+                                        <p:cTn id="18" dur="1" fill="hold">
+                                          <p:stCondLst>
+                                            <p:cond delay="0"/>
+                                          </p:stCondLst>
+                                        </p:cTn>
+                                        <p:tgtEl>
+                                          <p:spTgt spid="3">
+                                            <p:txEl>
+                                              <p:pRg st="3" end="3"/>
+                                            </p:txEl>
+                                          </p:spTgt>
+                                        </p:tgtEl>
+                                        <p:attrNameLst>
+                                          <p:attrName>style.visibility</p:attrName>
+                                        </p:attrNameLst>
+                                      </p:cBhvr>
+                                      <p:to>
+                                        <p:strVal val="visible"/>
+                                      </p:to>
+                                    </p:set>
+                                  </p:childTnLst>
+                                </p:cTn>
+                              </p:par>
+                            </p:childTnLst>
+                          </p:cTn>
+                        </p:par>
+                      </p:childTnLst>
+                    </p:cTn>
+                  </p:par>
+                  <p:par>
+                    <p:cTn id="19" fill="hold">
+                      <p:stCondLst>
+                        <p:cond delay="indefinite"/>
+                      </p:stCondLst>
+                      <p:childTnLst>
+                        <p:par>
+                          <p:cTn id="20" fill="hold">
+                            <p:stCondLst>
+                              <p:cond delay="0"/>
+                            </p:stCondLst>
+                            <p:childTnLst>
+                              <p:par>
+                                <p:cTn id="21" presetID="1" presetClass="entr" presetSubtype="0" fill="hold" grpId="0" nodeType="clickEffect">
+                                  <p:stCondLst>
+                                    <p:cond delay="0"/>
+                                  </p:stCondLst>
+                                  <p:childTnLst>
+                                    <p:set>
+                                      <p:cBhvr>
+                                        <p:cTn id="22" dur="1" fill="hold">
+                                          <p:stCondLst>
+                                            <p:cond delay="0"/>
+                                          </p:stCondLst>
+                                        </p:cTn>
+                                        <p:tgtEl>
+                                          <p:spTgt spid="3">
+                                            <p:txEl>
+                                              <p:pRg st="4" end="4"/>
+                                            </p:txEl>
+                                          </p:spTgt>
+                                        </p:tgtEl>
+                                        <p:attrNameLst>
+                                          <p:attrName>style.visibility</p:attrName>
+                                        </p:attrNameLst>
+                                      </p:cBhvr>
+                                      <p:to>
+                                        <p:strVal val="visible"/>
+                                      </p:to>
+                                    </p:set>
+                                  </p:childTnLst>
+                                </p:cTn>
+                              </p:par>
+                            </p:childTnLst>
+                          </p:cTn>
+                        </p:par>
+                      </p:childTnLst>
+                    </p:cTn>
+                  </p:par>
+                </p:childTnLst>
+              </p:cTn>
+              <p:prevCondLst>
+                <p:cond evt="onPrev" delay="0">
+                  <p:tgtEl>
+                    <p:sldTgt/>
+                  </p:tgtEl>
+                </p:cond>
+              </p:prevCondLst>
+              <p:nextCondLst>
+                <p:cond evt="onNext" delay="0">
+                  <p:tgtEl>
+                    <p:sldTgt/>
+                  </p:tgtEl>
+                </p:cond>
+              </p:nextCondLst>
+            </p:seq>
+          </p:childTnLst>
+        </p:cTn>
+      </p:par>
+    </p:tnLst>
+    <p:bldLst>
+      <p:bldP spid="3" grpId="0" build="p"/>
+    </p:bldLst>
+  </p:timing>
+</p:sld>
+</file>
+
+<file path=ppt/slides/slide2.xml><?xml version="1.0" encoding="utf-8"?>
+<p:sld xmlns:a="http://schemas.openxmlformats.org/drawingml/2006/main" xmlns:r="http://schemas.openxmlformats.org/officeDocument/2006/relationships" xmlns:p="http://schemas.openxmlformats.org/presentationml/2006/main">
+  <p:cSld>
+    <p:spTree>
+      <p:nvGrpSpPr>
+        <p:cNvPr id="1" name=""/>
+        <p:cNvGrpSpPr/>
+        <p:nvPr/>
+      </p:nvGrpSpPr>
+      <p:grpSpPr>
+        <a:xfrm>
+          <a:off x="0" y="0"/>
+          <a:ext cx="0" cy="0"/>
+          <a:chOff x="0" y="0"/>
+          <a:chExt cx="0" cy="0"/>
+        </a:xfrm>
+      </p:grpSpPr>
+      <p:sp>
+        <p:nvSpPr>
+          <p:cNvPr id="2" name="Title 1">
+            <a:extLst>
+              <a:ext uri="{FF2B5EF4-FFF2-40B4-BE49-F238E27FC236}">
+                <a16:creationId xmlns:a16="http://schemas.microsoft.com/office/drawing/2014/main" id="{F4E3DF55-2054-263F-1F80-3FC57BBCBCB5}"/>
+              </a:ext>
+            </a:extLst>
+          </p:cNvPr>
+          <p:cNvSpPr>
+            <a:spLocks noGrp="1"/>
+          </p:cNvSpPr>
+          <p:nvPr>
+            <p:ph type="title"/>
+          </p:nvPr>
+        </p:nvSpPr>
+        <p:spPr/>
+        <p:txBody>
+          <a:bodyPr/>
+          <a:lstStyle/>
+          <a:p>
+            <a:r>
+              <a:rPr lang="en-US" dirty="0"/>
+              <a:t>Building a multitasking embedded software system</a:t>
+            </a:r>
+            <a:endParaRPr lang="en-IN" dirty="0"/>
+          </a:p>
+        </p:txBody>
+      </p:sp>
+      <p:sp>
+        <p:nvSpPr>
+          <p:cNvPr id="3" name="Content Placeholder 2">
+            <a:extLst>
+              <a:ext uri="{FF2B5EF4-FFF2-40B4-BE49-F238E27FC236}">
+                <a16:creationId xmlns:a16="http://schemas.microsoft.com/office/drawing/2014/main" id="{037DC8CC-F9A4-DBF2-CFD1-4E01F71ABB1D}"/>
+              </a:ext>
+            </a:extLst>
+          </p:cNvPr>
+          <p:cNvSpPr>
+            <a:spLocks noGrp="1"/>
+          </p:cNvSpPr>
+          <p:nvPr>
+            <p:ph idx="1"/>
+          </p:nvPr>
+        </p:nvSpPr>
+        <p:spPr/>
+        <p:txBody>
+          <a:bodyPr>
+            <a:normAutofit fontScale="92500" lnSpcReduction="10000"/>
+          </a:bodyPr>
+          <a:lstStyle/>
+          <a:p>
+            <a:pPr marL="0" indent="0">
+              <a:buNone/>
+            </a:pPr>
+            <a:r>
+              <a:rPr lang="en-US" dirty="0"/>
+              <a:t>Multitasking introduces:</a:t>
+            </a:r>
+          </a:p>
+          <a:p>
+            <a:r>
+              <a:rPr lang="en-US" dirty="0"/>
+              <a:t>Concurrent execution</a:t>
+            </a:r>
+          </a:p>
+          <a:p>
+            <a:r>
+              <a:rPr lang="en-US" dirty="0"/>
+              <a:t>Shared data</a:t>
+            </a:r>
+          </a:p>
+          <a:p>
+            <a:r>
+              <a:rPr lang="en-US" dirty="0"/>
+              <a:t>Asynchronous events</a:t>
+            </a:r>
+          </a:p>
+          <a:p>
+            <a:pPr marL="0" indent="0">
+              <a:buNone/>
+            </a:pPr>
+            <a:endParaRPr lang="en-US" dirty="0"/>
+          </a:p>
+          <a:p>
+            <a:r>
+              <a:rPr lang="en-US" dirty="0"/>
+              <a:t>Race conditions</a:t>
+            </a:r>
+          </a:p>
+          <a:p>
+            <a:r>
+              <a:rPr lang="en-US" dirty="0"/>
+              <a:t>Inconsistent state of the system</a:t>
+            </a:r>
+          </a:p>
+          <a:p>
+            <a:pPr marL="0" indent="0">
+              <a:buNone/>
+            </a:pPr>
+            <a:endParaRPr lang="en-US" dirty="0"/>
+          </a:p>
+          <a:p>
+            <a:r>
+              <a:rPr lang="en-US" dirty="0"/>
+              <a:t>Need for synchronization and inter process communication (IPC)</a:t>
+            </a:r>
+          </a:p>
+        </p:txBody>
+      </p:sp>
+      <p:sp>
+        <p:nvSpPr>
+          <p:cNvPr id="4" name="Date Placeholder 3">
+            <a:extLst>
+              <a:ext uri="{FF2B5EF4-FFF2-40B4-BE49-F238E27FC236}">
+                <a16:creationId xmlns:a16="http://schemas.microsoft.com/office/drawing/2014/main" id="{C678D7FD-FC1C-644A-A409-1EAB92531A82}"/>
+              </a:ext>
+            </a:extLst>
+          </p:cNvPr>
+          <p:cNvSpPr>
+            <a:spLocks noGrp="1"/>
+          </p:cNvSpPr>
+          <p:nvPr>
+            <p:ph type="dt" sz="half" idx="10"/>
+          </p:nvPr>
+        </p:nvSpPr>
+        <p:spPr/>
+        <p:txBody>
+          <a:bodyPr/>
+          <a:lstStyle/>
+          <a:p>
+            <a:pPr>
+              <a:defRPr/>
+            </a:pPr>
+            <a:r>
+              <a:rPr lang="en-US"/>
+              <a:t>21/12/2020</a:t>
+            </a:r>
+          </a:p>
+        </p:txBody>
+      </p:sp>
+      <p:sp>
+        <p:nvSpPr>
+          <p:cNvPr id="5" name="Slide Number Placeholder 4">
+            <a:extLst>
+              <a:ext uri="{FF2B5EF4-FFF2-40B4-BE49-F238E27FC236}">
+                <a16:creationId xmlns:a16="http://schemas.microsoft.com/office/drawing/2014/main" id="{642E9772-D828-1F50-702B-2240046E66EF}"/>
+              </a:ext>
+            </a:extLst>
+          </p:cNvPr>
+          <p:cNvSpPr>
+            <a:spLocks noGrp="1"/>
+          </p:cNvSpPr>
+          <p:nvPr>
+            <p:ph type="sldNum" sz="quarter" idx="12"/>
+          </p:nvPr>
+        </p:nvSpPr>
+        <p:spPr/>
+        <p:txBody>
+          <a:bodyPr/>
+          <a:lstStyle/>
+          <a:p>
+            <a:pPr>
+              <a:defRPr/>
+            </a:pPr>
+            <a:fld id="{CA887A73-1AE0-46F8-856A-18EA1CF30A1B}" type="slidenum">
+              <a:rPr lang="en-US" altLang="en-US" smtClean="0"/>
+              <a:pPr>
+                <a:defRPr/>
+              </a:pPr>
+              <a:t>2</a:t>
+            </a:fld>
+            <a:endParaRPr lang="en-US" altLang="en-US"/>
+          </a:p>
+        </p:txBody>
+      </p:sp>
+    </p:spTree>
+    <p:extLst>
+      <p:ext uri="{BB962C8B-B14F-4D97-AF65-F5344CB8AC3E}">
+        <p14:creationId xmlns:p14="http://schemas.microsoft.com/office/powerpoint/2010/main" val="2814409254"/>
+      </p:ext>
+    </p:extLst>
+  </p:cSld>
+  <p:clrMapOvr>
+    <a:masterClrMapping/>
+  </p:clrMapOvr>
+  <p:timing>
+    <p:tnLst>
+      <p:par>
+        <p:cTn id="1" dur="indefinite" restart="never" nodeType="tmRoot">
+          <p:childTnLst>
+            <p:seq concurrent="1" nextAc="seek">
+              <p:cTn id="2" dur="indefinite" nodeType="mainSeq">
+                <p:childTnLst>
+                  <p:par>
+                    <p:cTn id="3" fill="hold">
+                      <p:stCondLst>
+                        <p:cond delay="indefinite"/>
+                      </p:stCondLst>
+                      <p:childTnLst>
+                        <p:par>
+                          <p:cTn id="4" fill="hold">
+                            <p:stCondLst>
+                              <p:cond delay="0"/>
+                            </p:stCondLst>
+                            <p:childTnLst>
+                              <p:par>
+                                <p:cTn id="5" presetID="1" presetClass="entr" presetSubtype="0" fill="hold" grpId="0" nodeType="clickEffect">
+                                  <p:stCondLst>
+                                    <p:cond delay="0"/>
+                                  </p:stCondLst>
+                                  <p:childTnLst>
+                                    <p:set>
+                                      <p:cBhvr>
+                                        <p:cTn id="6" dur="1" fill="hold">
+                                          <p:stCondLst>
+                                            <p:cond delay="0"/>
+                                          </p:stCondLst>
+                                        </p:cTn>
+                                        <p:tgtEl>
+                                          <p:spTgt spid="3">
+                                            <p:txEl>
+                                              <p:pRg st="0" end="0"/>
+                                            </p:txEl>
+                                          </p:spTgt>
+                                        </p:tgtEl>
+                                        <p:attrNameLst>
+                                          <p:attrName>style.visibility</p:attrName>
+                                        </p:attrNameLst>
+                                      </p:cBhvr>
+                                      <p:to>
+                                        <p:strVal val="visible"/>
+                                      </p:to>
+                                    </p:set>
+                                  </p:childTnLst>
+                                </p:cTn>
+                              </p:par>
+                            </p:childTnLst>
+                          </p:cTn>
+                        </p:par>
+                      </p:childTnLst>
+                    </p:cTn>
+                  </p:par>
+                  <p:par>
+                    <p:cTn id="7" fill="hold">
+                      <p:stCondLst>
+                        <p:cond delay="indefinite"/>
+                      </p:stCondLst>
+                      <p:childTnLst>
+                        <p:par>
+                          <p:cTn id="8" fill="hold">
+                            <p:stCondLst>
+                              <p:cond delay="0"/>
+                            </p:stCondLst>
+                            <p:childTnLst>
+                              <p:par>
+                                <p:cTn id="9" presetID="1" presetClass="entr" presetSubtype="0" fill="hold" grpId="0" nodeType="clickEffect">
+                                  <p:stCondLst>
+                                    <p:cond delay="0"/>
+                                  </p:stCondLst>
+                                  <p:childTnLst>
+                                    <p:set>
+                                      <p:cBhvr>
+                                        <p:cTn id="10" dur="1" fill="hold">
+                                          <p:stCondLst>
+                                            <p:cond delay="0"/>
+                                          </p:stCondLst>
+                                        </p:cTn>
+                                        <p:tgtEl>
+                                          <p:spTgt spid="3">
+                                            <p:txEl>
+                                              <p:pRg st="1" end="1"/>
+                                            </p:txEl>
+                                          </p:spTgt>
+                                        </p:tgtEl>
+                                        <p:attrNameLst>
+                                          <p:attrName>style.visibility</p:attrName>
+                                        </p:attrNameLst>
+                                      </p:cBhvr>
+                                      <p:to>
+                                        <p:strVal val="visible"/>
+                                      </p:to>
+                                    </p:set>
+                                  </p:childTnLst>
+                                </p:cTn>
+                              </p:par>
+                            </p:childTnLst>
+                          </p:cTn>
+                        </p:par>
+                      </p:childTnLst>
+                    </p:cTn>
+                  </p:par>
+                  <p:par>
+                    <p:cTn id="11" fill="hold">
+                      <p:stCondLst>
+                        <p:cond delay="indefinite"/>
+                      </p:stCondLst>
+                      <p:childTnLst>
+                        <p:par>
+                          <p:cTn id="12" fill="hold">
+                            <p:stCondLst>
+                              <p:cond delay="0"/>
+                            </p:stCondLst>
+                            <p:childTnLst>
+                              <p:par>
+                                <p:cTn id="13" presetID="1" presetClass="entr" presetSubtype="0" fill="hold" grpId="0" nodeType="clickEffect">
+                                  <p:stCondLst>
+                                    <p:cond delay="0"/>
+                                  </p:stCondLst>
+                                  <p:childTnLst>
+                                    <p:set>
+                                      <p:cBhvr>
+                                        <p:cTn id="14" dur="1" fill="hold">
+                                          <p:stCondLst>
+                                            <p:cond delay="0"/>
+                                          </p:stCondLst>
+                                        </p:cTn>
+                                        <p:tgtEl>
+                                          <p:spTgt spid="3">
+                                            <p:txEl>
+                                              <p:pRg st="2" end="2"/>
+                                            </p:txEl>
+                                          </p:spTgt>
+                                        </p:tgtEl>
+                                        <p:attrNameLst>
+                                          <p:attrName>style.visibility</p:attrName>
+                                        </p:attrNameLst>
+                                      </p:cBhvr>
+                                      <p:to>
+                                        <p:strVal val="visible"/>
+                                      </p:to>
+                                    </p:set>
+                                  </p:childTnLst>
+                                </p:cTn>
+                              </p:par>
+                            </p:childTnLst>
+                          </p:cTn>
+                        </p:par>
+                      </p:childTnLst>
+                    </p:cTn>
+                  </p:par>
+                  <p:par>
+                    <p:cTn id="15" fill="hold">
+                      <p:stCondLst>
+                        <p:cond delay="indefinite"/>
+                      </p:stCondLst>
+                      <p:childTnLst>
+                        <p:par>
+                          <p:cTn id="16" fill="hold">
+                            <p:stCondLst>
+                              <p:cond delay="0"/>
+                            </p:stCondLst>
+                            <p:childTnLst>
+                              <p:par>
+                                <p:cTn id="17" presetID="1" presetClass="entr" presetSubtype="0" fill="hold" grpId="0" nodeType="clickEffect">
+                                  <p:stCondLst>
+                                    <p:cond delay="0"/>
+                                  </p:stCondLst>
+                                  <p:childTnLst>
+                                    <p:set>
+                                      <p:cBhvr>
+                                        <p:cTn id="18" dur="1" fill="hold">
+                                          <p:stCondLst>
+                                            <p:cond delay="0"/>
+                                          </p:stCondLst>
+                                        </p:cTn>
+                                        <p:tgtEl>
+                                          <p:spTgt spid="3">
+                                            <p:txEl>
+                                              <p:pRg st="3" end="3"/>
+                                            </p:txEl>
+                                          </p:spTgt>
+                                        </p:tgtEl>
+                                        <p:attrNameLst>
+                                          <p:attrName>style.visibility</p:attrName>
+                                        </p:attrNameLst>
+                                      </p:cBhvr>
+                                      <p:to>
+                                        <p:strVal val="visible"/>
+                                      </p:to>
+                                    </p:set>
+                                  </p:childTnLst>
+                                </p:cTn>
+                              </p:par>
+                            </p:childTnLst>
+                          </p:cTn>
+                        </p:par>
+                      </p:childTnLst>
+                    </p:cTn>
+                  </p:par>
+                  <p:par>
+                    <p:cTn id="19" fill="hold">
+                      <p:stCondLst>
+                        <p:cond delay="indefinite"/>
+                      </p:stCondLst>
+                      <p:childTnLst>
+                        <p:par>
+                          <p:cTn id="20" fill="hold">
+                            <p:stCondLst>
+                              <p:cond delay="0"/>
+                            </p:stCondLst>
+                            <p:childTnLst>
+                              <p:par>
+                                <p:cTn id="21" presetID="1" presetClass="entr" presetSubtype="0" fill="hold" grpId="0" nodeType="clickEffect">
+                                  <p:stCondLst>
+                                    <p:cond delay="0"/>
+                                  </p:stCondLst>
+                                  <p:childTnLst>
+                                    <p:set>
+                                      <p:cBhvr>
+                                        <p:cTn id="22" dur="1" fill="hold">
+                                          <p:stCondLst>
+                                            <p:cond delay="0"/>
+                                          </p:stCondLst>
+                                        </p:cTn>
+                                        <p:tgtEl>
+                                          <p:spTgt spid="3">
+                                            <p:txEl>
+                                              <p:pRg st="5" end="5"/>
+                                            </p:txEl>
+                                          </p:spTgt>
+                                        </p:tgtEl>
+                                        <p:attrNameLst>
+                                          <p:attrName>style.visibility</p:attrName>
+                                        </p:attrNameLst>
+                                      </p:cBhvr>
+                                      <p:to>
+                                        <p:strVal val="visible"/>
+                                      </p:to>
+                                    </p:set>
+                                  </p:childTnLst>
+                                </p:cTn>
+                              </p:par>
+                            </p:childTnLst>
+                          </p:cTn>
+                        </p:par>
+                      </p:childTnLst>
+                    </p:cTn>
+                  </p:par>
+                  <p:par>
+                    <p:cTn id="23" fill="hold">
+                      <p:stCondLst>
+                        <p:cond delay="indefinite"/>
+                      </p:stCondLst>
+                      <p:childTnLst>
+                        <p:par>
+                          <p:cTn id="24" fill="hold">
+                            <p:stCondLst>
+                              <p:cond delay="0"/>
+                            </p:stCondLst>
+                            <p:childTnLst>
+                              <p:par>
+                                <p:cTn id="25" presetID="1" presetClass="entr" presetSubtype="0" fill="hold" grpId="0" nodeType="clickEffect">
+                                  <p:stCondLst>
+                                    <p:cond delay="0"/>
+                                  </p:stCondLst>
+                                  <p:childTnLst>
+                                    <p:set>
+                                      <p:cBhvr>
+                                        <p:cTn id="26" dur="1" fill="hold">
+                                          <p:stCondLst>
+                                            <p:cond delay="0"/>
+                                          </p:stCondLst>
+                                        </p:cTn>
+                                        <p:tgtEl>
+                                          <p:spTgt spid="3">
+                                            <p:txEl>
+                                              <p:pRg st="6" end="6"/>
+                                            </p:txEl>
+                                          </p:spTgt>
+                                        </p:tgtEl>
+                                        <p:attrNameLst>
+                                          <p:attrName>style.visibility</p:attrName>
+                                        </p:attrNameLst>
+                                      </p:cBhvr>
+                                      <p:to>
+                                        <p:strVal val="visible"/>
+                                      </p:to>
+                                    </p:set>
+                                  </p:childTnLst>
+                                </p:cTn>
+                              </p:par>
+                            </p:childTnLst>
+                          </p:cTn>
+                        </p:par>
+                      </p:childTnLst>
+                    </p:cTn>
+                  </p:par>
+                  <p:par>
+                    <p:cTn id="27" fill="hold">
+                      <p:stCondLst>
+                        <p:cond delay="indefinite"/>
+                      </p:stCondLst>
+                      <p:childTnLst>
+                        <p:par>
+                          <p:cTn id="28" fill="hold">
+                            <p:stCondLst>
+                              <p:cond delay="0"/>
+                            </p:stCondLst>
+                            <p:childTnLst>
+                              <p:par>
+                                <p:cTn id="29" presetID="1" presetClass="entr" presetSubtype="0" fill="hold" grpId="0" nodeType="clickEffect">
+                                  <p:stCondLst>
+                                    <p:cond delay="0"/>
+                                  </p:stCondLst>
+                                  <p:childTnLst>
+                                    <p:set>
+                                      <p:cBhvr>
+                                        <p:cTn id="30" dur="1" fill="hold">
+                                          <p:stCondLst>
+                                            <p:cond delay="0"/>
+                                          </p:stCondLst>
+                                        </p:cTn>
+                                        <p:tgtEl>
+                                          <p:spTgt spid="3">
+                                            <p:txEl>
+                                              <p:pRg st="8" end="8"/>
+                                            </p:txEl>
+                                          </p:spTgt>
+                                        </p:tgtEl>
+                                        <p:attrNameLst>
+                                          <p:attrName>style.visibility</p:attrName>
+                                        </p:attrNameLst>
+                                      </p:cBhvr>
+                                      <p:to>
+                                        <p:strVal val="visible"/>
+                                      </p:to>
+                                    </p:set>
+                                  </p:childTnLst>
+                                </p:cTn>
+                              </p:par>
+                            </p:childTnLst>
+                          </p:cTn>
+                        </p:par>
+                      </p:childTnLst>
+                    </p:cTn>
+                  </p:par>
+                </p:childTnLst>
+              </p:cTn>
+              <p:prevCondLst>
+                <p:cond evt="onPrev" delay="0">
+                  <p:tgtEl>
+                    <p:sldTgt/>
+                  </p:tgtEl>
+                </p:cond>
+              </p:prevCondLst>
+              <p:nextCondLst>
+                <p:cond evt="onNext" delay="0">
+                  <p:tgtEl>
+                    <p:sldTgt/>
+                  </p:tgtEl>
+                </p:cond>
+              </p:nextCondLst>
+            </p:seq>
+          </p:childTnLst>
+        </p:cTn>
+      </p:par>
+    </p:tnLst>
+    <p:bldLst>
+      <p:bldP spid="3" grpId="0" build="p"/>
+    </p:bldLst>
+  </p:timing>
+</p:sld>
+</file>
+
+<file path=ppt/slides/slide3.xml><?xml version="1.0" encoding="utf-8"?>
+<p:sld xmlns:a="http://schemas.openxmlformats.org/drawingml/2006/main" xmlns:r="http://schemas.openxmlformats.org/officeDocument/2006/relationships" xmlns:p="http://schemas.openxmlformats.org/presentationml/2006/main">
+  <p:cSld>
+    <p:spTree>
+      <p:nvGrpSpPr>
+        <p:cNvPr id="1" name=""/>
+        <p:cNvGrpSpPr/>
+        <p:nvPr/>
+      </p:nvGrpSpPr>
+      <p:grpSpPr>
+        <a:xfrm>
+          <a:off x="0" y="0"/>
+          <a:ext cx="0" cy="0"/>
+          <a:chOff x="0" y="0"/>
+          <a:chExt cx="0" cy="0"/>
+        </a:xfrm>
+      </p:grpSpPr>
+      <p:sp>
+        <p:nvSpPr>
+          <p:cNvPr id="2" name="Title 1">
+            <a:extLst>
+              <a:ext uri="{FF2B5EF4-FFF2-40B4-BE49-F238E27FC236}">
+                <a16:creationId xmlns:a16="http://schemas.microsoft.com/office/drawing/2014/main" id="{2D1AC4E7-1592-1961-0DC4-503F3FCD9C2C}"/>
+              </a:ext>
+            </a:extLst>
+          </p:cNvPr>
+          <p:cNvSpPr>
+            <a:spLocks noGrp="1"/>
+          </p:cNvSpPr>
+          <p:nvPr>
+            <p:ph type="title"/>
+          </p:nvPr>
+        </p:nvSpPr>
+        <p:spPr/>
+        <p:txBody>
+          <a:bodyPr/>
+          <a:lstStyle/>
+          <a:p>
+            <a:r>
+              <a:rPr lang="en-US" dirty="0"/>
+              <a:t>Race conditions</a:t>
+            </a:r>
+            <a:endParaRPr lang="en-IN" dirty="0"/>
+          </a:p>
+        </p:txBody>
+      </p:sp>
+      <p:sp>
+        <p:nvSpPr>
+          <p:cNvPr id="4" name="Date Placeholder 3">
+            <a:extLst>
+              <a:ext uri="{FF2B5EF4-FFF2-40B4-BE49-F238E27FC236}">
+                <a16:creationId xmlns:a16="http://schemas.microsoft.com/office/drawing/2014/main" id="{A005CE19-5B60-0ACD-7D55-85161846304D}"/>
+              </a:ext>
+            </a:extLst>
+          </p:cNvPr>
+          <p:cNvSpPr>
+            <a:spLocks noGrp="1"/>
+          </p:cNvSpPr>
+          <p:nvPr>
+            <p:ph type="dt" sz="half" idx="10"/>
+          </p:nvPr>
+        </p:nvSpPr>
+        <p:spPr/>
+        <p:txBody>
+          <a:bodyPr/>
+          <a:lstStyle/>
+          <a:p>
+            <a:pPr>
+              <a:defRPr/>
+            </a:pPr>
+            <a:r>
+              <a:rPr lang="en-US"/>
+              <a:t>21/12/2020</a:t>
+            </a:r>
+          </a:p>
+        </p:txBody>
+      </p:sp>
+      <p:sp>
+        <p:nvSpPr>
+          <p:cNvPr id="5" name="Slide Number Placeholder 4">
+            <a:extLst>
+              <a:ext uri="{FF2B5EF4-FFF2-40B4-BE49-F238E27FC236}">
+                <a16:creationId xmlns:a16="http://schemas.microsoft.com/office/drawing/2014/main" id="{34A7ACB3-B559-D69C-7DAC-8F6C6A010E59}"/>
+              </a:ext>
+            </a:extLst>
+          </p:cNvPr>
+          <p:cNvSpPr>
+            <a:spLocks noGrp="1"/>
+          </p:cNvSpPr>
+          <p:nvPr>
+            <p:ph type="sldNum" sz="quarter" idx="12"/>
+          </p:nvPr>
+        </p:nvSpPr>
+        <p:spPr/>
+        <p:txBody>
+          <a:bodyPr/>
+          <a:lstStyle/>
+          <a:p>
+            <a:pPr>
+              <a:defRPr/>
+            </a:pPr>
+            <a:fld id="{CA887A73-1AE0-46F8-856A-18EA1CF30A1B}" type="slidenum">
+              <a:rPr lang="en-US" altLang="en-US" smtClean="0"/>
+              <a:pPr>
+                <a:defRPr/>
+              </a:pPr>
+              <a:t>3</a:t>
+            </a:fld>
+            <a:endParaRPr lang="en-US" altLang="en-US"/>
+          </a:p>
+        </p:txBody>
+      </p:sp>
+      <p:pic>
+        <p:nvPicPr>
+          <p:cNvPr id="7" name="Picture 6">
+            <a:extLst>
+              <a:ext uri="{FF2B5EF4-FFF2-40B4-BE49-F238E27FC236}">
+                <a16:creationId xmlns:a16="http://schemas.microsoft.com/office/drawing/2014/main" id="{017C14A3-2ACE-DE7C-9055-B46ED7C3C258}"/>
+              </a:ext>
+            </a:extLst>
+          </p:cNvPr>
+          <p:cNvPicPr>
+            <a:picLocks noChangeAspect="1"/>
+          </p:cNvPicPr>
+          <p:nvPr/>
+        </p:nvPicPr>
+        <p:blipFill>
+          <a:blip r:embed="rId2"/>
+          <a:stretch>
+            <a:fillRect/>
+          </a:stretch>
+        </p:blipFill>
+        <p:spPr>
+          <a:xfrm>
+            <a:off x="23446" y="1797818"/>
+            <a:ext cx="2438740" cy="4067743"/>
+          </a:xfrm>
+          <a:prstGeom prst="rect">
+            <a:avLst/>
+          </a:prstGeom>
+        </p:spPr>
+      </p:pic>
+      <p:pic>
+        <p:nvPicPr>
+          <p:cNvPr id="9" name="Picture 8">
+            <a:extLst>
+              <a:ext uri="{FF2B5EF4-FFF2-40B4-BE49-F238E27FC236}">
+                <a16:creationId xmlns:a16="http://schemas.microsoft.com/office/drawing/2014/main" id="{8E03ABC8-722A-C696-13CB-C23F34194B72}"/>
+              </a:ext>
+            </a:extLst>
+          </p:cNvPr>
+          <p:cNvPicPr>
+            <a:picLocks noChangeAspect="1"/>
+          </p:cNvPicPr>
+          <p:nvPr/>
+        </p:nvPicPr>
+        <p:blipFill>
+          <a:blip r:embed="rId3"/>
+          <a:stretch>
+            <a:fillRect/>
+          </a:stretch>
+        </p:blipFill>
+        <p:spPr>
+          <a:xfrm>
+            <a:off x="2657208" y="1813025"/>
+            <a:ext cx="3077004" cy="4182059"/>
+          </a:xfrm>
+          <a:prstGeom prst="rect">
+            <a:avLst/>
+          </a:prstGeom>
+        </p:spPr>
+      </p:pic>
+      <p:pic>
+        <p:nvPicPr>
+          <p:cNvPr id="11" name="Picture 10">
+            <a:extLst>
+              <a:ext uri="{FF2B5EF4-FFF2-40B4-BE49-F238E27FC236}">
+                <a16:creationId xmlns:a16="http://schemas.microsoft.com/office/drawing/2014/main" id="{B013DBBC-2A09-F11D-ADAB-5D4EF2642CEE}"/>
+              </a:ext>
+            </a:extLst>
+          </p:cNvPr>
+          <p:cNvPicPr>
+            <a:picLocks noChangeAspect="1"/>
+          </p:cNvPicPr>
+          <p:nvPr/>
+        </p:nvPicPr>
+        <p:blipFill>
+          <a:blip r:embed="rId4"/>
+          <a:stretch>
+            <a:fillRect/>
+          </a:stretch>
+        </p:blipFill>
+        <p:spPr>
+          <a:xfrm>
+            <a:off x="5929234" y="1864502"/>
+            <a:ext cx="3191320" cy="3934374"/>
+          </a:xfrm>
+          <a:prstGeom prst="rect">
+            <a:avLst/>
+          </a:prstGeom>
+        </p:spPr>
+      </p:pic>
+    </p:spTree>
+    <p:extLst>
+      <p:ext uri="{BB962C8B-B14F-4D97-AF65-F5344CB8AC3E}">
+        <p14:creationId xmlns:p14="http://schemas.microsoft.com/office/powerpoint/2010/main" val="3739393468"/>
+      </p:ext>
+    </p:extLst>
+  </p:cSld>
+  <p:clrMapOvr>
+    <a:masterClrMapping/>
+  </p:clrMapOvr>
+  <p:timing>
+    <p:tnLst>
+      <p:par>
+        <p:cTn id="1" dur="indefinite" restart="never" nodeType="tmRoot">
+          <p:childTnLst>
+            <p:seq concurrent="1" nextAc="seek">
+              <p:cTn id="2" dur="indefinite" nodeType="mainSeq">
+                <p:childTnLst>
+                  <p:par>
+                    <p:cTn id="3" fill="hold">
+                      <p:stCondLst>
+                        <p:cond delay="indefinite"/>
+                      </p:stCondLst>
+                      <p:childTnLst>
+                        <p:par>
+                          <p:cTn id="4" fill="hold">
+                            <p:stCondLst>
+                              <p:cond delay="0"/>
+                            </p:stCondLst>
+                            <p:childTnLst>
+                              <p:par>
+                                <p:cTn id="5" presetID="1" presetClass="entr" presetSubtype="0" fill="hold" nodeType="clickEffect">
+                                  <p:stCondLst>
+                                    <p:cond delay="0"/>
+                                  </p:stCondLst>
+                                  <p:childTnLst>
+                                    <p:set>
+                                      <p:cBhvr>
+                                        <p:cTn id="6" dur="1" fill="hold">
+                                          <p:stCondLst>
+                                            <p:cond delay="0"/>
+                                          </p:stCondLst>
+                                        </p:cTn>
+                                        <p:tgtEl>
+                                          <p:spTgt spid="7"/>
+                                        </p:tgtEl>
+                                        <p:attrNameLst>
+                                          <p:attrName>style.visibility</p:attrName>
+                                        </p:attrNameLst>
+                                      </p:cBhvr>
+                                      <p:to>
+                                        <p:strVal val="visible"/>
+                                      </p:to>
+                                    </p:set>
+                                  </p:childTnLst>
+                                </p:cTn>
+                              </p:par>
+                            </p:childTnLst>
+                          </p:cTn>
+                        </p:par>
+                      </p:childTnLst>
+                    </p:cTn>
+                  </p:par>
+                  <p:par>
+                    <p:cTn id="7" fill="hold">
+                      <p:stCondLst>
+                        <p:cond delay="indefinite"/>
+                      </p:stCondLst>
+                      <p:childTnLst>
+                        <p:par>
+                          <p:cTn id="8" fill="hold">
+                            <p:stCondLst>
+                              <p:cond delay="0"/>
+                            </p:stCondLst>
+                            <p:childTnLst>
+                              <p:par>
+                                <p:cTn id="9" presetID="1" presetClass="entr" presetSubtype="0" fill="hold" nodeType="clickEffect">
+                                  <p:stCondLst>
+                                    <p:cond delay="0"/>
+                                  </p:stCondLst>
+                                  <p:childTnLst>
+                                    <p:set>
+                                      <p:cBhvr>
+                                        <p:cTn id="10" dur="1" fill="hold">
+                                          <p:stCondLst>
+                                            <p:cond delay="0"/>
+                                          </p:stCondLst>
+                                        </p:cTn>
+                                        <p:tgtEl>
+                                          <p:spTgt spid="9"/>
+                                        </p:tgtEl>
+                                        <p:attrNameLst>
+                                          <p:attrName>style.visibility</p:attrName>
+                                        </p:attrNameLst>
+                                      </p:cBhvr>
+                                      <p:to>
+                                        <p:strVal val="visible"/>
+                                      </p:to>
+                                    </p:set>
+                                  </p:childTnLst>
+                                </p:cTn>
+                              </p:par>
+                            </p:childTnLst>
+                          </p:cTn>
+                        </p:par>
+                      </p:childTnLst>
+                    </p:cTn>
+                  </p:par>
+                  <p:par>
+                    <p:cTn id="11" fill="hold">
+                      <p:stCondLst>
+                        <p:cond delay="indefinite"/>
+                      </p:stCondLst>
+                      <p:childTnLst>
+                        <p:par>
+                          <p:cTn id="12" fill="hold">
+                            <p:stCondLst>
+                              <p:cond delay="0"/>
+                            </p:stCondLst>
+                            <p:childTnLst>
+                              <p:par>
+                                <p:cTn id="13" presetID="1" presetClass="entr" presetSubtype="0" fill="hold" nodeType="clickEffect">
+                                  <p:stCondLst>
+                                    <p:cond delay="0"/>
+                                  </p:stCondLst>
+                                  <p:childTnLst>
+                                    <p:set>
+                                      <p:cBhvr>
+                                        <p:cTn id="14" dur="1" fill="hold">
+                                          <p:stCondLst>
+                                            <p:cond delay="0"/>
+                                          </p:stCondLst>
+                                        </p:cTn>
+                                        <p:tgtEl>
+                                          <p:spTgt spid="11"/>
+                                        </p:tgtEl>
+                                        <p:attrNameLst>
+                                          <p:attrName>style.visibility</p:attrName>
+                                        </p:attrNameLst>
+                                      </p:cBhvr>
+                                      <p:to>
+                                        <p:strVal val="visible"/>
+                                      </p:to>
+                                    </p:set>
+                                  </p:childTnLst>
+                                </p:cTn>
+                              </p:par>
+                            </p:childTnLst>
+                          </p:cTn>
+                        </p:par>
+                      </p:childTnLst>
+                    </p:cTn>
+                  </p:par>
+                </p:childTnLst>
+              </p:cTn>
+              <p:prevCondLst>
+                <p:cond evt="onPrev" delay="0">
+                  <p:tgtEl>
+                    <p:sldTgt/>
+                  </p:tgtEl>
+                </p:cond>
+              </p:prevCondLst>
+              <p:nextCondLst>
+                <p:cond evt="onNext" delay="0">
+                  <p:tgtEl>
+                    <p:sldTgt/>
+                  </p:tgtEl>
+                </p:cond>
+              </p:nextCondLst>
+            </p:seq>
+          </p:childTnLst>
+        </p:cTn>
+      </p:par>
+    </p:tnLst>
+  </p:timing>
+</p:sld>
+</file>
+
+<file path=ppt/slides/slide4.xml><?xml version="1.0" encoding="utf-8"?>
+<p:sld xmlns:a="http://schemas.openxmlformats.org/drawingml/2006/main" xmlns:r="http://schemas.openxmlformats.org/officeDocument/2006/relationships" xmlns:p="http://schemas.openxmlformats.org/presentationml/2006/main">
+  <p:cSld>
+    <p:spTree>
+      <p:nvGrpSpPr>
+        <p:cNvPr id="1" name=""/>
+        <p:cNvGrpSpPr/>
+        <p:nvPr/>
+      </p:nvGrpSpPr>
+      <p:grpSpPr>
+        <a:xfrm>
+          <a:off x="0" y="0"/>
+          <a:ext cx="0" cy="0"/>
+          <a:chOff x="0" y="0"/>
+          <a:chExt cx="0" cy="0"/>
+        </a:xfrm>
+      </p:grpSpPr>
+      <p:sp>
+        <p:nvSpPr>
+          <p:cNvPr id="2" name="Title 1">
+            <a:extLst>
+              <a:ext uri="{FF2B5EF4-FFF2-40B4-BE49-F238E27FC236}">
+                <a16:creationId xmlns:a16="http://schemas.microsoft.com/office/drawing/2014/main" id="{0D7BD08D-F0DD-C051-3A3A-D15E3510AE40}"/>
+              </a:ext>
+            </a:extLst>
+          </p:cNvPr>
+          <p:cNvSpPr>
+            <a:spLocks noGrp="1"/>
+          </p:cNvSpPr>
+          <p:nvPr>
+            <p:ph type="title"/>
+          </p:nvPr>
+        </p:nvSpPr>
+        <p:spPr/>
+        <p:txBody>
+          <a:bodyPr/>
+          <a:lstStyle/>
+          <a:p>
+            <a:r>
+              <a:rPr lang="en-US" dirty="0"/>
+              <a:t>Race conditions</a:t>
+            </a:r>
+            <a:endParaRPr lang="en-IN" dirty="0"/>
+          </a:p>
+        </p:txBody>
+      </p:sp>
+      <p:sp>
+        <p:nvSpPr>
+          <p:cNvPr id="3" name="Content Placeholder 2">
+            <a:extLst>
+              <a:ext uri="{FF2B5EF4-FFF2-40B4-BE49-F238E27FC236}">
+                <a16:creationId xmlns:a16="http://schemas.microsoft.com/office/drawing/2014/main" id="{F2B91171-F530-0E8C-FCFB-65BD091FE420}"/>
+              </a:ext>
+            </a:extLst>
+          </p:cNvPr>
+          <p:cNvSpPr>
+            <a:spLocks noGrp="1"/>
+          </p:cNvSpPr>
+          <p:nvPr>
+            <p:ph idx="1"/>
+          </p:nvPr>
+        </p:nvSpPr>
+        <p:spPr/>
+        <p:txBody>
+          <a:bodyPr/>
+          <a:lstStyle/>
+          <a:p>
+            <a:r>
+              <a:rPr lang="en-US" dirty="0"/>
+              <a:t>What problem do you foresee</a:t>
+            </a:r>
+            <a:br>
+              <a:rPr lang="en-US" dirty="0"/>
+            </a:br>
+            <a:r>
+              <a:rPr lang="en-US" dirty="0"/>
+              <a:t>with this code?</a:t>
+            </a:r>
+          </a:p>
+          <a:p>
+            <a:endParaRPr lang="en-US" dirty="0"/>
+          </a:p>
+          <a:p>
+            <a:r>
+              <a:rPr lang="en-US" dirty="0"/>
+              <a:t>Multiple correct operations</a:t>
+            </a:r>
+          </a:p>
+          <a:p>
+            <a:r>
+              <a:rPr lang="en-US" dirty="0"/>
+              <a:t>But depending on timing / order, result can be incorrect / non-deterministic</a:t>
+            </a:r>
+            <a:endParaRPr lang="en-IN" dirty="0"/>
+          </a:p>
+        </p:txBody>
+      </p:sp>
+      <p:sp>
+        <p:nvSpPr>
+          <p:cNvPr id="4" name="Date Placeholder 3">
+            <a:extLst>
+              <a:ext uri="{FF2B5EF4-FFF2-40B4-BE49-F238E27FC236}">
+                <a16:creationId xmlns:a16="http://schemas.microsoft.com/office/drawing/2014/main" id="{975E33B0-7EDF-32D3-FBF2-E21C18CC8A0C}"/>
+              </a:ext>
+            </a:extLst>
+          </p:cNvPr>
+          <p:cNvSpPr>
+            <a:spLocks noGrp="1"/>
+          </p:cNvSpPr>
+          <p:nvPr>
+            <p:ph type="dt" sz="half" idx="10"/>
+          </p:nvPr>
+        </p:nvSpPr>
+        <p:spPr/>
+        <p:txBody>
+          <a:bodyPr/>
+          <a:lstStyle/>
+          <a:p>
+            <a:pPr>
+              <a:defRPr/>
+            </a:pPr>
+            <a:r>
+              <a:rPr lang="en-US"/>
+              <a:t>21/12/2020</a:t>
+            </a:r>
+          </a:p>
+        </p:txBody>
+      </p:sp>
+      <p:sp>
+        <p:nvSpPr>
+          <p:cNvPr id="5" name="Slide Number Placeholder 4">
+            <a:extLst>
+              <a:ext uri="{FF2B5EF4-FFF2-40B4-BE49-F238E27FC236}">
+                <a16:creationId xmlns:a16="http://schemas.microsoft.com/office/drawing/2014/main" id="{4B43B458-B79D-7E86-E92C-9420D681204B}"/>
+              </a:ext>
+            </a:extLst>
+          </p:cNvPr>
+          <p:cNvSpPr>
+            <a:spLocks noGrp="1"/>
+          </p:cNvSpPr>
+          <p:nvPr>
+            <p:ph type="sldNum" sz="quarter" idx="12"/>
+          </p:nvPr>
+        </p:nvSpPr>
+        <p:spPr/>
+        <p:txBody>
+          <a:bodyPr/>
+          <a:lstStyle/>
+          <a:p>
+            <a:pPr>
+              <a:defRPr/>
+            </a:pPr>
+            <a:fld id="{CA887A73-1AE0-46F8-856A-18EA1CF30A1B}" type="slidenum">
+              <a:rPr lang="en-US" altLang="en-US" smtClean="0"/>
+              <a:pPr>
+                <a:defRPr/>
+              </a:pPr>
+              <a:t>4</a:t>
+            </a:fld>
+            <a:endParaRPr lang="en-US" altLang="en-US"/>
+          </a:p>
+        </p:txBody>
+      </p:sp>
+      <p:pic>
+        <p:nvPicPr>
+          <p:cNvPr id="7" name="Picture 6">
+            <a:extLst>
+              <a:ext uri="{FF2B5EF4-FFF2-40B4-BE49-F238E27FC236}">
+                <a16:creationId xmlns:a16="http://schemas.microsoft.com/office/drawing/2014/main" id="{34B65E76-D703-FEA0-A559-376870C340B2}"/>
+              </a:ext>
+            </a:extLst>
+          </p:cNvPr>
+          <p:cNvPicPr>
+            <a:picLocks noChangeAspect="1"/>
+          </p:cNvPicPr>
+          <p:nvPr/>
+        </p:nvPicPr>
+        <p:blipFill>
+          <a:blip r:embed="rId2"/>
+          <a:stretch>
+            <a:fillRect/>
+          </a:stretch>
+        </p:blipFill>
+        <p:spPr>
+          <a:xfrm>
+            <a:off x="6341116" y="1524000"/>
+            <a:ext cx="2574284" cy="2238004"/>
+          </a:xfrm>
+          <a:prstGeom prst="rect">
+            <a:avLst/>
+          </a:prstGeom>
+        </p:spPr>
+      </p:pic>
+    </p:spTree>
+    <p:extLst>
+      <p:ext uri="{BB962C8B-B14F-4D97-AF65-F5344CB8AC3E}">
+        <p14:creationId xmlns:p14="http://schemas.microsoft.com/office/powerpoint/2010/main" val="2710804709"/>
+      </p:ext>
+    </p:extLst>
+  </p:cSld>
+  <p:clrMapOvr>
+    <a:masterClrMapping/>
+  </p:clrMapOvr>
+  <p:timing>
+    <p:tnLst>
+      <p:par>
+        <p:cTn id="1" dur="indefinite" restart="never" nodeType="tmRoot">
+          <p:childTnLst>
+            <p:seq concurrent="1" nextAc="seek">
+              <p:cTn id="2" dur="indefinite" nodeType="mainSeq">
+                <p:childTnLst>
+                  <p:par>
+                    <p:cTn id="3" fill="hold">
+                      <p:stCondLst>
+                        <p:cond delay="indefinite"/>
+                      </p:stCondLst>
+                      <p:childTnLst>
+                        <p:par>
+                          <p:cTn id="4" fill="hold">
+                            <p:stCondLst>
+                              <p:cond delay="0"/>
+                            </p:stCondLst>
+                            <p:childTnLst>
+                              <p:par>
+                                <p:cTn id="5" presetID="1" presetClass="entr" presetSubtype="0" fill="hold" grpId="0" nodeType="clickEffect">
+                                  <p:stCondLst>
+                                    <p:cond delay="0"/>
+                                  </p:stCondLst>
+                                  <p:childTnLst>
+                                    <p:set>
+                                      <p:cBhvr>
+                                        <p:cTn id="6" dur="1" fill="hold">
+                                          <p:stCondLst>
+                                            <p:cond delay="0"/>
+                                          </p:stCondLst>
+                                        </p:cTn>
+                                        <p:tgtEl>
+                                          <p:spTgt spid="3">
+                                            <p:txEl>
+                                              <p:pRg st="0" end="0"/>
+                                            </p:txEl>
+                                          </p:spTgt>
+                                        </p:tgtEl>
+                                        <p:attrNameLst>
+                                          <p:attrName>style.visibility</p:attrName>
+                                        </p:attrNameLst>
+                                      </p:cBhvr>
+                                      <p:to>
+                                        <p:strVal val="visible"/>
+                                      </p:to>
+                                    </p:set>
+                                  </p:childTnLst>
+                                </p:cTn>
+                              </p:par>
+                            </p:childTnLst>
+                          </p:cTn>
+                        </p:par>
+                      </p:childTnLst>
+                    </p:cTn>
+                  </p:par>
+                  <p:par>
+                    <p:cTn id="7" fill="hold">
+                      <p:stCondLst>
+                        <p:cond delay="indefinite"/>
+                      </p:stCondLst>
+                      <p:childTnLst>
+                        <p:par>
+                          <p:cTn id="8" fill="hold">
+                            <p:stCondLst>
+                              <p:cond delay="0"/>
+                            </p:stCondLst>
+                            <p:childTnLst>
+                              <p:par>
+                                <p:cTn id="9" presetID="1" presetClass="entr" presetSubtype="0" fill="hold" grpId="0" nodeType="clickEffect">
+                                  <p:stCondLst>
+                                    <p:cond delay="0"/>
+                                  </p:stCondLst>
+                                  <p:childTnLst>
+                                    <p:set>
+                                      <p:cBhvr>
+                                        <p:cTn id="10" dur="1" fill="hold">
+                                          <p:stCondLst>
+                                            <p:cond delay="0"/>
+                                          </p:stCondLst>
+                                        </p:cTn>
+                                        <p:tgtEl>
+                                          <p:spTgt spid="3">
+                                            <p:txEl>
+                                              <p:pRg st="2" end="2"/>
+                                            </p:txEl>
+                                          </p:spTgt>
+                                        </p:tgtEl>
+                                        <p:attrNameLst>
+                                          <p:attrName>style.visibility</p:attrName>
+                                        </p:attrNameLst>
+                                      </p:cBhvr>
+                                      <p:to>
+                                        <p:strVal val="visible"/>
+                                      </p:to>
+                                    </p:set>
+                                  </p:childTnLst>
+                                </p:cTn>
+                              </p:par>
+                            </p:childTnLst>
+                          </p:cTn>
+                        </p:par>
+                      </p:childTnLst>
+                    </p:cTn>
+                  </p:par>
+                  <p:par>
+                    <p:cTn id="11" fill="hold">
+                      <p:stCondLst>
+                        <p:cond delay="indefinite"/>
+                      </p:stCondLst>
+                      <p:childTnLst>
+                        <p:par>
+                          <p:cTn id="12" fill="hold">
+                            <p:stCondLst>
+                              <p:cond delay="0"/>
+                            </p:stCondLst>
+                            <p:childTnLst>
+                              <p:par>
+                                <p:cTn id="13" presetID="1" presetClass="entr" presetSubtype="0" fill="hold" grpId="0" nodeType="clickEffect">
+                                  <p:stCondLst>
+                                    <p:cond delay="0"/>
+                                  </p:stCondLst>
+                                  <p:childTnLst>
+                                    <p:set>
+                                      <p:cBhvr>
+                                        <p:cTn id="14" dur="1" fill="hold">
+                                          <p:stCondLst>
+                                            <p:cond delay="0"/>
+                                          </p:stCondLst>
+                                        </p:cTn>
+                                        <p:tgtEl>
+                                          <p:spTgt spid="3">
+                                            <p:txEl>
+                                              <p:pRg st="3" end="3"/>
+                                            </p:txEl>
+                                          </p:spTgt>
+                                        </p:tgtEl>
+                                        <p:attrNameLst>
+                                          <p:attrName>style.visibility</p:attrName>
+                                        </p:attrNameLst>
+                                      </p:cBhvr>
+                                      <p:to>
+                                        <p:strVal val="visible"/>
+                                      </p:to>
+                                    </p:set>
+                                  </p:childTnLst>
+                                </p:cTn>
+                              </p:par>
+                            </p:childTnLst>
+                          </p:cTn>
+                        </p:par>
+                      </p:childTnLst>
+                    </p:cTn>
+                  </p:par>
+                </p:childTnLst>
+              </p:cTn>
+              <p:prevCondLst>
+                <p:cond evt="onPrev" delay="0">
+                  <p:tgtEl>
+                    <p:sldTgt/>
+                  </p:tgtEl>
+                </p:cond>
+              </p:prevCondLst>
+              <p:nextCondLst>
+                <p:cond evt="onNext" delay="0">
+                  <p:tgtEl>
+                    <p:sldTgt/>
+                  </p:tgtEl>
+                </p:cond>
+              </p:nextCondLst>
+            </p:seq>
+          </p:childTnLst>
+        </p:cTn>
+      </p:par>
+    </p:tnLst>
+    <p:bldLst>
+      <p:bldP spid="3" grpId="0" build="p"/>
+    </p:bldLst>
+  </p:timing>
+</p:sld>
+</file>
+
+<file path=ppt/slides/slide5.xml><?xml version="1.0" encoding="utf-8"?>
+<p:sld xmlns:a="http://schemas.openxmlformats.org/drawingml/2006/main" xmlns:r="http://schemas.openxmlformats.org/officeDocument/2006/relationships" xmlns:p="http://schemas.openxmlformats.org/presentationml/2006/main">
+  <p:cSld>
+    <p:spTree>
+      <p:nvGrpSpPr>
+        <p:cNvPr id="1" name=""/>
+        <p:cNvGrpSpPr/>
+        <p:nvPr/>
+      </p:nvGrpSpPr>
+      <p:grpSpPr>
+        <a:xfrm>
+          <a:off x="0" y="0"/>
+          <a:ext cx="0" cy="0"/>
+          <a:chOff x="0" y="0"/>
+          <a:chExt cx="0" cy="0"/>
+        </a:xfrm>
+      </p:grpSpPr>
+      <p:sp>
+        <p:nvSpPr>
+          <p:cNvPr id="2" name="Title 1">
+            <a:extLst>
+              <a:ext uri="{FF2B5EF4-FFF2-40B4-BE49-F238E27FC236}">
+                <a16:creationId xmlns:a16="http://schemas.microsoft.com/office/drawing/2014/main" id="{52E30EE4-96FF-9FB1-695D-34FBC4A5D7C9}"/>
+              </a:ext>
+            </a:extLst>
+          </p:cNvPr>
+          <p:cNvSpPr>
+            <a:spLocks noGrp="1"/>
+          </p:cNvSpPr>
+          <p:nvPr>
+            <p:ph type="title"/>
+          </p:nvPr>
+        </p:nvSpPr>
+        <p:spPr/>
+        <p:txBody>
+          <a:bodyPr/>
+          <a:lstStyle/>
+          <a:p>
+            <a:r>
+              <a:rPr lang="en-US" dirty="0"/>
+              <a:t>Inconsistent system state</a:t>
+            </a:r>
+            <a:endParaRPr lang="en-IN" dirty="0"/>
+          </a:p>
+        </p:txBody>
+      </p:sp>
+      <p:sp>
+        <p:nvSpPr>
+          <p:cNvPr id="4" name="Date Placeholder 3">
+            <a:extLst>
+              <a:ext uri="{FF2B5EF4-FFF2-40B4-BE49-F238E27FC236}">
+                <a16:creationId xmlns:a16="http://schemas.microsoft.com/office/drawing/2014/main" id="{530A7685-53C0-4890-040F-482DC64E0DC5}"/>
+              </a:ext>
+            </a:extLst>
+          </p:cNvPr>
+          <p:cNvSpPr>
+            <a:spLocks noGrp="1"/>
+          </p:cNvSpPr>
+          <p:nvPr>
+            <p:ph type="dt" sz="half" idx="10"/>
+          </p:nvPr>
+        </p:nvSpPr>
+        <p:spPr/>
+        <p:txBody>
+          <a:bodyPr/>
+          <a:lstStyle/>
+          <a:p>
+            <a:pPr>
+              <a:defRPr/>
+            </a:pPr>
+            <a:r>
+              <a:rPr lang="en-US"/>
+              <a:t>21/12/2020</a:t>
+            </a:r>
+          </a:p>
+        </p:txBody>
+      </p:sp>
+      <p:sp>
+        <p:nvSpPr>
+          <p:cNvPr id="5" name="Slide Number Placeholder 4">
+            <a:extLst>
+              <a:ext uri="{FF2B5EF4-FFF2-40B4-BE49-F238E27FC236}">
+                <a16:creationId xmlns:a16="http://schemas.microsoft.com/office/drawing/2014/main" id="{C68BFA2A-25C9-4B0D-F41C-F4C96185176F}"/>
+              </a:ext>
+            </a:extLst>
+          </p:cNvPr>
+          <p:cNvSpPr>
+            <a:spLocks noGrp="1"/>
+          </p:cNvSpPr>
+          <p:nvPr>
+            <p:ph type="sldNum" sz="quarter" idx="12"/>
+          </p:nvPr>
+        </p:nvSpPr>
+        <p:spPr/>
+        <p:txBody>
+          <a:bodyPr/>
+          <a:lstStyle/>
+          <a:p>
+            <a:pPr>
+              <a:defRPr/>
+            </a:pPr>
+            <a:fld id="{CA887A73-1AE0-46F8-856A-18EA1CF30A1B}" type="slidenum">
+              <a:rPr lang="en-US" altLang="en-US" smtClean="0"/>
+              <a:pPr>
+                <a:defRPr/>
+              </a:pPr>
+              <a:t>5</a:t>
+            </a:fld>
+            <a:endParaRPr lang="en-US" altLang="en-US"/>
+          </a:p>
+        </p:txBody>
+      </p:sp>
+      <p:pic>
+        <p:nvPicPr>
+          <p:cNvPr id="7" name="Picture 6">
+            <a:extLst>
+              <a:ext uri="{FF2B5EF4-FFF2-40B4-BE49-F238E27FC236}">
+                <a16:creationId xmlns:a16="http://schemas.microsoft.com/office/drawing/2014/main" id="{03ED9E74-E38E-323F-84AC-F7D8C4A9C0AD}"/>
+              </a:ext>
+            </a:extLst>
+          </p:cNvPr>
+          <p:cNvPicPr>
+            <a:picLocks noChangeAspect="1"/>
+          </p:cNvPicPr>
+          <p:nvPr/>
+        </p:nvPicPr>
+        <p:blipFill>
+          <a:blip r:embed="rId2"/>
+          <a:stretch>
+            <a:fillRect/>
+          </a:stretch>
+        </p:blipFill>
+        <p:spPr>
+          <a:xfrm>
+            <a:off x="304800" y="1600200"/>
+            <a:ext cx="3147333" cy="2057400"/>
+          </a:xfrm>
+          <a:prstGeom prst="rect">
+            <a:avLst/>
+          </a:prstGeom>
+        </p:spPr>
+      </p:pic>
+      <p:pic>
+        <p:nvPicPr>
+          <p:cNvPr id="9" name="Picture 8">
+            <a:extLst>
+              <a:ext uri="{FF2B5EF4-FFF2-40B4-BE49-F238E27FC236}">
+                <a16:creationId xmlns:a16="http://schemas.microsoft.com/office/drawing/2014/main" id="{6B45C9B4-2CAD-3E6C-1D6F-617B06DA8BD0}"/>
+              </a:ext>
+            </a:extLst>
+          </p:cNvPr>
+          <p:cNvPicPr>
+            <a:picLocks noChangeAspect="1"/>
+          </p:cNvPicPr>
+          <p:nvPr/>
+        </p:nvPicPr>
+        <p:blipFill>
+          <a:blip r:embed="rId3"/>
+          <a:stretch>
+            <a:fillRect/>
+          </a:stretch>
+        </p:blipFill>
+        <p:spPr>
+          <a:xfrm>
+            <a:off x="304800" y="3886200"/>
+            <a:ext cx="3660032" cy="1143000"/>
+          </a:xfrm>
+          <a:prstGeom prst="rect">
+            <a:avLst/>
+          </a:prstGeom>
+        </p:spPr>
+      </p:pic>
+      <p:pic>
+        <p:nvPicPr>
+          <p:cNvPr id="11" name="Picture 10">
+            <a:extLst>
+              <a:ext uri="{FF2B5EF4-FFF2-40B4-BE49-F238E27FC236}">
+                <a16:creationId xmlns:a16="http://schemas.microsoft.com/office/drawing/2014/main" id="{73CDBA53-CF3F-82E8-7C65-CB184CF40618}"/>
+              </a:ext>
+            </a:extLst>
+          </p:cNvPr>
+          <p:cNvPicPr>
+            <a:picLocks noChangeAspect="1"/>
+          </p:cNvPicPr>
+          <p:nvPr/>
+        </p:nvPicPr>
+        <p:blipFill>
+          <a:blip r:embed="rId4"/>
+          <a:stretch>
+            <a:fillRect/>
+          </a:stretch>
+        </p:blipFill>
+        <p:spPr>
+          <a:xfrm>
+            <a:off x="3886200" y="1847187"/>
+            <a:ext cx="5010889" cy="1547481"/>
+          </a:xfrm>
+          <a:prstGeom prst="rect">
+            <a:avLst/>
+          </a:prstGeom>
+        </p:spPr>
+      </p:pic>
+    </p:spTree>
+    <p:extLst>
+      <p:ext uri="{BB962C8B-B14F-4D97-AF65-F5344CB8AC3E}">
+        <p14:creationId xmlns:p14="http://schemas.microsoft.com/office/powerpoint/2010/main" val="2891126991"/>
+      </p:ext>
+    </p:extLst>
+  </p:cSld>
+  <p:clrMapOvr>
+    <a:masterClrMapping/>
+  </p:clrMapOvr>
+  <p:timing>
+    <p:tnLst>
+      <p:par>
+        <p:cTn id="1" dur="indefinite" restart="never" nodeType="tmRoot">
+          <p:childTnLst>
+            <p:seq concurrent="1" nextAc="seek">
+              <p:cTn id="2" dur="indefinite" nodeType="mainSeq">
+                <p:childTnLst>
+                  <p:par>
+                    <p:cTn id="3" fill="hold">
+                      <p:stCondLst>
+                        <p:cond delay="indefinite"/>
+                      </p:stCondLst>
+                      <p:childTnLst>
+                        <p:par>
+                          <p:cTn id="4" fill="hold">
+                            <p:stCondLst>
+                              <p:cond delay="0"/>
+                            </p:stCondLst>
+                            <p:childTnLst>
+                              <p:par>
+                                <p:cTn id="5" presetID="1" presetClass="entr" presetSubtype="0" fill="hold" nodeType="clickEffect">
+                                  <p:stCondLst>
+                                    <p:cond delay="0"/>
+                                  </p:stCondLst>
+                                  <p:childTnLst>
+                                    <p:set>
+                                      <p:cBhvr>
+                                        <p:cTn id="6" dur="1" fill="hold">
+                                          <p:stCondLst>
+                                            <p:cond delay="0"/>
+                                          </p:stCondLst>
+                                        </p:cTn>
+                                        <p:tgtEl>
+                                          <p:spTgt spid="7"/>
+                                        </p:tgtEl>
+                                        <p:attrNameLst>
+                                          <p:attrName>style.visibility</p:attrName>
+                                        </p:attrNameLst>
+                                      </p:cBhvr>
+                                      <p:to>
+                                        <p:strVal val="visible"/>
+                                      </p:to>
+                                    </p:set>
+                                  </p:childTnLst>
+                                </p:cTn>
+                              </p:par>
+                            </p:childTnLst>
+                          </p:cTn>
+                        </p:par>
+                      </p:childTnLst>
+                    </p:cTn>
+                  </p:par>
+                  <p:par>
+                    <p:cTn id="7" fill="hold">
+                      <p:stCondLst>
+                        <p:cond delay="indefinite"/>
+                      </p:stCondLst>
+                      <p:childTnLst>
+                        <p:par>
+                          <p:cTn id="8" fill="hold">
+                            <p:stCondLst>
+                              <p:cond delay="0"/>
+                            </p:stCondLst>
+                            <p:childTnLst>
+                              <p:par>
+                                <p:cTn id="9" presetID="1" presetClass="entr" presetSubtype="0" fill="hold" nodeType="clickEffect">
+                                  <p:stCondLst>
+                                    <p:cond delay="0"/>
+                                  </p:stCondLst>
+                                  <p:childTnLst>
+                                    <p:set>
+                                      <p:cBhvr>
+                                        <p:cTn id="10" dur="1" fill="hold">
+                                          <p:stCondLst>
+                                            <p:cond delay="0"/>
+                                          </p:stCondLst>
+                                        </p:cTn>
+                                        <p:tgtEl>
+                                          <p:spTgt spid="9"/>
+                                        </p:tgtEl>
+                                        <p:attrNameLst>
+                                          <p:attrName>style.visibility</p:attrName>
+                                        </p:attrNameLst>
+                                      </p:cBhvr>
+                                      <p:to>
+                                        <p:strVal val="visible"/>
+                                      </p:to>
+                                    </p:set>
+                                  </p:childTnLst>
+                                </p:cTn>
+                              </p:par>
+                            </p:childTnLst>
+                          </p:cTn>
+                        </p:par>
+                      </p:childTnLst>
+                    </p:cTn>
+                  </p:par>
+                  <p:par>
+                    <p:cTn id="11" fill="hold">
+                      <p:stCondLst>
+                        <p:cond delay="indefinite"/>
+                      </p:stCondLst>
+                      <p:childTnLst>
+                        <p:par>
+                          <p:cTn id="12" fill="hold">
+                            <p:stCondLst>
+                              <p:cond delay="0"/>
+                            </p:stCondLst>
+                            <p:childTnLst>
+                              <p:par>
+                                <p:cTn id="13" presetID="1" presetClass="entr" presetSubtype="0" fill="hold" nodeType="clickEffect">
+                                  <p:stCondLst>
+                                    <p:cond delay="0"/>
+                                  </p:stCondLst>
+                                  <p:childTnLst>
+                                    <p:set>
+                                      <p:cBhvr>
+                                        <p:cTn id="14" dur="1" fill="hold">
+                                          <p:stCondLst>
+                                            <p:cond delay="0"/>
+                                          </p:stCondLst>
+                                        </p:cTn>
+                                        <p:tgtEl>
+                                          <p:spTgt spid="11"/>
+                                        </p:tgtEl>
+                                        <p:attrNameLst>
+                                          <p:attrName>style.visibility</p:attrName>
+                                        </p:attrNameLst>
+                                      </p:cBhvr>
+                                      <p:to>
+                                        <p:strVal val="visible"/>
+                                      </p:to>
+                                    </p:set>
+                                  </p:childTnLst>
+                                </p:cTn>
+                              </p:par>
+                            </p:childTnLst>
+                          </p:cTn>
+                        </p:par>
+                      </p:childTnLst>
+                    </p:cTn>
+                  </p:par>
+                </p:childTnLst>
+              </p:cTn>
+              <p:prevCondLst>
+                <p:cond evt="onPrev" delay="0">
+                  <p:tgtEl>
+                    <p:sldTgt/>
+                  </p:tgtEl>
+                </p:cond>
+              </p:prevCondLst>
+              <p:nextCondLst>
+                <p:cond evt="onNext" delay="0">
+                  <p:tgtEl>
+                    <p:sldTgt/>
+                  </p:tgtEl>
+                </p:cond>
+              </p:nextCondLst>
+            </p:seq>
+          </p:childTnLst>
+        </p:cTn>
+      </p:par>
+    </p:tnLst>
+  </p:timing>
+</p:sld>
+</file>
+
+<file path=ppt/slides/slide6.xml><?xml version="1.0" encoding="utf-8"?>
+<p:sld xmlns:a="http://schemas.openxmlformats.org/drawingml/2006/main" xmlns:r="http://schemas.openxmlformats.org/officeDocument/2006/relationships" xmlns:p="http://schemas.openxmlformats.org/presentationml/2006/main">
+  <p:cSld>
+    <p:spTree>
+      <p:nvGrpSpPr>
+        <p:cNvPr id="1" name=""/>
+        <p:cNvGrpSpPr/>
+        <p:nvPr/>
+      </p:nvGrpSpPr>
+      <p:grpSpPr>
+        <a:xfrm>
+          <a:off x="0" y="0"/>
+          <a:ext cx="0" cy="0"/>
+          <a:chOff x="0" y="0"/>
+          <a:chExt cx="0" cy="0"/>
+        </a:xfrm>
+      </p:grpSpPr>
+      <p:sp>
+        <p:nvSpPr>
+          <p:cNvPr id="2" name="Title 1">
+            <a:extLst>
+              <a:ext uri="{FF2B5EF4-FFF2-40B4-BE49-F238E27FC236}">
+                <a16:creationId xmlns:a16="http://schemas.microsoft.com/office/drawing/2014/main" id="{A512CBF9-80AA-D545-97BE-77419E758037}"/>
+              </a:ext>
+            </a:extLst>
+          </p:cNvPr>
+          <p:cNvSpPr>
+            <a:spLocks noGrp="1"/>
+          </p:cNvSpPr>
+          <p:nvPr>
+            <p:ph type="title"/>
+          </p:nvPr>
+        </p:nvSpPr>
+        <p:spPr/>
+        <p:txBody>
+          <a:bodyPr/>
+          <a:lstStyle/>
+          <a:p>
+            <a:r>
+              <a:rPr lang="en-US" dirty="0"/>
+              <a:t>How do we avoid these?</a:t>
+            </a:r>
+            <a:endParaRPr lang="en-IN" dirty="0"/>
+          </a:p>
+        </p:txBody>
+      </p:sp>
+      <p:sp>
+        <p:nvSpPr>
+          <p:cNvPr id="3" name="Content Placeholder 2">
+            <a:extLst>
+              <a:ext uri="{FF2B5EF4-FFF2-40B4-BE49-F238E27FC236}">
+                <a16:creationId xmlns:a16="http://schemas.microsoft.com/office/drawing/2014/main" id="{508E6923-A7E2-8A8A-C6B2-7E15BB53133D}"/>
+              </a:ext>
+            </a:extLst>
+          </p:cNvPr>
+          <p:cNvSpPr>
+            <a:spLocks noGrp="1"/>
+          </p:cNvSpPr>
+          <p:nvPr>
+            <p:ph idx="1"/>
+          </p:nvPr>
+        </p:nvSpPr>
+        <p:spPr/>
+        <p:txBody>
+          <a:bodyPr/>
+          <a:lstStyle/>
+          <a:p>
+            <a:pPr marL="0" indent="0">
+              <a:buNone/>
+            </a:pPr>
+            <a:r>
+              <a:rPr lang="en-US" dirty="0"/>
+              <a:t>Problem areas:</a:t>
+            </a:r>
+          </a:p>
+          <a:p>
+            <a:r>
+              <a:rPr lang="en-US" dirty="0"/>
+              <a:t>Data exchange  </a:t>
+            </a:r>
+            <a:r>
+              <a:rPr lang="en-US" dirty="0">
+                <a:sym typeface="Wingdings" panose="05000000000000000000" pitchFamily="2" charset="2"/>
+              </a:rPr>
+              <a:t>  IPC</a:t>
+            </a:r>
+          </a:p>
+          <a:p>
+            <a:r>
+              <a:rPr lang="en-US" dirty="0">
+                <a:sym typeface="Wingdings" panose="05000000000000000000" pitchFamily="2" charset="2"/>
+              </a:rPr>
+              <a:t>Safe access / ordering </a:t>
+            </a:r>
+            <a:r>
+              <a:rPr lang="en-US" dirty="0"/>
+              <a:t> </a:t>
+            </a:r>
+            <a:r>
+              <a:rPr lang="en-US" dirty="0">
+                <a:sym typeface="Wingdings" panose="05000000000000000000" pitchFamily="2" charset="2"/>
+              </a:rPr>
+              <a:t>  Synchronization</a:t>
+            </a:r>
+          </a:p>
+          <a:p>
+            <a:endParaRPr lang="en-US" dirty="0">
+              <a:sym typeface="Wingdings" panose="05000000000000000000" pitchFamily="2" charset="2"/>
+            </a:endParaRPr>
+          </a:p>
+          <a:p>
+            <a:pPr marL="0" indent="0">
+              <a:buNone/>
+            </a:pPr>
+            <a:r>
+              <a:rPr lang="en-US" dirty="0">
+                <a:sym typeface="Wingdings" panose="05000000000000000000" pitchFamily="2" charset="2"/>
+              </a:rPr>
+              <a:t>Communication paradigms:</a:t>
+            </a:r>
+          </a:p>
+          <a:p>
+            <a:r>
+              <a:rPr lang="en-US" dirty="0">
+                <a:sym typeface="Wingdings" panose="05000000000000000000" pitchFamily="2" charset="2"/>
+              </a:rPr>
+              <a:t>Shared memory</a:t>
+            </a:r>
+          </a:p>
+          <a:p>
+            <a:r>
+              <a:rPr lang="en-US" dirty="0">
+                <a:sym typeface="Wingdings" panose="05000000000000000000" pitchFamily="2" charset="2"/>
+              </a:rPr>
+              <a:t>Message passing</a:t>
+            </a:r>
+            <a:endParaRPr lang="en-IN" dirty="0"/>
+          </a:p>
+        </p:txBody>
+      </p:sp>
+      <p:sp>
+        <p:nvSpPr>
+          <p:cNvPr id="4" name="Date Placeholder 3">
+            <a:extLst>
+              <a:ext uri="{FF2B5EF4-FFF2-40B4-BE49-F238E27FC236}">
+                <a16:creationId xmlns:a16="http://schemas.microsoft.com/office/drawing/2014/main" id="{A5BBD4DF-6CDD-AE7E-FE33-E135DA7566A1}"/>
+              </a:ext>
+            </a:extLst>
+          </p:cNvPr>
+          <p:cNvSpPr>
+            <a:spLocks noGrp="1"/>
+          </p:cNvSpPr>
+          <p:nvPr>
+            <p:ph type="dt" sz="half" idx="10"/>
+          </p:nvPr>
+        </p:nvSpPr>
+        <p:spPr/>
+        <p:txBody>
+          <a:bodyPr/>
+          <a:lstStyle/>
+          <a:p>
+            <a:pPr>
+              <a:defRPr/>
+            </a:pPr>
+            <a:r>
+              <a:rPr lang="en-US"/>
+              <a:t>21/12/2020</a:t>
+            </a:r>
+          </a:p>
+        </p:txBody>
+      </p:sp>
+      <p:sp>
+        <p:nvSpPr>
+          <p:cNvPr id="5" name="Slide Number Placeholder 4">
+            <a:extLst>
+              <a:ext uri="{FF2B5EF4-FFF2-40B4-BE49-F238E27FC236}">
+                <a16:creationId xmlns:a16="http://schemas.microsoft.com/office/drawing/2014/main" id="{AB6664C7-DB26-4069-DB0A-423504605247}"/>
+              </a:ext>
+            </a:extLst>
+          </p:cNvPr>
+          <p:cNvSpPr>
+            <a:spLocks noGrp="1"/>
+          </p:cNvSpPr>
+          <p:nvPr>
+            <p:ph type="sldNum" sz="quarter" idx="12"/>
+          </p:nvPr>
+        </p:nvSpPr>
+        <p:spPr/>
+        <p:txBody>
+          <a:bodyPr/>
+          <a:lstStyle/>
+          <a:p>
+            <a:pPr>
+              <a:defRPr/>
+            </a:pPr>
+            <a:fld id="{CA887A73-1AE0-46F8-856A-18EA1CF30A1B}" type="slidenum">
+              <a:rPr lang="en-US" altLang="en-US" smtClean="0"/>
+              <a:pPr>
+                <a:defRPr/>
+              </a:pPr>
+              <a:t>6</a:t>
+            </a:fld>
+            <a:endParaRPr lang="en-US" altLang="en-US"/>
+          </a:p>
+        </p:txBody>
+      </p:sp>
+    </p:spTree>
+    <p:extLst>
+      <p:ext uri="{BB962C8B-B14F-4D97-AF65-F5344CB8AC3E}">
+        <p14:creationId xmlns:p14="http://schemas.microsoft.com/office/powerpoint/2010/main" val="4011870444"/>
+      </p:ext>
+    </p:extLst>
+  </p:cSld>
+  <p:clrMapOvr>
+    <a:masterClrMapping/>
+  </p:clrMapOvr>
+  <p:timing>
+    <p:tnLst>
+      <p:par>
+        <p:cTn id="1" dur="indefinite" restart="never" nodeType="tmRoot">
+          <p:childTnLst>
+            <p:seq concurrent="1" nextAc="seek">
+              <p:cTn id="2" dur="indefinite" nodeType="mainSeq">
+                <p:childTnLst>
+                  <p:par>
+                    <p:cTn id="3" fill="hold">
+                      <p:stCondLst>
+                        <p:cond delay="indefinite"/>
+                      </p:stCondLst>
+                      <p:childTnLst>
+                        <p:par>
+                          <p:cTn id="4" fill="hold">
+                            <p:stCondLst>
+                              <p:cond delay="0"/>
+                            </p:stCondLst>
+                            <p:childTnLst>
+                              <p:par>
+                                <p:cTn id="5" presetID="1" presetClass="entr" presetSubtype="0" fill="hold" grpId="0" nodeType="clickEffect">
+                                  <p:stCondLst>
+                                    <p:cond delay="0"/>
+                                  </p:stCondLst>
+                                  <p:childTnLst>
+                                    <p:set>
+                                      <p:cBhvr>
+                                        <p:cTn id="6" dur="1" fill="hold">
+                                          <p:stCondLst>
+                                            <p:cond delay="0"/>
+                                          </p:stCondLst>
+                                        </p:cTn>
+                                        <p:tgtEl>
+                                          <p:spTgt spid="3">
+                                            <p:txEl>
+                                              <p:pRg st="0" end="0"/>
+                                            </p:txEl>
+                                          </p:spTgt>
+                                        </p:tgtEl>
+                                        <p:attrNameLst>
+                                          <p:attrName>style.visibility</p:attrName>
+                                        </p:attrNameLst>
+                                      </p:cBhvr>
+                                      <p:to>
+                                        <p:strVal val="visible"/>
+                                      </p:to>
+                                    </p:set>
+                                  </p:childTnLst>
+                                </p:cTn>
+                              </p:par>
+                            </p:childTnLst>
+                          </p:cTn>
+                        </p:par>
+                      </p:childTnLst>
+                    </p:cTn>
+                  </p:par>
+                  <p:par>
+                    <p:cTn id="7" fill="hold">
+                      <p:stCondLst>
+                        <p:cond delay="indefinite"/>
+                      </p:stCondLst>
+                      <p:childTnLst>
+                        <p:par>
+                          <p:cTn id="8" fill="hold">
+                            <p:stCondLst>
+                              <p:cond delay="0"/>
+                            </p:stCondLst>
+                            <p:childTnLst>
+                              <p:par>
+                                <p:cTn id="9" presetID="1" presetClass="entr" presetSubtype="0" fill="hold" grpId="0" nodeType="clickEffect">
+                                  <p:stCondLst>
+                                    <p:cond delay="0"/>
+                                  </p:stCondLst>
+                                  <p:childTnLst>
+                                    <p:set>
+                                      <p:cBhvr>
+                                        <p:cTn id="10" dur="1" fill="hold">
+                                          <p:stCondLst>
+                                            <p:cond delay="0"/>
+                                          </p:stCondLst>
+                                        </p:cTn>
+                                        <p:tgtEl>
+                                          <p:spTgt spid="3">
+                                            <p:txEl>
+                                              <p:pRg st="1" end="1"/>
+                                            </p:txEl>
+                                          </p:spTgt>
+                                        </p:tgtEl>
+                                        <p:attrNameLst>
+                                          <p:attrName>style.visibility</p:attrName>
+                                        </p:attrNameLst>
+                                      </p:cBhvr>
+                                      <p:to>
+                                        <p:strVal val="visible"/>
+                                      </p:to>
+                                    </p:set>
+                                  </p:childTnLst>
+                                </p:cTn>
+                              </p:par>
+                            </p:childTnLst>
+                          </p:cTn>
+                        </p:par>
+                      </p:childTnLst>
+                    </p:cTn>
+                  </p:par>
+                  <p:par>
+                    <p:cTn id="11" fill="hold">
+                      <p:stCondLst>
+                        <p:cond delay="indefinite"/>
+                      </p:stCondLst>
+                      <p:childTnLst>
+                        <p:par>
+                          <p:cTn id="12" fill="hold">
+                            <p:stCondLst>
+                              <p:cond delay="0"/>
+                            </p:stCondLst>
+                            <p:childTnLst>
+                              <p:par>
+                                <p:cTn id="13" presetID="1" presetClass="entr" presetSubtype="0" fill="hold" grpId="0" nodeType="clickEffect">
+                                  <p:stCondLst>
+                                    <p:cond delay="0"/>
+                                  </p:stCondLst>
+                                  <p:childTnLst>
+                                    <p:set>
+                                      <p:cBhvr>
+                                        <p:cTn id="14" dur="1" fill="hold">
+                                          <p:stCondLst>
+                                            <p:cond delay="0"/>
+                                          </p:stCondLst>
+                                        </p:cTn>
+                                        <p:tgtEl>
+                                          <p:spTgt spid="3">
+                                            <p:txEl>
+                                              <p:pRg st="2" end="2"/>
+                                            </p:txEl>
+                                          </p:spTgt>
+                                        </p:tgtEl>
+                                        <p:attrNameLst>
+                                          <p:attrName>style.visibility</p:attrName>
+                                        </p:attrNameLst>
+                                      </p:cBhvr>
+                                      <p:to>
+                                        <p:strVal val="visible"/>
+                                      </p:to>
+                                    </p:set>
+                                  </p:childTnLst>
+                                </p:cTn>
+                              </p:par>
+                            </p:childTnLst>
+                          </p:cTn>
+                        </p:par>
+                      </p:childTnLst>
+                    </p:cTn>
+                  </p:par>
+                  <p:par>
+                    <p:cTn id="15" fill="hold">
+                      <p:stCondLst>
+                        <p:cond delay="indefinite"/>
+                      </p:stCondLst>
+                      <p:childTnLst>
+                        <p:par>
+                          <p:cTn id="16" fill="hold">
+                            <p:stCondLst>
+                              <p:cond delay="0"/>
+                            </p:stCondLst>
+                            <p:childTnLst>
+                              <p:par>
+                                <p:cTn id="17" presetID="1" presetClass="entr" presetSubtype="0" fill="hold" grpId="0" nodeType="clickEffect">
+                                  <p:stCondLst>
+                                    <p:cond delay="0"/>
+                                  </p:stCondLst>
+                                  <p:childTnLst>
+                                    <p:set>
+                                      <p:cBhvr>
+                                        <p:cTn id="18" dur="1" fill="hold">
+                                          <p:stCondLst>
+                                            <p:cond delay="0"/>
+                                          </p:stCondLst>
+                                        </p:cTn>
+                                        <p:tgtEl>
+                                          <p:spTgt spid="3">
+                                            <p:txEl>
+                                              <p:pRg st="4" end="4"/>
+                                            </p:txEl>
+                                          </p:spTgt>
+                                        </p:tgtEl>
+                                        <p:attrNameLst>
+                                          <p:attrName>style.visibility</p:attrName>
+                                        </p:attrNameLst>
+                                      </p:cBhvr>
+                                      <p:to>
+                                        <p:strVal val="visible"/>
+                                      </p:to>
+                                    </p:set>
+                                  </p:childTnLst>
+                                </p:cTn>
+                              </p:par>
+                            </p:childTnLst>
+                          </p:cTn>
+                        </p:par>
+                      </p:childTnLst>
+                    </p:cTn>
+                  </p:par>
+                  <p:par>
+                    <p:cTn id="19" fill="hold">
+                      <p:stCondLst>
+                        <p:cond delay="indefinite"/>
+                      </p:stCondLst>
+                      <p:childTnLst>
+                        <p:par>
+                          <p:cTn id="20" fill="hold">
+                            <p:stCondLst>
+                              <p:cond delay="0"/>
+                            </p:stCondLst>
+                            <p:childTnLst>
+                              <p:par>
+                                <p:cTn id="21" presetID="1" presetClass="entr" presetSubtype="0" fill="hold" grpId="0" nodeType="clickEffect">
+                                  <p:stCondLst>
+                                    <p:cond delay="0"/>
+                                  </p:stCondLst>
+                                  <p:childTnLst>
+                                    <p:set>
+                                      <p:cBhvr>
+                                        <p:cTn id="22" dur="1" fill="hold">
+                                          <p:stCondLst>
+                                            <p:cond delay="0"/>
+                                          </p:stCondLst>
+                                        </p:cTn>
+                                        <p:tgtEl>
+                                          <p:spTgt spid="3">
+                                            <p:txEl>
+                                              <p:pRg st="5" end="5"/>
+                                            </p:txEl>
+                                          </p:spTgt>
+                                        </p:tgtEl>
+                                        <p:attrNameLst>
+                                          <p:attrName>style.visibility</p:attrName>
+                                        </p:attrNameLst>
+                                      </p:cBhvr>
+                                      <p:to>
+                                        <p:strVal val="visible"/>
+                                      </p:to>
+                                    </p:set>
+                                  </p:childTnLst>
+                                </p:cTn>
+                              </p:par>
+                            </p:childTnLst>
+                          </p:cTn>
+                        </p:par>
+                      </p:childTnLst>
+                    </p:cTn>
+                  </p:par>
+                  <p:par>
+                    <p:cTn id="23" fill="hold">
+                      <p:stCondLst>
+                        <p:cond delay="indefinite"/>
+                      </p:stCondLst>
+                      <p:childTnLst>
+                        <p:par>
+                          <p:cTn id="24" fill="hold">
+                            <p:stCondLst>
+                              <p:cond delay="0"/>
+                            </p:stCondLst>
+                            <p:childTnLst>
+                              <p:par>
+                                <p:cTn id="25" presetID="1" presetClass="entr" presetSubtype="0" fill="hold" grpId="0" nodeType="clickEffect">
+                                  <p:stCondLst>
+                                    <p:cond delay="0"/>
+                                  </p:stCondLst>
+                                  <p:childTnLst>
+                                    <p:set>
+                                      <p:cBhvr>
+                                        <p:cTn id="26" dur="1" fill="hold">
+                                          <p:stCondLst>
+                                            <p:cond delay="0"/>
+                                          </p:stCondLst>
+                                        </p:cTn>
+                                        <p:tgtEl>
+                                          <p:spTgt spid="3">
+                                            <p:txEl>
+                                              <p:pRg st="6" end="6"/>
+                                            </p:txEl>
+                                          </p:spTgt>
+                                        </p:tgtEl>
+                                        <p:attrNameLst>
+                                          <p:attrName>style.visibility</p:attrName>
+                                        </p:attrNameLst>
+                                      </p:cBhvr>
+                                      <p:to>
+                                        <p:strVal val="visible"/>
+                                      </p:to>
+                                    </p:set>
+                                  </p:childTnLst>
+                                </p:cTn>
+                              </p:par>
+                            </p:childTnLst>
+                          </p:cTn>
+                        </p:par>
+                      </p:childTnLst>
+                    </p:cTn>
+                  </p:par>
+                </p:childTnLst>
+              </p:cTn>
+              <p:prevCondLst>
+                <p:cond evt="onPrev" delay="0">
+                  <p:tgtEl>
+                    <p:sldTgt/>
+                  </p:tgtEl>
+                </p:cond>
+              </p:prevCondLst>
+              <p:nextCondLst>
+                <p:cond evt="onNext" delay="0">
+                  <p:tgtEl>
+                    <p:sldTgt/>
+                  </p:tgtEl>
+                </p:cond>
+              </p:nextCondLst>
+            </p:seq>
+          </p:childTnLst>
+        </p:cTn>
+      </p:par>
+    </p:tnLst>
+    <p:bldLst>
+      <p:bldP spid="3" grpId="0" build="p"/>
+    </p:bldLst>
+  </p:timing>
+</p:sld>
+</file>
+
+<file path=ppt/slides/slide7.xml><?xml version="1.0" encoding="utf-8"?>
+<p:sld xmlns:a="http://schemas.openxmlformats.org/drawingml/2006/main" xmlns:r="http://schemas.openxmlformats.org/officeDocument/2006/relationships" xmlns:p="http://schemas.openxmlformats.org/presentationml/2006/main">
+  <p:cSld>
+    <p:spTree>
+      <p:nvGrpSpPr>
+        <p:cNvPr id="1" name=""/>
+        <p:cNvGrpSpPr/>
+        <p:nvPr/>
+      </p:nvGrpSpPr>
+      <p:grpSpPr>
+        <a:xfrm>
+          <a:off x="0" y="0"/>
+          <a:ext cx="0" cy="0"/>
+          <a:chOff x="0" y="0"/>
+          <a:chExt cx="0" cy="0"/>
+        </a:xfrm>
+      </p:grpSpPr>
+      <p:sp>
+        <p:nvSpPr>
+          <p:cNvPr id="2" name="Title 1">
+            <a:extLst>
+              <a:ext uri="{FF2B5EF4-FFF2-40B4-BE49-F238E27FC236}">
+                <a16:creationId xmlns:a16="http://schemas.microsoft.com/office/drawing/2014/main" id="{929CEFD6-EBED-5435-12DF-DACF7DD75251}"/>
+              </a:ext>
+            </a:extLst>
+          </p:cNvPr>
+          <p:cNvSpPr>
+            <a:spLocks noGrp="1"/>
+          </p:cNvSpPr>
+          <p:nvPr>
+            <p:ph type="title"/>
+          </p:nvPr>
+        </p:nvSpPr>
+        <p:spPr/>
+        <p:txBody>
+          <a:bodyPr/>
+          <a:lstStyle/>
+          <a:p>
+            <a:r>
+              <a:rPr lang="en-US" dirty="0"/>
+              <a:t>Shared memory</a:t>
+            </a:r>
+            <a:endParaRPr lang="en-IN" dirty="0"/>
+          </a:p>
+        </p:txBody>
+      </p:sp>
+      <p:sp>
+        <p:nvSpPr>
+          <p:cNvPr id="4" name="Date Placeholder 3">
+            <a:extLst>
+              <a:ext uri="{FF2B5EF4-FFF2-40B4-BE49-F238E27FC236}">
+                <a16:creationId xmlns:a16="http://schemas.microsoft.com/office/drawing/2014/main" id="{03D96903-D61A-351D-57D3-924B55B340A7}"/>
+              </a:ext>
+            </a:extLst>
+          </p:cNvPr>
+          <p:cNvSpPr>
+            <a:spLocks noGrp="1"/>
+          </p:cNvSpPr>
+          <p:nvPr>
+            <p:ph type="dt" sz="half" idx="10"/>
+          </p:nvPr>
+        </p:nvSpPr>
+        <p:spPr/>
+        <p:txBody>
+          <a:bodyPr/>
+          <a:lstStyle/>
+          <a:p>
+            <a:pPr>
+              <a:defRPr/>
+            </a:pPr>
+            <a:r>
+              <a:rPr lang="en-US"/>
+              <a:t>21/12/2020</a:t>
+            </a:r>
+          </a:p>
+        </p:txBody>
+      </p:sp>
+      <p:sp>
+        <p:nvSpPr>
+          <p:cNvPr id="5" name="Slide Number Placeholder 4">
+            <a:extLst>
+              <a:ext uri="{FF2B5EF4-FFF2-40B4-BE49-F238E27FC236}">
+                <a16:creationId xmlns:a16="http://schemas.microsoft.com/office/drawing/2014/main" id="{06218C6B-F55F-417E-B602-52320AAF6216}"/>
+              </a:ext>
+            </a:extLst>
+          </p:cNvPr>
+          <p:cNvSpPr>
+            <a:spLocks noGrp="1"/>
+          </p:cNvSpPr>
+          <p:nvPr>
+            <p:ph type="sldNum" sz="quarter" idx="12"/>
+          </p:nvPr>
+        </p:nvSpPr>
+        <p:spPr/>
+        <p:txBody>
+          <a:bodyPr/>
+          <a:lstStyle/>
+          <a:p>
+            <a:pPr>
+              <a:defRPr/>
+            </a:pPr>
+            <a:fld id="{CA887A73-1AE0-46F8-856A-18EA1CF30A1B}" type="slidenum">
+              <a:rPr lang="en-US" altLang="en-US" smtClean="0"/>
+              <a:pPr>
+                <a:defRPr/>
+              </a:pPr>
+              <a:t>7</a:t>
+            </a:fld>
+            <a:endParaRPr lang="en-US" altLang="en-US"/>
+          </a:p>
+        </p:txBody>
+      </p:sp>
+      <p:pic>
+        <p:nvPicPr>
+          <p:cNvPr id="7" name="Picture 6">
+            <a:extLst>
+              <a:ext uri="{FF2B5EF4-FFF2-40B4-BE49-F238E27FC236}">
+                <a16:creationId xmlns:a16="http://schemas.microsoft.com/office/drawing/2014/main" id="{99D3555F-8AF0-A1FC-D0FD-85EF63FC111A}"/>
+              </a:ext>
+            </a:extLst>
+          </p:cNvPr>
+          <p:cNvPicPr>
+            <a:picLocks noChangeAspect="1"/>
+          </p:cNvPicPr>
+          <p:nvPr/>
+        </p:nvPicPr>
+        <p:blipFill>
+          <a:blip r:embed="rId2"/>
+          <a:stretch>
+            <a:fillRect/>
+          </a:stretch>
+        </p:blipFill>
+        <p:spPr>
+          <a:xfrm>
+            <a:off x="152400" y="1446211"/>
+            <a:ext cx="3657600" cy="2830882"/>
+          </a:xfrm>
+          <a:prstGeom prst="rect">
+            <a:avLst/>
+          </a:prstGeom>
+        </p:spPr>
+      </p:pic>
+      <p:sp>
+        <p:nvSpPr>
+          <p:cNvPr id="8" name="Content Placeholder 2">
+            <a:extLst>
+              <a:ext uri="{FF2B5EF4-FFF2-40B4-BE49-F238E27FC236}">
+                <a16:creationId xmlns:a16="http://schemas.microsoft.com/office/drawing/2014/main" id="{47C219E0-3BA1-FEF4-CD19-6BFE38BA84E0}"/>
+              </a:ext>
+            </a:extLst>
+          </p:cNvPr>
+          <p:cNvSpPr>
+            <a:spLocks noGrp="1"/>
+          </p:cNvSpPr>
+          <p:nvPr>
+            <p:ph idx="1"/>
+          </p:nvPr>
+        </p:nvSpPr>
+        <p:spPr>
+          <a:xfrm>
+            <a:off x="152400" y="4419600"/>
+            <a:ext cx="3657600" cy="763589"/>
+          </a:xfrm>
+        </p:spPr>
+        <p:txBody>
+          <a:bodyPr/>
+          <a:lstStyle/>
+          <a:p>
+            <a:pPr marL="0" indent="0">
+              <a:buNone/>
+            </a:pPr>
+            <a:r>
+              <a:rPr lang="en-US" dirty="0"/>
+              <a:t>Problematic – race condition possible</a:t>
+            </a:r>
+            <a:endParaRPr lang="en-IN" dirty="0"/>
+          </a:p>
+        </p:txBody>
+      </p:sp>
+      <p:pic>
+        <p:nvPicPr>
+          <p:cNvPr id="10" name="Picture 9">
+            <a:extLst>
+              <a:ext uri="{FF2B5EF4-FFF2-40B4-BE49-F238E27FC236}">
+                <a16:creationId xmlns:a16="http://schemas.microsoft.com/office/drawing/2014/main" id="{0E795087-DA92-8BBE-EF35-27FAFC429E64}"/>
+              </a:ext>
+            </a:extLst>
+          </p:cNvPr>
+          <p:cNvPicPr>
+            <a:picLocks noChangeAspect="1"/>
+          </p:cNvPicPr>
+          <p:nvPr/>
+        </p:nvPicPr>
+        <p:blipFill>
+          <a:blip r:embed="rId3"/>
+          <a:stretch>
+            <a:fillRect/>
+          </a:stretch>
+        </p:blipFill>
+        <p:spPr>
+          <a:xfrm>
+            <a:off x="4876800" y="2855790"/>
+            <a:ext cx="2743199" cy="914400"/>
+          </a:xfrm>
+          <a:prstGeom prst="rect">
+            <a:avLst/>
+          </a:prstGeom>
+        </p:spPr>
+      </p:pic>
+      <p:sp>
+        <p:nvSpPr>
+          <p:cNvPr id="11" name="Content Placeholder 2">
+            <a:extLst>
+              <a:ext uri="{FF2B5EF4-FFF2-40B4-BE49-F238E27FC236}">
+                <a16:creationId xmlns:a16="http://schemas.microsoft.com/office/drawing/2014/main" id="{FF624E55-2E32-FFFE-68E0-D8BEEE623972}"/>
+              </a:ext>
+            </a:extLst>
+          </p:cNvPr>
+          <p:cNvSpPr txBox="1">
+            <a:spLocks/>
+          </p:cNvSpPr>
+          <p:nvPr/>
+        </p:nvSpPr>
+        <p:spPr bwMode="auto">
+          <a:xfrm>
+            <a:off x="4038600" y="1465513"/>
+            <a:ext cx="3657600" cy="1816991"/>
+          </a:xfrm>
+          <a:prstGeom prst="rect">
+            <a:avLst/>
+          </a:prstGeom>
+          <a:noFill/>
+          <a:ln>
+            <a:noFill/>
+          </a:ln>
+          <a:extLst>
+            <a:ext uri="{909E8E84-426E-40DD-AFC4-6F175D3DCCD1}">
+              <a14:hiddenFill xmlns:a14="http://schemas.microsoft.com/office/drawing/2010/main">
+                <a:solidFill>
+                  <a:srgbClr val="FFFFFF"/>
+                </a:solidFill>
+              </a14:hiddenFill>
+            </a:ext>
+            <a:ext uri="{91240B29-F687-4F45-9708-019B960494DF}">
+              <a14:hiddenLine xmlns:a14="http://schemas.microsoft.com/office/drawing/2010/main" w="9525">
+                <a:solidFill>
+                  <a:srgbClr val="000000"/>
+                </a:solidFill>
+                <a:miter lim="800000"/>
+                <a:headEnd/>
+                <a:tailEnd/>
+              </a14:hiddenLine>
+            </a:ext>
+          </a:extLst>
+        </p:spPr>
+        <p:txBody>
+          <a:bodyPr vert="horz" wrap="square" lIns="91440" tIns="45720" rIns="91440" bIns="45720" numCol="1" anchor="t" anchorCtr="0" compatLnSpc="1">
+            <a:prstTxWarp prst="textNoShape">
+              <a:avLst/>
+            </a:prstTxWarp>
+          </a:bodyPr>
+          <a:lstStyle>
+            <a:lvl1pPr marL="342900" indent="-342900" algn="l" rtl="0" eaLnBrk="0" fontAlgn="base" hangingPunct="0">
+              <a:spcBef>
+                <a:spcPct val="20000"/>
+              </a:spcBef>
+              <a:spcAft>
+                <a:spcPct val="0"/>
+              </a:spcAft>
+              <a:buFont typeface="Arial" panose="020B0604020202020204" pitchFamily="34" charset="0"/>
+              <a:buChar char="•"/>
+              <a:defRPr sz="3200" kern="1200">
+                <a:solidFill>
+                  <a:schemeClr val="tx1">
+                    <a:lumMod val="50000"/>
+                    <a:lumOff val="50000"/>
+                  </a:schemeClr>
+                </a:solidFill>
+                <a:latin typeface="+mn-lt"/>
+                <a:ea typeface="+mn-ea"/>
+                <a:cs typeface="+mn-cs"/>
+              </a:defRPr>
+            </a:lvl1pPr>
+            <a:lvl2pPr marL="742950" indent="-285750" algn="l" rtl="0" eaLnBrk="0" fontAlgn="base" hangingPunct="0">
+              <a:spcBef>
+                <a:spcPct val="20000"/>
+              </a:spcBef>
+              <a:spcAft>
+                <a:spcPct val="0"/>
+              </a:spcAft>
+              <a:buFont typeface="Arial" panose="020B0604020202020204" pitchFamily="34" charset="0"/>
+              <a:buChar char="–"/>
+              <a:defRPr sz="2800" kern="1200">
+                <a:solidFill>
+                  <a:schemeClr val="tx1">
+                    <a:lumMod val="50000"/>
+                    <a:lumOff val="50000"/>
+                  </a:schemeClr>
+                </a:solidFill>
+                <a:latin typeface="+mn-lt"/>
+                <a:ea typeface="+mn-ea"/>
+                <a:cs typeface="+mn-cs"/>
+              </a:defRPr>
+            </a:lvl2pPr>
+            <a:lvl3pPr marL="1143000" indent="-228600" algn="l" rtl="0" eaLnBrk="0" fontAlgn="base" hangingPunct="0">
+              <a:spcBef>
+                <a:spcPct val="20000"/>
+              </a:spcBef>
+              <a:spcAft>
+                <a:spcPct val="0"/>
+              </a:spcAft>
+              <a:buFont typeface="Arial" panose="020B0604020202020204" pitchFamily="34" charset="0"/>
+              <a:buChar char="•"/>
+              <a:defRPr sz="2400" kern="1200">
+                <a:solidFill>
+                  <a:schemeClr val="tx1">
+                    <a:lumMod val="50000"/>
+                    <a:lumOff val="50000"/>
+                  </a:schemeClr>
+                </a:solidFill>
+                <a:latin typeface="+mn-lt"/>
+                <a:ea typeface="+mn-ea"/>
+                <a:cs typeface="+mn-cs"/>
+              </a:defRPr>
+            </a:lvl3pPr>
+            <a:lvl4pPr marL="1600200" indent="-228600" algn="l" rtl="0" eaLnBrk="0" fontAlgn="base" hangingPunct="0">
+              <a:spcBef>
+                <a:spcPct val="20000"/>
+              </a:spcBef>
+              <a:spcAft>
+                <a:spcPct val="0"/>
+              </a:spcAft>
+              <a:buFont typeface="Arial" panose="020B0604020202020204" pitchFamily="34" charset="0"/>
+              <a:buChar char="–"/>
+              <a:defRPr sz="2000" kern="1200">
+                <a:solidFill>
+                  <a:schemeClr val="tx1">
+                    <a:lumMod val="50000"/>
+                    <a:lumOff val="50000"/>
+                  </a:schemeClr>
+                </a:solidFill>
+                <a:latin typeface="+mn-lt"/>
+                <a:ea typeface="+mn-ea"/>
+                <a:cs typeface="+mn-cs"/>
+              </a:defRPr>
+            </a:lvl4pPr>
+            <a:lvl5pPr marL="2057400" indent="-228600" algn="l" rtl="0" eaLnBrk="0" fontAlgn="base" hangingPunct="0">
+              <a:spcBef>
+                <a:spcPct val="20000"/>
+              </a:spcBef>
+              <a:spcAft>
+                <a:spcPct val="0"/>
+              </a:spcAft>
+              <a:buFont typeface="Arial" panose="020B0604020202020204" pitchFamily="34" charset="0"/>
+              <a:buChar char="»"/>
+              <a:defRPr sz="2000" kern="1200">
+                <a:solidFill>
+                  <a:schemeClr val="tx1">
+                    <a:lumMod val="50000"/>
+                    <a:lumOff val="50000"/>
+                  </a:schemeClr>
+                </a:solidFill>
+                <a:latin typeface="+mn-lt"/>
+                <a:ea typeface="+mn-ea"/>
+                <a:cs typeface="+mn-cs"/>
+              </a:defRPr>
+            </a:lvl5pPr>
+            <a:lvl6pPr marL="2514600" indent="-228600" algn="l" defTabSz="914400" rtl="0" eaLnBrk="1" latinLnBrk="0" hangingPunct="1">
+              <a:spcBef>
+                <a:spcPct val="20000"/>
+              </a:spcBef>
+              <a:buFont typeface="Arial" pitchFamily="34" charset="0"/>
+              <a:buChar char="•"/>
+              <a:defRPr sz="2000" kern="1200">
+                <a:solidFill>
+                  <a:schemeClr val="tx1"/>
+                </a:solidFill>
+                <a:latin typeface="+mn-lt"/>
+                <a:ea typeface="+mn-ea"/>
+                <a:cs typeface="+mn-cs"/>
+              </a:defRPr>
+            </a:lvl6pPr>
+            <a:lvl7pPr marL="2971800" indent="-228600" algn="l" defTabSz="914400" rtl="0" eaLnBrk="1" latinLnBrk="0" hangingPunct="1">
+              <a:spcBef>
+                <a:spcPct val="20000"/>
+              </a:spcBef>
+              <a:buFont typeface="Arial" pitchFamily="34" charset="0"/>
+              <a:buChar char="•"/>
+              <a:defRPr sz="2000" kern="1200">
+                <a:solidFill>
+                  <a:schemeClr val="tx1"/>
+                </a:solidFill>
+                <a:latin typeface="+mn-lt"/>
+                <a:ea typeface="+mn-ea"/>
+                <a:cs typeface="+mn-cs"/>
+              </a:defRPr>
+            </a:lvl7pPr>
+            <a:lvl8pPr marL="3429000" indent="-228600" algn="l" defTabSz="914400" rtl="0" eaLnBrk="1" latinLnBrk="0" hangingPunct="1">
+              <a:spcBef>
+                <a:spcPct val="20000"/>
+              </a:spcBef>
+              <a:buFont typeface="Arial" pitchFamily="34" charset="0"/>
+              <a:buChar char="•"/>
+              <a:defRPr sz="2000" kern="1200">
+                <a:solidFill>
+                  <a:schemeClr val="tx1"/>
+                </a:solidFill>
+                <a:latin typeface="+mn-lt"/>
+                <a:ea typeface="+mn-ea"/>
+                <a:cs typeface="+mn-cs"/>
+              </a:defRPr>
+            </a:lvl8pPr>
+            <a:lvl9pPr marL="3886200" indent="-228600" algn="l" defTabSz="914400" rtl="0" eaLnBrk="1" latinLnBrk="0" hangingPunct="1">
+              <a:spcBef>
+                <a:spcPct val="20000"/>
+              </a:spcBef>
+              <a:buFont typeface="Arial" pitchFamily="34" charset="0"/>
+              <a:buChar char="•"/>
+              <a:defRPr sz="2000" kern="1200">
+                <a:solidFill>
+                  <a:schemeClr val="tx1"/>
+                </a:solidFill>
+                <a:latin typeface="+mn-lt"/>
+                <a:ea typeface="+mn-ea"/>
+                <a:cs typeface="+mn-cs"/>
+              </a:defRPr>
+            </a:lvl9pPr>
+          </a:lstStyle>
+          <a:p>
+            <a:pPr marL="0" indent="0">
+              <a:buFont typeface="Arial" panose="020B0604020202020204" pitchFamily="34" charset="0"/>
+              <a:buNone/>
+            </a:pPr>
+            <a:r>
+              <a:rPr lang="en-US" dirty="0"/>
+              <a:t>Critical section</a:t>
+            </a:r>
+          </a:p>
+          <a:p>
+            <a:pPr marL="0" indent="0">
+              <a:buFont typeface="Arial" panose="020B0604020202020204" pitchFamily="34" charset="0"/>
+              <a:buNone/>
+            </a:pPr>
+            <a:r>
+              <a:rPr lang="en-IN" sz="1800" dirty="0">
+                <a:solidFill>
+                  <a:schemeClr val="tx1"/>
+                </a:solidFill>
+              </a:rPr>
+              <a:t>Limit access of shared memory ( / resource) to only one task at a time</a:t>
+            </a:r>
+          </a:p>
+        </p:txBody>
+      </p:sp>
+      <p:sp>
+        <p:nvSpPr>
+          <p:cNvPr id="12" name="Content Placeholder 2">
+            <a:extLst>
+              <a:ext uri="{FF2B5EF4-FFF2-40B4-BE49-F238E27FC236}">
+                <a16:creationId xmlns:a16="http://schemas.microsoft.com/office/drawing/2014/main" id="{24E55D7D-7FF2-AAF0-C569-7C950BFCEFBC}"/>
+              </a:ext>
+            </a:extLst>
+          </p:cNvPr>
+          <p:cNvSpPr txBox="1">
+            <a:spLocks/>
+          </p:cNvSpPr>
+          <p:nvPr/>
+        </p:nvSpPr>
+        <p:spPr bwMode="auto">
+          <a:xfrm>
+            <a:off x="4034413" y="3962400"/>
+            <a:ext cx="3657600" cy="1816991"/>
+          </a:xfrm>
+          <a:prstGeom prst="rect">
+            <a:avLst/>
+          </a:prstGeom>
+          <a:noFill/>
+          <a:ln>
+            <a:noFill/>
+          </a:ln>
+          <a:extLst>
+            <a:ext uri="{909E8E84-426E-40DD-AFC4-6F175D3DCCD1}">
+              <a14:hiddenFill xmlns:a14="http://schemas.microsoft.com/office/drawing/2010/main">
+                <a:solidFill>
+                  <a:srgbClr val="FFFFFF"/>
+                </a:solidFill>
+              </a14:hiddenFill>
+            </a:ext>
+            <a:ext uri="{91240B29-F687-4F45-9708-019B960494DF}">
+              <a14:hiddenLine xmlns:a14="http://schemas.microsoft.com/office/drawing/2010/main" w="9525">
+                <a:solidFill>
+                  <a:srgbClr val="000000"/>
+                </a:solidFill>
+                <a:miter lim="800000"/>
+                <a:headEnd/>
+                <a:tailEnd/>
+              </a14:hiddenLine>
+            </a:ext>
+          </a:extLst>
+        </p:spPr>
+        <p:txBody>
+          <a:bodyPr vert="horz" wrap="square" lIns="91440" tIns="45720" rIns="91440" bIns="45720" numCol="1" anchor="t" anchorCtr="0" compatLnSpc="1">
+            <a:prstTxWarp prst="textNoShape">
+              <a:avLst/>
+            </a:prstTxWarp>
+          </a:bodyPr>
+          <a:lstStyle>
+            <a:lvl1pPr marL="342900" indent="-342900" algn="l" rtl="0" eaLnBrk="0" fontAlgn="base" hangingPunct="0">
+              <a:spcBef>
+                <a:spcPct val="20000"/>
+              </a:spcBef>
+              <a:spcAft>
+                <a:spcPct val="0"/>
+              </a:spcAft>
+              <a:buFont typeface="Arial" panose="020B0604020202020204" pitchFamily="34" charset="0"/>
+              <a:buChar char="•"/>
+              <a:defRPr sz="3200" kern="1200">
+                <a:solidFill>
+                  <a:schemeClr val="tx1">
+                    <a:lumMod val="50000"/>
+                    <a:lumOff val="50000"/>
+                  </a:schemeClr>
+                </a:solidFill>
+                <a:latin typeface="+mn-lt"/>
+                <a:ea typeface="+mn-ea"/>
+                <a:cs typeface="+mn-cs"/>
+              </a:defRPr>
+            </a:lvl1pPr>
+            <a:lvl2pPr marL="742950" indent="-285750" algn="l" rtl="0" eaLnBrk="0" fontAlgn="base" hangingPunct="0">
+              <a:spcBef>
+                <a:spcPct val="20000"/>
+              </a:spcBef>
+              <a:spcAft>
+                <a:spcPct val="0"/>
+              </a:spcAft>
+              <a:buFont typeface="Arial" panose="020B0604020202020204" pitchFamily="34" charset="0"/>
+              <a:buChar char="–"/>
+              <a:defRPr sz="2800" kern="1200">
+                <a:solidFill>
+                  <a:schemeClr val="tx1">
+                    <a:lumMod val="50000"/>
+                    <a:lumOff val="50000"/>
+                  </a:schemeClr>
+                </a:solidFill>
+                <a:latin typeface="+mn-lt"/>
+                <a:ea typeface="+mn-ea"/>
+                <a:cs typeface="+mn-cs"/>
+              </a:defRPr>
+            </a:lvl2pPr>
+            <a:lvl3pPr marL="1143000" indent="-228600" algn="l" rtl="0" eaLnBrk="0" fontAlgn="base" hangingPunct="0">
+              <a:spcBef>
+                <a:spcPct val="20000"/>
+              </a:spcBef>
+              <a:spcAft>
+                <a:spcPct val="0"/>
+              </a:spcAft>
+              <a:buFont typeface="Arial" panose="020B0604020202020204" pitchFamily="34" charset="0"/>
+              <a:buChar char="•"/>
+              <a:defRPr sz="2400" kern="1200">
+                <a:solidFill>
+                  <a:schemeClr val="tx1">
+                    <a:lumMod val="50000"/>
+                    <a:lumOff val="50000"/>
+                  </a:schemeClr>
+                </a:solidFill>
+                <a:latin typeface="+mn-lt"/>
+                <a:ea typeface="+mn-ea"/>
+                <a:cs typeface="+mn-cs"/>
+              </a:defRPr>
+            </a:lvl3pPr>
+            <a:lvl4pPr marL="1600200" indent="-228600" algn="l" rtl="0" eaLnBrk="0" fontAlgn="base" hangingPunct="0">
+              <a:spcBef>
+                <a:spcPct val="20000"/>
+              </a:spcBef>
+              <a:spcAft>
+                <a:spcPct val="0"/>
+              </a:spcAft>
+              <a:buFont typeface="Arial" panose="020B0604020202020204" pitchFamily="34" charset="0"/>
+              <a:buChar char="–"/>
+              <a:defRPr sz="2000" kern="1200">
+                <a:solidFill>
+                  <a:schemeClr val="tx1">
+                    <a:lumMod val="50000"/>
+                    <a:lumOff val="50000"/>
+                  </a:schemeClr>
+                </a:solidFill>
+                <a:latin typeface="+mn-lt"/>
+                <a:ea typeface="+mn-ea"/>
+                <a:cs typeface="+mn-cs"/>
+              </a:defRPr>
+            </a:lvl4pPr>
+            <a:lvl5pPr marL="2057400" indent="-228600" algn="l" rtl="0" eaLnBrk="0" fontAlgn="base" hangingPunct="0">
+              <a:spcBef>
+                <a:spcPct val="20000"/>
+              </a:spcBef>
+              <a:spcAft>
+                <a:spcPct val="0"/>
+              </a:spcAft>
+              <a:buFont typeface="Arial" panose="020B0604020202020204" pitchFamily="34" charset="0"/>
+              <a:buChar char="»"/>
+              <a:defRPr sz="2000" kern="1200">
+                <a:solidFill>
+                  <a:schemeClr val="tx1">
+                    <a:lumMod val="50000"/>
+                    <a:lumOff val="50000"/>
+                  </a:schemeClr>
+                </a:solidFill>
+                <a:latin typeface="+mn-lt"/>
+                <a:ea typeface="+mn-ea"/>
+                <a:cs typeface="+mn-cs"/>
+              </a:defRPr>
+            </a:lvl5pPr>
+            <a:lvl6pPr marL="2514600" indent="-228600" algn="l" defTabSz="914400" rtl="0" eaLnBrk="1" latinLnBrk="0" hangingPunct="1">
+              <a:spcBef>
+                <a:spcPct val="20000"/>
+              </a:spcBef>
+              <a:buFont typeface="Arial" pitchFamily="34" charset="0"/>
+              <a:buChar char="•"/>
+              <a:defRPr sz="2000" kern="1200">
+                <a:solidFill>
+                  <a:schemeClr val="tx1"/>
+                </a:solidFill>
+                <a:latin typeface="+mn-lt"/>
+                <a:ea typeface="+mn-ea"/>
+                <a:cs typeface="+mn-cs"/>
+              </a:defRPr>
+            </a:lvl6pPr>
+            <a:lvl7pPr marL="2971800" indent="-228600" algn="l" defTabSz="914400" rtl="0" eaLnBrk="1" latinLnBrk="0" hangingPunct="1">
+              <a:spcBef>
+                <a:spcPct val="20000"/>
+              </a:spcBef>
+              <a:buFont typeface="Arial" pitchFamily="34" charset="0"/>
+              <a:buChar char="•"/>
+              <a:defRPr sz="2000" kern="1200">
+                <a:solidFill>
+                  <a:schemeClr val="tx1"/>
+                </a:solidFill>
+                <a:latin typeface="+mn-lt"/>
+                <a:ea typeface="+mn-ea"/>
+                <a:cs typeface="+mn-cs"/>
+              </a:defRPr>
+            </a:lvl7pPr>
+            <a:lvl8pPr marL="3429000" indent="-228600" algn="l" defTabSz="914400" rtl="0" eaLnBrk="1" latinLnBrk="0" hangingPunct="1">
+              <a:spcBef>
+                <a:spcPct val="20000"/>
+              </a:spcBef>
+              <a:buFont typeface="Arial" pitchFamily="34" charset="0"/>
+              <a:buChar char="•"/>
+              <a:defRPr sz="2000" kern="1200">
+                <a:solidFill>
+                  <a:schemeClr val="tx1"/>
+                </a:solidFill>
+                <a:latin typeface="+mn-lt"/>
+                <a:ea typeface="+mn-ea"/>
+                <a:cs typeface="+mn-cs"/>
+              </a:defRPr>
+            </a:lvl8pPr>
+            <a:lvl9pPr marL="3886200" indent="-228600" algn="l" defTabSz="914400" rtl="0" eaLnBrk="1" latinLnBrk="0" hangingPunct="1">
+              <a:spcBef>
+                <a:spcPct val="20000"/>
+              </a:spcBef>
+              <a:buFont typeface="Arial" pitchFamily="34" charset="0"/>
+              <a:buChar char="•"/>
+              <a:defRPr sz="2000" kern="1200">
+                <a:solidFill>
+                  <a:schemeClr val="tx1"/>
+                </a:solidFill>
+                <a:latin typeface="+mn-lt"/>
+                <a:ea typeface="+mn-ea"/>
+                <a:cs typeface="+mn-cs"/>
+              </a:defRPr>
+            </a:lvl9pPr>
+          </a:lstStyle>
+          <a:p>
+            <a:pPr marL="0" indent="0">
+              <a:buFont typeface="Arial" panose="020B0604020202020204" pitchFamily="34" charset="0"/>
+              <a:buNone/>
+            </a:pPr>
+            <a:r>
+              <a:rPr lang="en-US" dirty="0"/>
+              <a:t>Mutex</a:t>
+            </a:r>
+          </a:p>
+          <a:p>
+            <a:pPr marL="0" indent="0">
+              <a:buFont typeface="Arial" panose="020B0604020202020204" pitchFamily="34" charset="0"/>
+              <a:buNone/>
+            </a:pPr>
+            <a:r>
+              <a:rPr lang="en-IN" sz="1800" dirty="0">
+                <a:solidFill>
+                  <a:schemeClr val="tx1"/>
+                </a:solidFill>
+              </a:rPr>
+              <a:t>Binary lock to ensure resource is not used by other processes</a:t>
+            </a:r>
+          </a:p>
+        </p:txBody>
+      </p:sp>
+    </p:spTree>
+    <p:extLst>
+      <p:ext uri="{BB962C8B-B14F-4D97-AF65-F5344CB8AC3E}">
+        <p14:creationId xmlns:p14="http://schemas.microsoft.com/office/powerpoint/2010/main" val="489490429"/>
+      </p:ext>
+    </p:extLst>
+  </p:cSld>
+  <p:clrMapOvr>
+    <a:masterClrMapping/>
+  </p:clrMapOvr>
+  <p:timing>
+    <p:tnLst>
+      <p:par>
+        <p:cTn id="1" dur="indefinite" restart="never" nodeType="tmRoot">
+          <p:childTnLst>
+            <p:seq concurrent="1" nextAc="seek">
+              <p:cTn id="2" dur="indefinite" nodeType="mainSeq">
+                <p:childTnLst>
+                  <p:par>
+                    <p:cTn id="3" fill="hold">
+                      <p:stCondLst>
+                        <p:cond delay="indefinite"/>
+                      </p:stCondLst>
+                      <p:childTnLst>
+                        <p:par>
+                          <p:cTn id="4" fill="hold">
+                            <p:stCondLst>
+                              <p:cond delay="0"/>
+                            </p:stCondLst>
+                            <p:childTnLst>
+                              <p:par>
+                                <p:cTn id="5" presetID="1" presetClass="entr" presetSubtype="0" fill="hold" grpId="0" nodeType="clickEffect">
+                                  <p:stCondLst>
+                                    <p:cond delay="0"/>
+                                  </p:stCondLst>
+                                  <p:childTnLst>
+                                    <p:set>
+                                      <p:cBhvr>
+                                        <p:cTn id="6" dur="1" fill="hold">
+                                          <p:stCondLst>
+                                            <p:cond delay="0"/>
+                                          </p:stCondLst>
+                                        </p:cTn>
+                                        <p:tgtEl>
+                                          <p:spTgt spid="8">
+                                            <p:txEl>
+                                              <p:pRg st="0" end="0"/>
+                                            </p:txEl>
+                                          </p:spTgt>
+                                        </p:tgtEl>
+                                        <p:attrNameLst>
+                                          <p:attrName>style.visibility</p:attrName>
+                                        </p:attrNameLst>
+                                      </p:cBhvr>
+                                      <p:to>
+                                        <p:strVal val="visible"/>
+                                      </p:to>
+                                    </p:set>
+                                  </p:childTnLst>
+                                </p:cTn>
+                              </p:par>
+                            </p:childTnLst>
+                          </p:cTn>
+                        </p:par>
+                      </p:childTnLst>
+                    </p:cTn>
+                  </p:par>
+                  <p:par>
+                    <p:cTn id="7" fill="hold">
+                      <p:stCondLst>
+                        <p:cond delay="indefinite"/>
+                      </p:stCondLst>
+                      <p:childTnLst>
+                        <p:par>
+                          <p:cTn id="8" fill="hold">
+                            <p:stCondLst>
+                              <p:cond delay="0"/>
+                            </p:stCondLst>
+                            <p:childTnLst>
+                              <p:par>
+                                <p:cTn id="9" presetID="1" presetClass="entr" presetSubtype="0" fill="hold" grpId="0" nodeType="clickEffect">
+                                  <p:stCondLst>
+                                    <p:cond delay="0"/>
+                                  </p:stCondLst>
+                                  <p:childTnLst>
+                                    <p:set>
+                                      <p:cBhvr>
+                                        <p:cTn id="10" dur="1" fill="hold">
+                                          <p:stCondLst>
+                                            <p:cond delay="0"/>
+                                          </p:stCondLst>
+                                        </p:cTn>
+                                        <p:tgtEl>
+                                          <p:spTgt spid="11">
+                                            <p:txEl>
+                                              <p:pRg st="0" end="0"/>
+                                            </p:txEl>
+                                          </p:spTgt>
+                                        </p:tgtEl>
+                                        <p:attrNameLst>
+                                          <p:attrName>style.visibility</p:attrName>
+                                        </p:attrNameLst>
+                                      </p:cBhvr>
+                                      <p:to>
+                                        <p:strVal val="visible"/>
+                                      </p:to>
+                                    </p:set>
+                                  </p:childTnLst>
+                                </p:cTn>
+                              </p:par>
+                            </p:childTnLst>
+                          </p:cTn>
+                        </p:par>
+                      </p:childTnLst>
+                    </p:cTn>
+                  </p:par>
+                  <p:par>
+                    <p:cTn id="11" fill="hold">
+                      <p:stCondLst>
+                        <p:cond delay="indefinite"/>
+                      </p:stCondLst>
+                      <p:childTnLst>
+                        <p:par>
+                          <p:cTn id="12" fill="hold">
+                            <p:stCondLst>
+                              <p:cond delay="0"/>
+                            </p:stCondLst>
+                            <p:childTnLst>
+                              <p:par>
+                                <p:cTn id="13" presetID="1" presetClass="entr" presetSubtype="0" fill="hold" grpId="0" nodeType="clickEffect">
+                                  <p:stCondLst>
+                                    <p:cond delay="0"/>
+                                  </p:stCondLst>
+                                  <p:childTnLst>
+                                    <p:set>
+                                      <p:cBhvr>
+                                        <p:cTn id="14" dur="1" fill="hold">
+                                          <p:stCondLst>
+                                            <p:cond delay="0"/>
+                                          </p:stCondLst>
+                                        </p:cTn>
+                                        <p:tgtEl>
+                                          <p:spTgt spid="11">
+                                            <p:txEl>
+                                              <p:pRg st="1" end="1"/>
+                                            </p:txEl>
+                                          </p:spTgt>
+                                        </p:tgtEl>
+                                        <p:attrNameLst>
+                                          <p:attrName>style.visibility</p:attrName>
+                                        </p:attrNameLst>
+                                      </p:cBhvr>
+                                      <p:to>
+                                        <p:strVal val="visible"/>
+                                      </p:to>
+                                    </p:set>
+                                  </p:childTnLst>
+                                </p:cTn>
+                              </p:par>
+                            </p:childTnLst>
+                          </p:cTn>
+                        </p:par>
+                      </p:childTnLst>
+                    </p:cTn>
+                  </p:par>
+                  <p:par>
+                    <p:cTn id="15" fill="hold">
+                      <p:stCondLst>
+                        <p:cond delay="indefinite"/>
+                      </p:stCondLst>
+                      <p:childTnLst>
+                        <p:par>
+                          <p:cTn id="16" fill="hold">
+                            <p:stCondLst>
+                              <p:cond delay="0"/>
+                            </p:stCondLst>
+                            <p:childTnLst>
+                              <p:par>
+                                <p:cTn id="17" presetID="1" presetClass="entr" presetSubtype="0" fill="hold" nodeType="clickEffect">
+                                  <p:stCondLst>
+                                    <p:cond delay="0"/>
+                                  </p:stCondLst>
+                                  <p:childTnLst>
+                                    <p:set>
+                                      <p:cBhvr>
+                                        <p:cTn id="18" dur="1" fill="hold">
+                                          <p:stCondLst>
+                                            <p:cond delay="0"/>
+                                          </p:stCondLst>
+                                        </p:cTn>
+                                        <p:tgtEl>
+                                          <p:spTgt spid="10"/>
+                                        </p:tgtEl>
+                                        <p:attrNameLst>
+                                          <p:attrName>style.visibility</p:attrName>
+                                        </p:attrNameLst>
+                                      </p:cBhvr>
+                                      <p:to>
+                                        <p:strVal val="visible"/>
+                                      </p:to>
+                                    </p:set>
+                                  </p:childTnLst>
+                                </p:cTn>
+                              </p:par>
+                            </p:childTnLst>
+                          </p:cTn>
+                        </p:par>
+                      </p:childTnLst>
+                    </p:cTn>
+                  </p:par>
+                  <p:par>
+                    <p:cTn id="19" fill="hold">
+                      <p:stCondLst>
+                        <p:cond delay="indefinite"/>
+                      </p:stCondLst>
+                      <p:childTnLst>
+                        <p:par>
+                          <p:cTn id="20" fill="hold">
+                            <p:stCondLst>
+                              <p:cond delay="0"/>
+                            </p:stCondLst>
+                            <p:childTnLst>
+                              <p:par>
+                                <p:cTn id="21" presetID="1" presetClass="entr" presetSubtype="0" fill="hold" grpId="0" nodeType="clickEffect">
+                                  <p:stCondLst>
+                                    <p:cond delay="0"/>
+                                  </p:stCondLst>
+                                  <p:childTnLst>
+                                    <p:set>
+                                      <p:cBhvr>
+                                        <p:cTn id="22" dur="1" fill="hold">
+                                          <p:stCondLst>
+                                            <p:cond delay="0"/>
+                                          </p:stCondLst>
+                                        </p:cTn>
+                                        <p:tgtEl>
+                                          <p:spTgt spid="12">
+                                            <p:txEl>
+                                              <p:pRg st="0" end="0"/>
+                                            </p:txEl>
+                                          </p:spTgt>
+                                        </p:tgtEl>
+                                        <p:attrNameLst>
+                                          <p:attrName>style.visibility</p:attrName>
+                                        </p:attrNameLst>
+                                      </p:cBhvr>
+                                      <p:to>
+                                        <p:strVal val="visible"/>
+                                      </p:to>
+                                    </p:set>
+                                  </p:childTnLst>
+                                </p:cTn>
+                              </p:par>
+                            </p:childTnLst>
+                          </p:cTn>
+                        </p:par>
+                      </p:childTnLst>
+                    </p:cTn>
+                  </p:par>
+                  <p:par>
+                    <p:cTn id="23" fill="hold">
+                      <p:stCondLst>
+                        <p:cond delay="indefinite"/>
+                      </p:stCondLst>
+                      <p:childTnLst>
+                        <p:par>
+                          <p:cTn id="24" fill="hold">
+                            <p:stCondLst>
+                              <p:cond delay="0"/>
+                            </p:stCondLst>
+                            <p:childTnLst>
+                              <p:par>
+                                <p:cTn id="25" presetID="1" presetClass="entr" presetSubtype="0" fill="hold" grpId="0" nodeType="clickEffect">
+                                  <p:stCondLst>
+                                    <p:cond delay="0"/>
+                                  </p:stCondLst>
+                                  <p:childTnLst>
+                                    <p:set>
+                                      <p:cBhvr>
+                                        <p:cTn id="26" dur="1" fill="hold">
+                                          <p:stCondLst>
+                                            <p:cond delay="0"/>
+                                          </p:stCondLst>
+                                        </p:cTn>
+                                        <p:tgtEl>
+                                          <p:spTgt spid="12">
+                                            <p:txEl>
+                                              <p:pRg st="1" end="1"/>
+                                            </p:txEl>
+                                          </p:spTgt>
+                                        </p:tgtEl>
+                                        <p:attrNameLst>
+                                          <p:attrName>style.visibility</p:attrName>
+                                        </p:attrNameLst>
+                                      </p:cBhvr>
+                                      <p:to>
+                                        <p:strVal val="visible"/>
+                                      </p:to>
+                                    </p:set>
+                                  </p:childTnLst>
+                                </p:cTn>
+                              </p:par>
+                            </p:childTnLst>
+                          </p:cTn>
+                        </p:par>
+                      </p:childTnLst>
+                    </p:cTn>
+                  </p:par>
+                </p:childTnLst>
+              </p:cTn>
+              <p:prevCondLst>
+                <p:cond evt="onPrev" delay="0">
+                  <p:tgtEl>
+                    <p:sldTgt/>
+                  </p:tgtEl>
+                </p:cond>
+              </p:prevCondLst>
+              <p:nextCondLst>
+                <p:cond evt="onNext" delay="0">
+                  <p:tgtEl>
+                    <p:sldTgt/>
+                  </p:tgtEl>
+                </p:cond>
+              </p:nextCondLst>
+            </p:seq>
+          </p:childTnLst>
+        </p:cTn>
+      </p:par>
+    </p:tnLst>
+    <p:bldLst>
+      <p:bldP spid="8" grpId="0" build="p"/>
+      <p:bldP spid="11" grpId="0" build="p"/>
+      <p:bldP spid="12" grpId="0" build="p"/>
+    </p:bldLst>
+  </p:timing>
+</p:sld>
+</file>
+
+<file path=ppt/slides/slide8.xml><?xml version="1.0" encoding="utf-8"?>
+<p:sld xmlns:a="http://schemas.openxmlformats.org/drawingml/2006/main" xmlns:r="http://schemas.openxmlformats.org/officeDocument/2006/relationships" xmlns:p="http://schemas.openxmlformats.org/presentationml/2006/main">
+  <p:cSld>
+    <p:spTree>
+      <p:nvGrpSpPr>
+        <p:cNvPr id="1" name=""/>
+        <p:cNvGrpSpPr/>
+        <p:nvPr/>
+      </p:nvGrpSpPr>
+      <p:grpSpPr>
+        <a:xfrm>
+          <a:off x="0" y="0"/>
+          <a:ext cx="0" cy="0"/>
+          <a:chOff x="0" y="0"/>
+          <a:chExt cx="0" cy="0"/>
+        </a:xfrm>
+      </p:grpSpPr>
+      <p:sp>
+        <p:nvSpPr>
+          <p:cNvPr id="2" name="Title 1">
+            <a:extLst>
+              <a:ext uri="{FF2B5EF4-FFF2-40B4-BE49-F238E27FC236}">
+                <a16:creationId xmlns:a16="http://schemas.microsoft.com/office/drawing/2014/main" id="{3F07A00F-CDCD-E55A-27D2-7EA862464754}"/>
+              </a:ext>
+            </a:extLst>
+          </p:cNvPr>
+          <p:cNvSpPr>
+            <a:spLocks noGrp="1"/>
+          </p:cNvSpPr>
+          <p:nvPr>
+            <p:ph type="title"/>
+          </p:nvPr>
+        </p:nvSpPr>
+        <p:spPr/>
+        <p:txBody>
+          <a:bodyPr/>
+          <a:lstStyle/>
+          <a:p>
+            <a:r>
+              <a:rPr lang="en-US" dirty="0"/>
+              <a:t>Mutex example</a:t>
+            </a:r>
+            <a:endParaRPr lang="en-IN" dirty="0"/>
+          </a:p>
+        </p:txBody>
+      </p:sp>
+      <p:sp>
+        <p:nvSpPr>
+          <p:cNvPr id="4" name="Date Placeholder 3">
+            <a:extLst>
+              <a:ext uri="{FF2B5EF4-FFF2-40B4-BE49-F238E27FC236}">
+                <a16:creationId xmlns:a16="http://schemas.microsoft.com/office/drawing/2014/main" id="{D746A41E-3674-A3B8-63DD-D295F95FA783}"/>
+              </a:ext>
+            </a:extLst>
+          </p:cNvPr>
+          <p:cNvSpPr>
+            <a:spLocks noGrp="1"/>
+          </p:cNvSpPr>
+          <p:nvPr>
+            <p:ph type="dt" sz="half" idx="10"/>
+          </p:nvPr>
+        </p:nvSpPr>
+        <p:spPr/>
+        <p:txBody>
+          <a:bodyPr/>
+          <a:lstStyle/>
+          <a:p>
+            <a:pPr>
+              <a:defRPr/>
+            </a:pPr>
+            <a:r>
+              <a:rPr lang="en-US"/>
+              <a:t>21/12/2020</a:t>
+            </a:r>
+          </a:p>
+        </p:txBody>
+      </p:sp>
+      <p:sp>
+        <p:nvSpPr>
+          <p:cNvPr id="5" name="Slide Number Placeholder 4">
+            <a:extLst>
+              <a:ext uri="{FF2B5EF4-FFF2-40B4-BE49-F238E27FC236}">
+                <a16:creationId xmlns:a16="http://schemas.microsoft.com/office/drawing/2014/main" id="{E85FDD69-D2CF-45CE-A6DA-1D8BBC36D1D3}"/>
+              </a:ext>
+            </a:extLst>
+          </p:cNvPr>
+          <p:cNvSpPr>
+            <a:spLocks noGrp="1"/>
+          </p:cNvSpPr>
+          <p:nvPr>
+            <p:ph type="sldNum" sz="quarter" idx="12"/>
+          </p:nvPr>
+        </p:nvSpPr>
+        <p:spPr/>
+        <p:txBody>
+          <a:bodyPr/>
+          <a:lstStyle/>
+          <a:p>
+            <a:pPr>
+              <a:defRPr/>
+            </a:pPr>
+            <a:fld id="{CA887A73-1AE0-46F8-856A-18EA1CF30A1B}" type="slidenum">
+              <a:rPr lang="en-US" altLang="en-US" smtClean="0"/>
+              <a:pPr>
+                <a:defRPr/>
+              </a:pPr>
+              <a:t>8</a:t>
+            </a:fld>
+            <a:endParaRPr lang="en-US" altLang="en-US"/>
+          </a:p>
+        </p:txBody>
+      </p:sp>
+      <p:pic>
+        <p:nvPicPr>
+          <p:cNvPr id="7" name="Picture 6">
+            <a:extLst>
+              <a:ext uri="{FF2B5EF4-FFF2-40B4-BE49-F238E27FC236}">
+                <a16:creationId xmlns:a16="http://schemas.microsoft.com/office/drawing/2014/main" id="{57E908E7-93DB-289A-9133-C553A02C7E56}"/>
+              </a:ext>
+            </a:extLst>
+          </p:cNvPr>
+          <p:cNvPicPr>
+            <a:picLocks noChangeAspect="1"/>
+          </p:cNvPicPr>
+          <p:nvPr/>
+        </p:nvPicPr>
+        <p:blipFill>
+          <a:blip r:embed="rId2"/>
+          <a:stretch>
+            <a:fillRect/>
+          </a:stretch>
+        </p:blipFill>
+        <p:spPr>
+          <a:xfrm>
+            <a:off x="157424" y="1524000"/>
+            <a:ext cx="2709798" cy="1676400"/>
+          </a:xfrm>
+          <a:prstGeom prst="rect">
+            <a:avLst/>
+          </a:prstGeom>
+        </p:spPr>
+      </p:pic>
+      <p:sp>
+        <p:nvSpPr>
+          <p:cNvPr id="8" name="Content Placeholder 2">
+            <a:extLst>
+              <a:ext uri="{FF2B5EF4-FFF2-40B4-BE49-F238E27FC236}">
+                <a16:creationId xmlns:a16="http://schemas.microsoft.com/office/drawing/2014/main" id="{79291915-DC25-CCC2-4EA8-3A278E089751}"/>
+              </a:ext>
+            </a:extLst>
+          </p:cNvPr>
+          <p:cNvSpPr>
+            <a:spLocks noGrp="1"/>
+          </p:cNvSpPr>
+          <p:nvPr>
+            <p:ph idx="1"/>
+          </p:nvPr>
+        </p:nvSpPr>
+        <p:spPr>
+          <a:xfrm>
+            <a:off x="152400" y="3284539"/>
+            <a:ext cx="2709798" cy="381000"/>
+          </a:xfrm>
+        </p:spPr>
+        <p:txBody>
+          <a:bodyPr/>
+          <a:lstStyle/>
+          <a:p>
+            <a:pPr marL="0" indent="0">
+              <a:buNone/>
+            </a:pPr>
+            <a:r>
+              <a:rPr lang="en-US" sz="2000" dirty="0">
+                <a:solidFill>
+                  <a:schemeClr val="tx1"/>
+                </a:solidFill>
+              </a:rPr>
+              <a:t>Shared resource</a:t>
+            </a:r>
+            <a:endParaRPr lang="en-IN" sz="2000" dirty="0">
+              <a:solidFill>
+                <a:schemeClr val="tx1"/>
+              </a:solidFill>
+            </a:endParaRPr>
+          </a:p>
+        </p:txBody>
+      </p:sp>
+      <p:pic>
+        <p:nvPicPr>
+          <p:cNvPr id="10" name="Picture 9">
+            <a:extLst>
+              <a:ext uri="{FF2B5EF4-FFF2-40B4-BE49-F238E27FC236}">
+                <a16:creationId xmlns:a16="http://schemas.microsoft.com/office/drawing/2014/main" id="{A8F820BF-B8A3-ADC3-AC58-38D204C5D669}"/>
+              </a:ext>
+            </a:extLst>
+          </p:cNvPr>
+          <p:cNvPicPr>
+            <a:picLocks noChangeAspect="1"/>
+          </p:cNvPicPr>
+          <p:nvPr/>
+        </p:nvPicPr>
+        <p:blipFill>
+          <a:blip r:embed="rId3"/>
+          <a:stretch>
+            <a:fillRect/>
+          </a:stretch>
+        </p:blipFill>
+        <p:spPr>
+          <a:xfrm>
+            <a:off x="152399" y="3833698"/>
+            <a:ext cx="3657601" cy="1942390"/>
+          </a:xfrm>
+          <a:prstGeom prst="rect">
+            <a:avLst/>
+          </a:prstGeom>
+        </p:spPr>
+      </p:pic>
+      <p:sp>
+        <p:nvSpPr>
+          <p:cNvPr id="11" name="Content Placeholder 2">
+            <a:extLst>
+              <a:ext uri="{FF2B5EF4-FFF2-40B4-BE49-F238E27FC236}">
+                <a16:creationId xmlns:a16="http://schemas.microsoft.com/office/drawing/2014/main" id="{DB982985-4EA5-ACFD-DA93-A4616C4D5C82}"/>
+              </a:ext>
+            </a:extLst>
+          </p:cNvPr>
+          <p:cNvSpPr txBox="1">
+            <a:spLocks/>
+          </p:cNvSpPr>
+          <p:nvPr/>
+        </p:nvSpPr>
+        <p:spPr bwMode="auto">
+          <a:xfrm>
+            <a:off x="152399" y="5863014"/>
+            <a:ext cx="3829545" cy="381000"/>
+          </a:xfrm>
+          <a:prstGeom prst="rect">
+            <a:avLst/>
+          </a:prstGeom>
+          <a:noFill/>
+          <a:ln>
+            <a:noFill/>
+          </a:ln>
+          <a:extLst>
+            <a:ext uri="{909E8E84-426E-40DD-AFC4-6F175D3DCCD1}">
+              <a14:hiddenFill xmlns:a14="http://schemas.microsoft.com/office/drawing/2010/main">
+                <a:solidFill>
+                  <a:srgbClr val="FFFFFF"/>
+                </a:solidFill>
+              </a14:hiddenFill>
+            </a:ext>
+            <a:ext uri="{91240B29-F687-4F45-9708-019B960494DF}">
+              <a14:hiddenLine xmlns:a14="http://schemas.microsoft.com/office/drawing/2010/main" w="9525">
+                <a:solidFill>
+                  <a:srgbClr val="000000"/>
+                </a:solidFill>
+                <a:miter lim="800000"/>
+                <a:headEnd/>
+                <a:tailEnd/>
+              </a14:hiddenLine>
+            </a:ext>
+          </a:extLst>
+        </p:spPr>
+        <p:txBody>
+          <a:bodyPr vert="horz" wrap="square" lIns="91440" tIns="45720" rIns="91440" bIns="45720" numCol="1" anchor="t" anchorCtr="0" compatLnSpc="1">
+            <a:prstTxWarp prst="textNoShape">
+              <a:avLst/>
+            </a:prstTxWarp>
+          </a:bodyPr>
+          <a:lstStyle>
+            <a:lvl1pPr marL="342900" indent="-342900" algn="l" rtl="0" eaLnBrk="0" fontAlgn="base" hangingPunct="0">
+              <a:spcBef>
+                <a:spcPct val="20000"/>
+              </a:spcBef>
+              <a:spcAft>
+                <a:spcPct val="0"/>
+              </a:spcAft>
+              <a:buFont typeface="Arial" panose="020B0604020202020204" pitchFamily="34" charset="0"/>
+              <a:buChar char="•"/>
+              <a:defRPr sz="3200" kern="1200">
+                <a:solidFill>
+                  <a:schemeClr val="tx1">
+                    <a:lumMod val="50000"/>
+                    <a:lumOff val="50000"/>
+                  </a:schemeClr>
+                </a:solidFill>
+                <a:latin typeface="+mn-lt"/>
+                <a:ea typeface="+mn-ea"/>
+                <a:cs typeface="+mn-cs"/>
+              </a:defRPr>
+            </a:lvl1pPr>
+            <a:lvl2pPr marL="742950" indent="-285750" algn="l" rtl="0" eaLnBrk="0" fontAlgn="base" hangingPunct="0">
+              <a:spcBef>
+                <a:spcPct val="20000"/>
+              </a:spcBef>
+              <a:spcAft>
+                <a:spcPct val="0"/>
+              </a:spcAft>
+              <a:buFont typeface="Arial" panose="020B0604020202020204" pitchFamily="34" charset="0"/>
+              <a:buChar char="–"/>
+              <a:defRPr sz="2800" kern="1200">
+                <a:solidFill>
+                  <a:schemeClr val="tx1">
+                    <a:lumMod val="50000"/>
+                    <a:lumOff val="50000"/>
+                  </a:schemeClr>
+                </a:solidFill>
+                <a:latin typeface="+mn-lt"/>
+                <a:ea typeface="+mn-ea"/>
+                <a:cs typeface="+mn-cs"/>
+              </a:defRPr>
+            </a:lvl2pPr>
+            <a:lvl3pPr marL="1143000" indent="-228600" algn="l" rtl="0" eaLnBrk="0" fontAlgn="base" hangingPunct="0">
+              <a:spcBef>
+                <a:spcPct val="20000"/>
+              </a:spcBef>
+              <a:spcAft>
+                <a:spcPct val="0"/>
+              </a:spcAft>
+              <a:buFont typeface="Arial" panose="020B0604020202020204" pitchFamily="34" charset="0"/>
+              <a:buChar char="•"/>
+              <a:defRPr sz="2400" kern="1200">
+                <a:solidFill>
+                  <a:schemeClr val="tx1">
+                    <a:lumMod val="50000"/>
+                    <a:lumOff val="50000"/>
+                  </a:schemeClr>
+                </a:solidFill>
+                <a:latin typeface="+mn-lt"/>
+                <a:ea typeface="+mn-ea"/>
+                <a:cs typeface="+mn-cs"/>
+              </a:defRPr>
+            </a:lvl3pPr>
+            <a:lvl4pPr marL="1600200" indent="-228600" algn="l" rtl="0" eaLnBrk="0" fontAlgn="base" hangingPunct="0">
+              <a:spcBef>
+                <a:spcPct val="20000"/>
+              </a:spcBef>
+              <a:spcAft>
+                <a:spcPct val="0"/>
+              </a:spcAft>
+              <a:buFont typeface="Arial" panose="020B0604020202020204" pitchFamily="34" charset="0"/>
+              <a:buChar char="–"/>
+              <a:defRPr sz="2000" kern="1200">
+                <a:solidFill>
+                  <a:schemeClr val="tx1">
+                    <a:lumMod val="50000"/>
+                    <a:lumOff val="50000"/>
+                  </a:schemeClr>
+                </a:solidFill>
+                <a:latin typeface="+mn-lt"/>
+                <a:ea typeface="+mn-ea"/>
+                <a:cs typeface="+mn-cs"/>
+              </a:defRPr>
+            </a:lvl4pPr>
+            <a:lvl5pPr marL="2057400" indent="-228600" algn="l" rtl="0" eaLnBrk="0" fontAlgn="base" hangingPunct="0">
+              <a:spcBef>
+                <a:spcPct val="20000"/>
+              </a:spcBef>
+              <a:spcAft>
+                <a:spcPct val="0"/>
+              </a:spcAft>
+              <a:buFont typeface="Arial" panose="020B0604020202020204" pitchFamily="34" charset="0"/>
+              <a:buChar char="»"/>
+              <a:defRPr sz="2000" kern="1200">
+                <a:solidFill>
+                  <a:schemeClr val="tx1">
+                    <a:lumMod val="50000"/>
+                    <a:lumOff val="50000"/>
+                  </a:schemeClr>
+                </a:solidFill>
+                <a:latin typeface="+mn-lt"/>
+                <a:ea typeface="+mn-ea"/>
+                <a:cs typeface="+mn-cs"/>
+              </a:defRPr>
+            </a:lvl5pPr>
+            <a:lvl6pPr marL="2514600" indent="-228600" algn="l" defTabSz="914400" rtl="0" eaLnBrk="1" latinLnBrk="0" hangingPunct="1">
+              <a:spcBef>
+                <a:spcPct val="20000"/>
+              </a:spcBef>
+              <a:buFont typeface="Arial" pitchFamily="34" charset="0"/>
+              <a:buChar char="•"/>
+              <a:defRPr sz="2000" kern="1200">
+                <a:solidFill>
+                  <a:schemeClr val="tx1"/>
+                </a:solidFill>
+                <a:latin typeface="+mn-lt"/>
+                <a:ea typeface="+mn-ea"/>
+                <a:cs typeface="+mn-cs"/>
+              </a:defRPr>
+            </a:lvl6pPr>
+            <a:lvl7pPr marL="2971800" indent="-228600" algn="l" defTabSz="914400" rtl="0" eaLnBrk="1" latinLnBrk="0" hangingPunct="1">
+              <a:spcBef>
+                <a:spcPct val="20000"/>
+              </a:spcBef>
+              <a:buFont typeface="Arial" pitchFamily="34" charset="0"/>
+              <a:buChar char="•"/>
+              <a:defRPr sz="2000" kern="1200">
+                <a:solidFill>
+                  <a:schemeClr val="tx1"/>
+                </a:solidFill>
+                <a:latin typeface="+mn-lt"/>
+                <a:ea typeface="+mn-ea"/>
+                <a:cs typeface="+mn-cs"/>
+              </a:defRPr>
+            </a:lvl7pPr>
+            <a:lvl8pPr marL="3429000" indent="-228600" algn="l" defTabSz="914400" rtl="0" eaLnBrk="1" latinLnBrk="0" hangingPunct="1">
+              <a:spcBef>
+                <a:spcPct val="20000"/>
+              </a:spcBef>
+              <a:buFont typeface="Arial" pitchFamily="34" charset="0"/>
+              <a:buChar char="•"/>
+              <a:defRPr sz="2000" kern="1200">
+                <a:solidFill>
+                  <a:schemeClr val="tx1"/>
+                </a:solidFill>
+                <a:latin typeface="+mn-lt"/>
+                <a:ea typeface="+mn-ea"/>
+                <a:cs typeface="+mn-cs"/>
+              </a:defRPr>
+            </a:lvl8pPr>
+            <a:lvl9pPr marL="3886200" indent="-228600" algn="l" defTabSz="914400" rtl="0" eaLnBrk="1" latinLnBrk="0" hangingPunct="1">
+              <a:spcBef>
+                <a:spcPct val="20000"/>
+              </a:spcBef>
+              <a:buFont typeface="Arial" pitchFamily="34" charset="0"/>
+              <a:buChar char="•"/>
+              <a:defRPr sz="2000" kern="1200">
+                <a:solidFill>
+                  <a:schemeClr val="tx1"/>
+                </a:solidFill>
+                <a:latin typeface="+mn-lt"/>
+                <a:ea typeface="+mn-ea"/>
+                <a:cs typeface="+mn-cs"/>
+              </a:defRPr>
+            </a:lvl9pPr>
+          </a:lstStyle>
+          <a:p>
+            <a:pPr marL="0" indent="0">
+              <a:buFont typeface="Arial" panose="020B0604020202020204" pitchFamily="34" charset="0"/>
+              <a:buNone/>
+            </a:pPr>
+            <a:r>
+              <a:rPr lang="en-US" sz="2000" dirty="0">
+                <a:solidFill>
+                  <a:schemeClr val="tx1"/>
+                </a:solidFill>
+              </a:rPr>
+              <a:t>Initialize the mutex for this resource</a:t>
+            </a:r>
+            <a:endParaRPr lang="en-IN" sz="2000" dirty="0">
+              <a:solidFill>
+                <a:schemeClr val="tx1"/>
+              </a:solidFill>
+            </a:endParaRPr>
+          </a:p>
+        </p:txBody>
+      </p:sp>
+      <p:pic>
+        <p:nvPicPr>
+          <p:cNvPr id="13" name="Picture 12">
+            <a:extLst>
+              <a:ext uri="{FF2B5EF4-FFF2-40B4-BE49-F238E27FC236}">
+                <a16:creationId xmlns:a16="http://schemas.microsoft.com/office/drawing/2014/main" id="{310236C9-F451-C56D-E843-03B2DB1F19A2}"/>
+              </a:ext>
+            </a:extLst>
+          </p:cNvPr>
+          <p:cNvPicPr>
+            <a:picLocks noChangeAspect="1"/>
+          </p:cNvPicPr>
+          <p:nvPr/>
+        </p:nvPicPr>
+        <p:blipFill>
+          <a:blip r:embed="rId4"/>
+          <a:stretch>
+            <a:fillRect/>
+          </a:stretch>
+        </p:blipFill>
+        <p:spPr>
+          <a:xfrm>
+            <a:off x="3949286" y="1524000"/>
+            <a:ext cx="4280313" cy="3750678"/>
+          </a:xfrm>
+          <a:prstGeom prst="rect">
+            <a:avLst/>
+          </a:prstGeom>
+        </p:spPr>
+      </p:pic>
+      <p:sp>
+        <p:nvSpPr>
+          <p:cNvPr id="14" name="Content Placeholder 2">
+            <a:extLst>
+              <a:ext uri="{FF2B5EF4-FFF2-40B4-BE49-F238E27FC236}">
+                <a16:creationId xmlns:a16="http://schemas.microsoft.com/office/drawing/2014/main" id="{A26443B6-44E8-F90E-76FD-812B324E742D}"/>
+              </a:ext>
+            </a:extLst>
+          </p:cNvPr>
+          <p:cNvSpPr txBox="1">
+            <a:spLocks/>
+          </p:cNvSpPr>
+          <p:nvPr/>
+        </p:nvSpPr>
+        <p:spPr bwMode="auto">
+          <a:xfrm>
+            <a:off x="3949286" y="5378346"/>
+            <a:ext cx="3829545" cy="381000"/>
+          </a:xfrm>
+          <a:prstGeom prst="rect">
+            <a:avLst/>
+          </a:prstGeom>
+          <a:noFill/>
+          <a:ln>
+            <a:noFill/>
+          </a:ln>
+          <a:extLst>
+            <a:ext uri="{909E8E84-426E-40DD-AFC4-6F175D3DCCD1}">
+              <a14:hiddenFill xmlns:a14="http://schemas.microsoft.com/office/drawing/2010/main">
+                <a:solidFill>
+                  <a:srgbClr val="FFFFFF"/>
+                </a:solidFill>
+              </a14:hiddenFill>
+            </a:ext>
+            <a:ext uri="{91240B29-F687-4F45-9708-019B960494DF}">
+              <a14:hiddenLine xmlns:a14="http://schemas.microsoft.com/office/drawing/2010/main" w="9525">
+                <a:solidFill>
+                  <a:srgbClr val="000000"/>
+                </a:solidFill>
+                <a:miter lim="800000"/>
+                <a:headEnd/>
+                <a:tailEnd/>
+              </a14:hiddenLine>
+            </a:ext>
+          </a:extLst>
+        </p:spPr>
+        <p:txBody>
+          <a:bodyPr vert="horz" wrap="square" lIns="91440" tIns="45720" rIns="91440" bIns="45720" numCol="1" anchor="t" anchorCtr="0" compatLnSpc="1">
+            <a:prstTxWarp prst="textNoShape">
+              <a:avLst/>
+            </a:prstTxWarp>
+          </a:bodyPr>
+          <a:lstStyle>
+            <a:lvl1pPr marL="342900" indent="-342900" algn="l" rtl="0" eaLnBrk="0" fontAlgn="base" hangingPunct="0">
+              <a:spcBef>
+                <a:spcPct val="20000"/>
+              </a:spcBef>
+              <a:spcAft>
+                <a:spcPct val="0"/>
+              </a:spcAft>
+              <a:buFont typeface="Arial" panose="020B0604020202020204" pitchFamily="34" charset="0"/>
+              <a:buChar char="•"/>
+              <a:defRPr sz="3200" kern="1200">
+                <a:solidFill>
+                  <a:schemeClr val="tx1">
+                    <a:lumMod val="50000"/>
+                    <a:lumOff val="50000"/>
+                  </a:schemeClr>
+                </a:solidFill>
+                <a:latin typeface="+mn-lt"/>
+                <a:ea typeface="+mn-ea"/>
+                <a:cs typeface="+mn-cs"/>
+              </a:defRPr>
+            </a:lvl1pPr>
+            <a:lvl2pPr marL="742950" indent="-285750" algn="l" rtl="0" eaLnBrk="0" fontAlgn="base" hangingPunct="0">
+              <a:spcBef>
+                <a:spcPct val="20000"/>
+              </a:spcBef>
+              <a:spcAft>
+                <a:spcPct val="0"/>
+              </a:spcAft>
+              <a:buFont typeface="Arial" panose="020B0604020202020204" pitchFamily="34" charset="0"/>
+              <a:buChar char="–"/>
+              <a:defRPr sz="2800" kern="1200">
+                <a:solidFill>
+                  <a:schemeClr val="tx1">
+                    <a:lumMod val="50000"/>
+                    <a:lumOff val="50000"/>
+                  </a:schemeClr>
+                </a:solidFill>
+                <a:latin typeface="+mn-lt"/>
+                <a:ea typeface="+mn-ea"/>
+                <a:cs typeface="+mn-cs"/>
+              </a:defRPr>
+            </a:lvl2pPr>
+            <a:lvl3pPr marL="1143000" indent="-228600" algn="l" rtl="0" eaLnBrk="0" fontAlgn="base" hangingPunct="0">
+              <a:spcBef>
+                <a:spcPct val="20000"/>
+              </a:spcBef>
+              <a:spcAft>
+                <a:spcPct val="0"/>
+              </a:spcAft>
+              <a:buFont typeface="Arial" panose="020B0604020202020204" pitchFamily="34" charset="0"/>
+              <a:buChar char="•"/>
+              <a:defRPr sz="2400" kern="1200">
+                <a:solidFill>
+                  <a:schemeClr val="tx1">
+                    <a:lumMod val="50000"/>
+                    <a:lumOff val="50000"/>
+                  </a:schemeClr>
+                </a:solidFill>
+                <a:latin typeface="+mn-lt"/>
+                <a:ea typeface="+mn-ea"/>
+                <a:cs typeface="+mn-cs"/>
+              </a:defRPr>
+            </a:lvl3pPr>
+            <a:lvl4pPr marL="1600200" indent="-228600" algn="l" rtl="0" eaLnBrk="0" fontAlgn="base" hangingPunct="0">
+              <a:spcBef>
+                <a:spcPct val="20000"/>
+              </a:spcBef>
+              <a:spcAft>
+                <a:spcPct val="0"/>
+              </a:spcAft>
+              <a:buFont typeface="Arial" panose="020B0604020202020204" pitchFamily="34" charset="0"/>
+              <a:buChar char="–"/>
+              <a:defRPr sz="2000" kern="1200">
+                <a:solidFill>
+                  <a:schemeClr val="tx1">
+                    <a:lumMod val="50000"/>
+                    <a:lumOff val="50000"/>
+                  </a:schemeClr>
+                </a:solidFill>
+                <a:latin typeface="+mn-lt"/>
+                <a:ea typeface="+mn-ea"/>
+                <a:cs typeface="+mn-cs"/>
+              </a:defRPr>
+            </a:lvl4pPr>
+            <a:lvl5pPr marL="2057400" indent="-228600" algn="l" rtl="0" eaLnBrk="0" fontAlgn="base" hangingPunct="0">
+              <a:spcBef>
+                <a:spcPct val="20000"/>
+              </a:spcBef>
+              <a:spcAft>
+                <a:spcPct val="0"/>
+              </a:spcAft>
+              <a:buFont typeface="Arial" panose="020B0604020202020204" pitchFamily="34" charset="0"/>
+              <a:buChar char="»"/>
+              <a:defRPr sz="2000" kern="1200">
+                <a:solidFill>
+                  <a:schemeClr val="tx1">
+                    <a:lumMod val="50000"/>
+                    <a:lumOff val="50000"/>
+                  </a:schemeClr>
+                </a:solidFill>
+                <a:latin typeface="+mn-lt"/>
+                <a:ea typeface="+mn-ea"/>
+                <a:cs typeface="+mn-cs"/>
+              </a:defRPr>
+            </a:lvl5pPr>
+            <a:lvl6pPr marL="2514600" indent="-228600" algn="l" defTabSz="914400" rtl="0" eaLnBrk="1" latinLnBrk="0" hangingPunct="1">
+              <a:spcBef>
+                <a:spcPct val="20000"/>
+              </a:spcBef>
+              <a:buFont typeface="Arial" pitchFamily="34" charset="0"/>
+              <a:buChar char="•"/>
+              <a:defRPr sz="2000" kern="1200">
+                <a:solidFill>
+                  <a:schemeClr val="tx1"/>
+                </a:solidFill>
+                <a:latin typeface="+mn-lt"/>
+                <a:ea typeface="+mn-ea"/>
+                <a:cs typeface="+mn-cs"/>
+              </a:defRPr>
+            </a:lvl6pPr>
+            <a:lvl7pPr marL="2971800" indent="-228600" algn="l" defTabSz="914400" rtl="0" eaLnBrk="1" latinLnBrk="0" hangingPunct="1">
+              <a:spcBef>
+                <a:spcPct val="20000"/>
+              </a:spcBef>
+              <a:buFont typeface="Arial" pitchFamily="34" charset="0"/>
+              <a:buChar char="•"/>
+              <a:defRPr sz="2000" kern="1200">
+                <a:solidFill>
+                  <a:schemeClr val="tx1"/>
+                </a:solidFill>
+                <a:latin typeface="+mn-lt"/>
+                <a:ea typeface="+mn-ea"/>
+                <a:cs typeface="+mn-cs"/>
+              </a:defRPr>
+            </a:lvl7pPr>
+            <a:lvl8pPr marL="3429000" indent="-228600" algn="l" defTabSz="914400" rtl="0" eaLnBrk="1" latinLnBrk="0" hangingPunct="1">
+              <a:spcBef>
+                <a:spcPct val="20000"/>
+              </a:spcBef>
+              <a:buFont typeface="Arial" pitchFamily="34" charset="0"/>
+              <a:buChar char="•"/>
+              <a:defRPr sz="2000" kern="1200">
+                <a:solidFill>
+                  <a:schemeClr val="tx1"/>
+                </a:solidFill>
+                <a:latin typeface="+mn-lt"/>
+                <a:ea typeface="+mn-ea"/>
+                <a:cs typeface="+mn-cs"/>
+              </a:defRPr>
+            </a:lvl8pPr>
+            <a:lvl9pPr marL="3886200" indent="-228600" algn="l" defTabSz="914400" rtl="0" eaLnBrk="1" latinLnBrk="0" hangingPunct="1">
+              <a:spcBef>
+                <a:spcPct val="20000"/>
+              </a:spcBef>
+              <a:buFont typeface="Arial" pitchFamily="34" charset="0"/>
+              <a:buChar char="•"/>
+              <a:defRPr sz="2000" kern="1200">
+                <a:solidFill>
+                  <a:schemeClr val="tx1"/>
+                </a:solidFill>
+                <a:latin typeface="+mn-lt"/>
+                <a:ea typeface="+mn-ea"/>
+                <a:cs typeface="+mn-cs"/>
+              </a:defRPr>
+            </a:lvl9pPr>
+          </a:lstStyle>
+          <a:p>
+            <a:pPr marL="0" indent="0">
+              <a:buFont typeface="Arial" panose="020B0604020202020204" pitchFamily="34" charset="0"/>
+              <a:buNone/>
+            </a:pPr>
+            <a:r>
+              <a:rPr lang="en-US" sz="2000" dirty="0">
+                <a:solidFill>
+                  <a:schemeClr val="tx1"/>
+                </a:solidFill>
+              </a:rPr>
+              <a:t>Producer task</a:t>
+            </a:r>
+            <a:endParaRPr lang="en-IN" sz="2000" dirty="0">
+              <a:solidFill>
+                <a:schemeClr val="tx1"/>
+              </a:solidFill>
+            </a:endParaRPr>
+          </a:p>
+        </p:txBody>
+      </p:sp>
+    </p:spTree>
+    <p:extLst>
+      <p:ext uri="{BB962C8B-B14F-4D97-AF65-F5344CB8AC3E}">
+        <p14:creationId xmlns:p14="http://schemas.microsoft.com/office/powerpoint/2010/main" val="2149379376"/>
+      </p:ext>
+    </p:extLst>
+  </p:cSld>
+  <p:clrMapOvr>
+    <a:masterClrMapping/>
+  </p:clrMapOvr>
+  <p:timing>
+    <p:tnLst>
+      <p:par>
+        <p:cTn id="1" dur="indefinite" restart="never" nodeType="tmRoot">
+          <p:childTnLst>
+            <p:seq concurrent="1" nextAc="seek">
+              <p:cTn id="2" dur="indefinite" nodeType="mainSeq">
+                <p:childTnLst>
+                  <p:par>
+                    <p:cTn id="3" fill="hold">
+                      <p:stCondLst>
+                        <p:cond delay="indefinite"/>
+                      </p:stCondLst>
+                      <p:childTnLst>
+                        <p:par>
+                          <p:cTn id="4" fill="hold">
+                            <p:stCondLst>
+                              <p:cond delay="0"/>
+                            </p:stCondLst>
+                            <p:childTnLst>
+                              <p:par>
+                                <p:cTn id="5" presetID="1" presetClass="entr" presetSubtype="0" fill="hold" nodeType="clickEffect">
+                                  <p:stCondLst>
+                                    <p:cond delay="0"/>
+                                  </p:stCondLst>
+                                  <p:childTnLst>
+                                    <p:set>
+                                      <p:cBhvr>
+                                        <p:cTn id="6" dur="1" fill="hold">
+                                          <p:stCondLst>
+                                            <p:cond delay="0"/>
+                                          </p:stCondLst>
+                                        </p:cTn>
+                                        <p:tgtEl>
+                                          <p:spTgt spid="7"/>
+                                        </p:tgtEl>
+                                        <p:attrNameLst>
+                                          <p:attrName>style.visibility</p:attrName>
+                                        </p:attrNameLst>
+                                      </p:cBhvr>
+                                      <p:to>
+                                        <p:strVal val="visible"/>
+                                      </p:to>
+                                    </p:set>
+                                  </p:childTnLst>
+                                </p:cTn>
+                              </p:par>
+                            </p:childTnLst>
+                          </p:cTn>
+                        </p:par>
+                      </p:childTnLst>
+                    </p:cTn>
+                  </p:par>
+                  <p:par>
+                    <p:cTn id="7" fill="hold">
+                      <p:stCondLst>
+                        <p:cond delay="indefinite"/>
+                      </p:stCondLst>
+                      <p:childTnLst>
+                        <p:par>
+                          <p:cTn id="8" fill="hold">
+                            <p:stCondLst>
+                              <p:cond delay="0"/>
+                            </p:stCondLst>
+                            <p:childTnLst>
+                              <p:par>
+                                <p:cTn id="9" presetID="1" presetClass="entr" presetSubtype="0" fill="hold" grpId="0" nodeType="clickEffect">
+                                  <p:stCondLst>
+                                    <p:cond delay="0"/>
+                                  </p:stCondLst>
+                                  <p:childTnLst>
+                                    <p:set>
+                                      <p:cBhvr>
+                                        <p:cTn id="10" dur="1" fill="hold">
+                                          <p:stCondLst>
+                                            <p:cond delay="0"/>
+                                          </p:stCondLst>
+                                        </p:cTn>
+                                        <p:tgtEl>
+                                          <p:spTgt spid="8">
+                                            <p:txEl>
+                                              <p:pRg st="0" end="0"/>
+                                            </p:txEl>
+                                          </p:spTgt>
+                                        </p:tgtEl>
+                                        <p:attrNameLst>
+                                          <p:attrName>style.visibility</p:attrName>
+                                        </p:attrNameLst>
+                                      </p:cBhvr>
+                                      <p:to>
+                                        <p:strVal val="visible"/>
+                                      </p:to>
+                                    </p:set>
+                                  </p:childTnLst>
+                                </p:cTn>
+                              </p:par>
+                            </p:childTnLst>
+                          </p:cTn>
+                        </p:par>
+                      </p:childTnLst>
+                    </p:cTn>
+                  </p:par>
+                  <p:par>
+                    <p:cTn id="11" fill="hold">
+                      <p:stCondLst>
+                        <p:cond delay="indefinite"/>
+                      </p:stCondLst>
+                      <p:childTnLst>
+                        <p:par>
+                          <p:cTn id="12" fill="hold">
+                            <p:stCondLst>
+                              <p:cond delay="0"/>
+                            </p:stCondLst>
+                            <p:childTnLst>
+                              <p:par>
+                                <p:cTn id="13" presetID="1" presetClass="entr" presetSubtype="0" fill="hold" nodeType="clickEffect">
+                                  <p:stCondLst>
+                                    <p:cond delay="0"/>
+                                  </p:stCondLst>
+                                  <p:childTnLst>
+                                    <p:set>
+                                      <p:cBhvr>
+                                        <p:cTn id="14" dur="1" fill="hold">
+                                          <p:stCondLst>
+                                            <p:cond delay="0"/>
+                                          </p:stCondLst>
+                                        </p:cTn>
+                                        <p:tgtEl>
+                                          <p:spTgt spid="10"/>
+                                        </p:tgtEl>
+                                        <p:attrNameLst>
+                                          <p:attrName>style.visibility</p:attrName>
+                                        </p:attrNameLst>
+                                      </p:cBhvr>
+                                      <p:to>
+                                        <p:strVal val="visible"/>
+                                      </p:to>
+                                    </p:set>
+                                  </p:childTnLst>
+                                </p:cTn>
+                              </p:par>
+                            </p:childTnLst>
+                          </p:cTn>
+                        </p:par>
+                      </p:childTnLst>
+                    </p:cTn>
+                  </p:par>
+                  <p:par>
+                    <p:cTn id="15" fill="hold">
+                      <p:stCondLst>
+                        <p:cond delay="indefinite"/>
+                      </p:stCondLst>
+                      <p:childTnLst>
+                        <p:par>
+                          <p:cTn id="16" fill="hold">
+                            <p:stCondLst>
+                              <p:cond delay="0"/>
+                            </p:stCondLst>
+                            <p:childTnLst>
+                              <p:par>
+                                <p:cTn id="17" presetID="1" presetClass="entr" presetSubtype="0" fill="hold" grpId="0" nodeType="clickEffect">
+                                  <p:stCondLst>
+                                    <p:cond delay="0"/>
+                                  </p:stCondLst>
+                                  <p:childTnLst>
+                                    <p:set>
+                                      <p:cBhvr>
+                                        <p:cTn id="18" dur="1" fill="hold">
+                                          <p:stCondLst>
+                                            <p:cond delay="0"/>
+                                          </p:stCondLst>
+                                        </p:cTn>
+                                        <p:tgtEl>
+                                          <p:spTgt spid="11">
+                                            <p:txEl>
+                                              <p:pRg st="0" end="0"/>
+                                            </p:txEl>
+                                          </p:spTgt>
+                                        </p:tgtEl>
+                                        <p:attrNameLst>
+                                          <p:attrName>style.visibility</p:attrName>
+                                        </p:attrNameLst>
+                                      </p:cBhvr>
+                                      <p:to>
+                                        <p:strVal val="visible"/>
+                                      </p:to>
+                                    </p:set>
+                                  </p:childTnLst>
+                                </p:cTn>
+                              </p:par>
+                            </p:childTnLst>
+                          </p:cTn>
+                        </p:par>
+                      </p:childTnLst>
+                    </p:cTn>
+                  </p:par>
+                  <p:par>
+                    <p:cTn id="19" fill="hold">
+                      <p:stCondLst>
+                        <p:cond delay="indefinite"/>
+                      </p:stCondLst>
+                      <p:childTnLst>
+                        <p:par>
+                          <p:cTn id="20" fill="hold">
+                            <p:stCondLst>
+                              <p:cond delay="0"/>
+                            </p:stCondLst>
+                            <p:childTnLst>
+                              <p:par>
+                                <p:cTn id="21" presetID="1" presetClass="entr" presetSubtype="0" fill="hold" nodeType="clickEffect">
+                                  <p:stCondLst>
+                                    <p:cond delay="0"/>
+                                  </p:stCondLst>
+                                  <p:childTnLst>
+                                    <p:set>
+                                      <p:cBhvr>
+                                        <p:cTn id="22" dur="1" fill="hold">
+                                          <p:stCondLst>
+                                            <p:cond delay="0"/>
+                                          </p:stCondLst>
+                                        </p:cTn>
+                                        <p:tgtEl>
+                                          <p:spTgt spid="13"/>
+                                        </p:tgtEl>
+                                        <p:attrNameLst>
+                                          <p:attrName>style.visibility</p:attrName>
+                                        </p:attrNameLst>
+                                      </p:cBhvr>
+                                      <p:to>
+                                        <p:strVal val="visible"/>
+                                      </p:to>
+                                    </p:set>
+                                  </p:childTnLst>
+                                </p:cTn>
+                              </p:par>
+                            </p:childTnLst>
+                          </p:cTn>
+                        </p:par>
+                      </p:childTnLst>
+                    </p:cTn>
+                  </p:par>
+                  <p:par>
+                    <p:cTn id="23" fill="hold">
+                      <p:stCondLst>
+                        <p:cond delay="indefinite"/>
+                      </p:stCondLst>
+                      <p:childTnLst>
+                        <p:par>
+                          <p:cTn id="24" fill="hold">
+                            <p:stCondLst>
+                              <p:cond delay="0"/>
+                            </p:stCondLst>
+                            <p:childTnLst>
+                              <p:par>
+                                <p:cTn id="25" presetID="1" presetClass="entr" presetSubtype="0" fill="hold" grpId="0" nodeType="clickEffect">
+                                  <p:stCondLst>
+                                    <p:cond delay="0"/>
+                                  </p:stCondLst>
+                                  <p:childTnLst>
+                                    <p:set>
+                                      <p:cBhvr>
+                                        <p:cTn id="26" dur="1" fill="hold">
+                                          <p:stCondLst>
+                                            <p:cond delay="0"/>
+                                          </p:stCondLst>
+                                        </p:cTn>
+                                        <p:tgtEl>
+                                          <p:spTgt spid="14">
+                                            <p:txEl>
+                                              <p:pRg st="0" end="0"/>
+                                            </p:txEl>
+                                          </p:spTgt>
+                                        </p:tgtEl>
+                                        <p:attrNameLst>
+                                          <p:attrName>style.visibility</p:attrName>
+                                        </p:attrNameLst>
+                                      </p:cBhvr>
+                                      <p:to>
+                                        <p:strVal val="visible"/>
+                                      </p:to>
+                                    </p:set>
+                                  </p:childTnLst>
+                                </p:cTn>
+                              </p:par>
+                            </p:childTnLst>
+                          </p:cTn>
+                        </p:par>
+                      </p:childTnLst>
+                    </p:cTn>
+                  </p:par>
+                </p:childTnLst>
+              </p:cTn>
+              <p:prevCondLst>
+                <p:cond evt="onPrev" delay="0">
+                  <p:tgtEl>
+                    <p:sldTgt/>
+                  </p:tgtEl>
+                </p:cond>
+              </p:prevCondLst>
+              <p:nextCondLst>
+                <p:cond evt="onNext" delay="0">
+                  <p:tgtEl>
+                    <p:sldTgt/>
+                  </p:tgtEl>
+                </p:cond>
+              </p:nextCondLst>
+            </p:seq>
+          </p:childTnLst>
+        </p:cTn>
+      </p:par>
+    </p:tnLst>
+    <p:bldLst>
+      <p:bldP spid="8" grpId="0" build="p"/>
+      <p:bldP spid="11" grpId="0" build="p"/>
+      <p:bldP spid="14" grpId="0" build="p"/>
+    </p:bldLst>
+  </p:timing>
+</p:sld>
+</file>
+
+<file path=ppt/slides/slide9.xml><?xml version="1.0" encoding="utf-8"?>
+<p:sld xmlns:a="http://schemas.openxmlformats.org/drawingml/2006/main" xmlns:r="http://schemas.openxmlformats.org/officeDocument/2006/relationships" xmlns:p="http://schemas.openxmlformats.org/presentationml/2006/main">
+  <p:cSld>
+    <p:spTree>
+      <p:nvGrpSpPr>
+        <p:cNvPr id="1" name=""/>
+        <p:cNvGrpSpPr/>
+        <p:nvPr/>
+      </p:nvGrpSpPr>
+      <p:grpSpPr>
+        <a:xfrm>
+          <a:off x="0" y="0"/>
+          <a:ext cx="0" cy="0"/>
+          <a:chOff x="0" y="0"/>
+          <a:chExt cx="0" cy="0"/>
+        </a:xfrm>
+      </p:grpSpPr>
+      <p:sp>
+        <p:nvSpPr>
+          <p:cNvPr id="2" name="Title 1">
+            <a:extLst>
+              <a:ext uri="{FF2B5EF4-FFF2-40B4-BE49-F238E27FC236}">
+                <a16:creationId xmlns:a16="http://schemas.microsoft.com/office/drawing/2014/main" id="{9F27D07D-4EBB-787C-271F-F6EDE81B5E8A}"/>
+              </a:ext>
+            </a:extLst>
+          </p:cNvPr>
+          <p:cNvSpPr>
+            <a:spLocks noGrp="1"/>
+          </p:cNvSpPr>
+          <p:nvPr>
+            <p:ph type="title"/>
+          </p:nvPr>
+        </p:nvSpPr>
+        <p:spPr/>
+        <p:txBody>
+          <a:bodyPr/>
+          <a:lstStyle/>
+          <a:p>
+            <a:r>
+              <a:rPr lang="en-US" dirty="0"/>
+              <a:t>Mutex example</a:t>
+            </a:r>
+            <a:endParaRPr lang="en-IN" dirty="0"/>
+          </a:p>
+        </p:txBody>
+      </p:sp>
+      <p:sp>
+        <p:nvSpPr>
+          <p:cNvPr id="4" name="Date Placeholder 3">
+            <a:extLst>
+              <a:ext uri="{FF2B5EF4-FFF2-40B4-BE49-F238E27FC236}">
+                <a16:creationId xmlns:a16="http://schemas.microsoft.com/office/drawing/2014/main" id="{E743C494-79C5-4991-79AA-DEB8DB610F14}"/>
+              </a:ext>
+            </a:extLst>
+          </p:cNvPr>
+          <p:cNvSpPr>
+            <a:spLocks noGrp="1"/>
+          </p:cNvSpPr>
+          <p:nvPr>
+            <p:ph type="dt" sz="half" idx="10"/>
+          </p:nvPr>
+        </p:nvSpPr>
+        <p:spPr/>
+        <p:txBody>
+          <a:bodyPr/>
+          <a:lstStyle/>
+          <a:p>
+            <a:pPr>
+              <a:defRPr/>
+            </a:pPr>
+            <a:r>
+              <a:rPr lang="en-US"/>
+              <a:t>21/12/2020</a:t>
+            </a:r>
+          </a:p>
+        </p:txBody>
+      </p:sp>
+      <p:sp>
+        <p:nvSpPr>
+          <p:cNvPr id="5" name="Slide Number Placeholder 4">
+            <a:extLst>
+              <a:ext uri="{FF2B5EF4-FFF2-40B4-BE49-F238E27FC236}">
+                <a16:creationId xmlns:a16="http://schemas.microsoft.com/office/drawing/2014/main" id="{CBC21A86-9FC2-29CC-FACE-4F826DB40D8A}"/>
+              </a:ext>
+            </a:extLst>
+          </p:cNvPr>
+          <p:cNvSpPr>
+            <a:spLocks noGrp="1"/>
+          </p:cNvSpPr>
+          <p:nvPr>
+            <p:ph type="sldNum" sz="quarter" idx="12"/>
+          </p:nvPr>
+        </p:nvSpPr>
+        <p:spPr/>
+        <p:txBody>
+          <a:bodyPr/>
+          <a:lstStyle/>
+          <a:p>
+            <a:pPr>
+              <a:defRPr/>
+            </a:pPr>
+            <a:fld id="{CA887A73-1AE0-46F8-856A-18EA1CF30A1B}" type="slidenum">
+              <a:rPr lang="en-US" altLang="en-US" smtClean="0"/>
+              <a:pPr>
+                <a:defRPr/>
+              </a:pPr>
+              <a:t>9</a:t>
+            </a:fld>
+            <a:endParaRPr lang="en-US" altLang="en-US"/>
+          </a:p>
+        </p:txBody>
+      </p:sp>
+      <p:pic>
+        <p:nvPicPr>
+          <p:cNvPr id="6" name="Picture 5">
+            <a:extLst>
+              <a:ext uri="{FF2B5EF4-FFF2-40B4-BE49-F238E27FC236}">
+                <a16:creationId xmlns:a16="http://schemas.microsoft.com/office/drawing/2014/main" id="{5DB06A1C-A340-A855-9FC0-1A484D79A630}"/>
+              </a:ext>
+            </a:extLst>
+          </p:cNvPr>
+          <p:cNvPicPr>
+            <a:picLocks noChangeAspect="1"/>
+          </p:cNvPicPr>
+          <p:nvPr/>
+        </p:nvPicPr>
+        <p:blipFill>
+          <a:blip r:embed="rId2"/>
+          <a:stretch>
+            <a:fillRect/>
+          </a:stretch>
+        </p:blipFill>
+        <p:spPr>
+          <a:xfrm>
+            <a:off x="0" y="1371600"/>
+            <a:ext cx="4280313" cy="3750678"/>
+          </a:xfrm>
+          <a:prstGeom prst="rect">
+            <a:avLst/>
+          </a:prstGeom>
+        </p:spPr>
+      </p:pic>
+      <p:sp>
+        <p:nvSpPr>
+          <p:cNvPr id="7" name="Content Placeholder 2">
+            <a:extLst>
+              <a:ext uri="{FF2B5EF4-FFF2-40B4-BE49-F238E27FC236}">
+                <a16:creationId xmlns:a16="http://schemas.microsoft.com/office/drawing/2014/main" id="{795C5A64-6A15-39DD-A38A-52A97FDE8229}"/>
+              </a:ext>
+            </a:extLst>
+          </p:cNvPr>
+          <p:cNvSpPr txBox="1">
+            <a:spLocks/>
+          </p:cNvSpPr>
+          <p:nvPr/>
+        </p:nvSpPr>
+        <p:spPr bwMode="auto">
+          <a:xfrm>
+            <a:off x="0" y="5225946"/>
+            <a:ext cx="3829545" cy="381000"/>
+          </a:xfrm>
+          <a:prstGeom prst="rect">
+            <a:avLst/>
+          </a:prstGeom>
+          <a:noFill/>
+          <a:ln>
+            <a:noFill/>
+          </a:ln>
+          <a:extLst>
+            <a:ext uri="{909E8E84-426E-40DD-AFC4-6F175D3DCCD1}">
+              <a14:hiddenFill xmlns:a14="http://schemas.microsoft.com/office/drawing/2010/main">
+                <a:solidFill>
+                  <a:srgbClr val="FFFFFF"/>
+                </a:solidFill>
+              </a14:hiddenFill>
+            </a:ext>
+            <a:ext uri="{91240B29-F687-4F45-9708-019B960494DF}">
+              <a14:hiddenLine xmlns:a14="http://schemas.microsoft.com/office/drawing/2010/main" w="9525">
+                <a:solidFill>
+                  <a:srgbClr val="000000"/>
+                </a:solidFill>
+                <a:miter lim="800000"/>
+                <a:headEnd/>
+                <a:tailEnd/>
+              </a14:hiddenLine>
+            </a:ext>
+          </a:extLst>
+        </p:spPr>
+        <p:txBody>
+          <a:bodyPr vert="horz" wrap="square" lIns="91440" tIns="45720" rIns="91440" bIns="45720" numCol="1" anchor="t" anchorCtr="0" compatLnSpc="1">
+            <a:prstTxWarp prst="textNoShape">
+              <a:avLst/>
+            </a:prstTxWarp>
+          </a:bodyPr>
+          <a:lstStyle>
+            <a:lvl1pPr marL="342900" indent="-342900" algn="l" rtl="0" eaLnBrk="0" fontAlgn="base" hangingPunct="0">
+              <a:spcBef>
+                <a:spcPct val="20000"/>
+              </a:spcBef>
+              <a:spcAft>
+                <a:spcPct val="0"/>
+              </a:spcAft>
+              <a:buFont typeface="Arial" panose="020B0604020202020204" pitchFamily="34" charset="0"/>
+              <a:buChar char="•"/>
+              <a:defRPr sz="3200" kern="1200">
+                <a:solidFill>
+                  <a:schemeClr val="tx1">
+                    <a:lumMod val="50000"/>
+                    <a:lumOff val="50000"/>
+                  </a:schemeClr>
+                </a:solidFill>
+                <a:latin typeface="+mn-lt"/>
+                <a:ea typeface="+mn-ea"/>
+                <a:cs typeface="+mn-cs"/>
+              </a:defRPr>
+            </a:lvl1pPr>
+            <a:lvl2pPr marL="742950" indent="-285750" algn="l" rtl="0" eaLnBrk="0" fontAlgn="base" hangingPunct="0">
+              <a:spcBef>
+                <a:spcPct val="20000"/>
+              </a:spcBef>
+              <a:spcAft>
+                <a:spcPct val="0"/>
+              </a:spcAft>
+              <a:buFont typeface="Arial" panose="020B0604020202020204" pitchFamily="34" charset="0"/>
+              <a:buChar char="–"/>
+              <a:defRPr sz="2800" kern="1200">
+                <a:solidFill>
+                  <a:schemeClr val="tx1">
+                    <a:lumMod val="50000"/>
+                    <a:lumOff val="50000"/>
+                  </a:schemeClr>
+                </a:solidFill>
+                <a:latin typeface="+mn-lt"/>
+                <a:ea typeface="+mn-ea"/>
+                <a:cs typeface="+mn-cs"/>
+              </a:defRPr>
+            </a:lvl2pPr>
+            <a:lvl3pPr marL="1143000" indent="-228600" algn="l" rtl="0" eaLnBrk="0" fontAlgn="base" hangingPunct="0">
+              <a:spcBef>
+                <a:spcPct val="20000"/>
+              </a:spcBef>
+              <a:spcAft>
+                <a:spcPct val="0"/>
+              </a:spcAft>
+              <a:buFont typeface="Arial" panose="020B0604020202020204" pitchFamily="34" charset="0"/>
+              <a:buChar char="•"/>
+              <a:defRPr sz="2400" kern="1200">
+                <a:solidFill>
+                  <a:schemeClr val="tx1">
+                    <a:lumMod val="50000"/>
+                    <a:lumOff val="50000"/>
+                  </a:schemeClr>
+                </a:solidFill>
+                <a:latin typeface="+mn-lt"/>
+                <a:ea typeface="+mn-ea"/>
+                <a:cs typeface="+mn-cs"/>
+              </a:defRPr>
+            </a:lvl3pPr>
+            <a:lvl4pPr marL="1600200" indent="-228600" algn="l" rtl="0" eaLnBrk="0" fontAlgn="base" hangingPunct="0">
+              <a:spcBef>
+                <a:spcPct val="20000"/>
+              </a:spcBef>
+              <a:spcAft>
+                <a:spcPct val="0"/>
+              </a:spcAft>
+              <a:buFont typeface="Arial" panose="020B0604020202020204" pitchFamily="34" charset="0"/>
+              <a:buChar char="–"/>
+              <a:defRPr sz="2000" kern="1200">
+                <a:solidFill>
+                  <a:schemeClr val="tx1">
+                    <a:lumMod val="50000"/>
+                    <a:lumOff val="50000"/>
+                  </a:schemeClr>
+                </a:solidFill>
+                <a:latin typeface="+mn-lt"/>
+                <a:ea typeface="+mn-ea"/>
+                <a:cs typeface="+mn-cs"/>
+              </a:defRPr>
+            </a:lvl4pPr>
+            <a:lvl5pPr marL="2057400" indent="-228600" algn="l" rtl="0" eaLnBrk="0" fontAlgn="base" hangingPunct="0">
+              <a:spcBef>
+                <a:spcPct val="20000"/>
+              </a:spcBef>
+              <a:spcAft>
+                <a:spcPct val="0"/>
+              </a:spcAft>
+              <a:buFont typeface="Arial" panose="020B0604020202020204" pitchFamily="34" charset="0"/>
+              <a:buChar char="»"/>
+              <a:defRPr sz="2000" kern="1200">
+                <a:solidFill>
+                  <a:schemeClr val="tx1">
+                    <a:lumMod val="50000"/>
+                    <a:lumOff val="50000"/>
+                  </a:schemeClr>
+                </a:solidFill>
+                <a:latin typeface="+mn-lt"/>
+                <a:ea typeface="+mn-ea"/>
+                <a:cs typeface="+mn-cs"/>
+              </a:defRPr>
+            </a:lvl5pPr>
+            <a:lvl6pPr marL="2514600" indent="-228600" algn="l" defTabSz="914400" rtl="0" eaLnBrk="1" latinLnBrk="0" hangingPunct="1">
+              <a:spcBef>
+                <a:spcPct val="20000"/>
+              </a:spcBef>
+              <a:buFont typeface="Arial" pitchFamily="34" charset="0"/>
+              <a:buChar char="•"/>
+              <a:defRPr sz="2000" kern="1200">
+                <a:solidFill>
+                  <a:schemeClr val="tx1"/>
+                </a:solidFill>
+                <a:latin typeface="+mn-lt"/>
+                <a:ea typeface="+mn-ea"/>
+                <a:cs typeface="+mn-cs"/>
+              </a:defRPr>
+            </a:lvl6pPr>
+            <a:lvl7pPr marL="2971800" indent="-228600" algn="l" defTabSz="914400" rtl="0" eaLnBrk="1" latinLnBrk="0" hangingPunct="1">
+              <a:spcBef>
+                <a:spcPct val="20000"/>
+              </a:spcBef>
+              <a:buFont typeface="Arial" pitchFamily="34" charset="0"/>
+              <a:buChar char="•"/>
+              <a:defRPr sz="2000" kern="1200">
+                <a:solidFill>
+                  <a:schemeClr val="tx1"/>
+                </a:solidFill>
+                <a:latin typeface="+mn-lt"/>
+                <a:ea typeface="+mn-ea"/>
+                <a:cs typeface="+mn-cs"/>
+              </a:defRPr>
+            </a:lvl7pPr>
+            <a:lvl8pPr marL="3429000" indent="-228600" algn="l" defTabSz="914400" rtl="0" eaLnBrk="1" latinLnBrk="0" hangingPunct="1">
+              <a:spcBef>
+                <a:spcPct val="20000"/>
+              </a:spcBef>
+              <a:buFont typeface="Arial" pitchFamily="34" charset="0"/>
+              <a:buChar char="•"/>
+              <a:defRPr sz="2000" kern="1200">
+                <a:solidFill>
+                  <a:schemeClr val="tx1"/>
+                </a:solidFill>
+                <a:latin typeface="+mn-lt"/>
+                <a:ea typeface="+mn-ea"/>
+                <a:cs typeface="+mn-cs"/>
+              </a:defRPr>
+            </a:lvl8pPr>
+            <a:lvl9pPr marL="3886200" indent="-228600" algn="l" defTabSz="914400" rtl="0" eaLnBrk="1" latinLnBrk="0" hangingPunct="1">
+              <a:spcBef>
+                <a:spcPct val="20000"/>
+              </a:spcBef>
+              <a:buFont typeface="Arial" pitchFamily="34" charset="0"/>
+              <a:buChar char="•"/>
+              <a:defRPr sz="2000" kern="1200">
+                <a:solidFill>
+                  <a:schemeClr val="tx1"/>
+                </a:solidFill>
+                <a:latin typeface="+mn-lt"/>
+                <a:ea typeface="+mn-ea"/>
+                <a:cs typeface="+mn-cs"/>
+              </a:defRPr>
+            </a:lvl9pPr>
+          </a:lstStyle>
+          <a:p>
+            <a:pPr marL="0" indent="0">
+              <a:buFont typeface="Arial" panose="020B0604020202020204" pitchFamily="34" charset="0"/>
+              <a:buNone/>
+            </a:pPr>
+            <a:r>
+              <a:rPr lang="en-US" sz="2000" dirty="0">
+                <a:solidFill>
+                  <a:schemeClr val="tx1"/>
+                </a:solidFill>
+              </a:rPr>
+              <a:t>Producer task</a:t>
+            </a:r>
+            <a:endParaRPr lang="en-IN" sz="2000" dirty="0">
+              <a:solidFill>
+                <a:schemeClr val="tx1"/>
+              </a:solidFill>
+            </a:endParaRPr>
+          </a:p>
+        </p:txBody>
+      </p:sp>
+      <p:pic>
+        <p:nvPicPr>
+          <p:cNvPr id="9" name="Picture 8">
+            <a:extLst>
+              <a:ext uri="{FF2B5EF4-FFF2-40B4-BE49-F238E27FC236}">
+                <a16:creationId xmlns:a16="http://schemas.microsoft.com/office/drawing/2014/main" id="{5C1B1E2B-74E0-2B32-A682-0A52F000B497}"/>
+              </a:ext>
+            </a:extLst>
+          </p:cNvPr>
+          <p:cNvPicPr>
+            <a:picLocks noChangeAspect="1"/>
+          </p:cNvPicPr>
+          <p:nvPr/>
+        </p:nvPicPr>
+        <p:blipFill>
+          <a:blip r:embed="rId3"/>
+          <a:stretch>
+            <a:fillRect/>
+          </a:stretch>
+        </p:blipFill>
+        <p:spPr>
+          <a:xfrm>
+            <a:off x="3886200" y="1981200"/>
+            <a:ext cx="5257800" cy="4163821"/>
+          </a:xfrm>
+          <a:prstGeom prst="rect">
+            <a:avLst/>
+          </a:prstGeom>
+        </p:spPr>
+      </p:pic>
+      <p:sp>
+        <p:nvSpPr>
+          <p:cNvPr id="10" name="Content Placeholder 2">
+            <a:extLst>
+              <a:ext uri="{FF2B5EF4-FFF2-40B4-BE49-F238E27FC236}">
+                <a16:creationId xmlns:a16="http://schemas.microsoft.com/office/drawing/2014/main" id="{DD653974-E233-260F-1AE6-58FF393653C5}"/>
+              </a:ext>
+            </a:extLst>
+          </p:cNvPr>
+          <p:cNvSpPr txBox="1">
+            <a:spLocks/>
+          </p:cNvSpPr>
+          <p:nvPr/>
+        </p:nvSpPr>
+        <p:spPr bwMode="auto">
+          <a:xfrm>
+            <a:off x="3886200" y="6145021"/>
+            <a:ext cx="3829545" cy="381000"/>
+          </a:xfrm>
+          <a:prstGeom prst="rect">
+            <a:avLst/>
+          </a:prstGeom>
+          <a:noFill/>
+          <a:ln>
+            <a:noFill/>
+          </a:ln>
+          <a:extLst>
+            <a:ext uri="{909E8E84-426E-40DD-AFC4-6F175D3DCCD1}">
+              <a14:hiddenFill xmlns:a14="http://schemas.microsoft.com/office/drawing/2010/main">
+                <a:solidFill>
+                  <a:srgbClr val="FFFFFF"/>
+                </a:solidFill>
+              </a14:hiddenFill>
+            </a:ext>
+            <a:ext uri="{91240B29-F687-4F45-9708-019B960494DF}">
+              <a14:hiddenLine xmlns:a14="http://schemas.microsoft.com/office/drawing/2010/main" w="9525">
+                <a:solidFill>
+                  <a:srgbClr val="000000"/>
+                </a:solidFill>
+                <a:miter lim="800000"/>
+                <a:headEnd/>
+                <a:tailEnd/>
+              </a14:hiddenLine>
+            </a:ext>
+          </a:extLst>
+        </p:spPr>
+        <p:txBody>
+          <a:bodyPr vert="horz" wrap="square" lIns="91440" tIns="45720" rIns="91440" bIns="45720" numCol="1" anchor="t" anchorCtr="0" compatLnSpc="1">
+            <a:prstTxWarp prst="textNoShape">
+              <a:avLst/>
+            </a:prstTxWarp>
+          </a:bodyPr>
+          <a:lstStyle>
+            <a:lvl1pPr marL="342900" indent="-342900" algn="l" rtl="0" eaLnBrk="0" fontAlgn="base" hangingPunct="0">
+              <a:spcBef>
+                <a:spcPct val="20000"/>
+              </a:spcBef>
+              <a:spcAft>
+                <a:spcPct val="0"/>
+              </a:spcAft>
+              <a:buFont typeface="Arial" panose="020B0604020202020204" pitchFamily="34" charset="0"/>
+              <a:buChar char="•"/>
+              <a:defRPr sz="3200" kern="1200">
+                <a:solidFill>
+                  <a:schemeClr val="tx1">
+                    <a:lumMod val="50000"/>
+                    <a:lumOff val="50000"/>
+                  </a:schemeClr>
+                </a:solidFill>
+                <a:latin typeface="+mn-lt"/>
+                <a:ea typeface="+mn-ea"/>
+                <a:cs typeface="+mn-cs"/>
+              </a:defRPr>
+            </a:lvl1pPr>
+            <a:lvl2pPr marL="742950" indent="-285750" algn="l" rtl="0" eaLnBrk="0" fontAlgn="base" hangingPunct="0">
+              <a:spcBef>
+                <a:spcPct val="20000"/>
+              </a:spcBef>
+              <a:spcAft>
+                <a:spcPct val="0"/>
+              </a:spcAft>
+              <a:buFont typeface="Arial" panose="020B0604020202020204" pitchFamily="34" charset="0"/>
+              <a:buChar char="–"/>
+              <a:defRPr sz="2800" kern="1200">
+                <a:solidFill>
+                  <a:schemeClr val="tx1">
+                    <a:lumMod val="50000"/>
+                    <a:lumOff val="50000"/>
+                  </a:schemeClr>
+                </a:solidFill>
+                <a:latin typeface="+mn-lt"/>
+                <a:ea typeface="+mn-ea"/>
+                <a:cs typeface="+mn-cs"/>
+              </a:defRPr>
+            </a:lvl2pPr>
+            <a:lvl3pPr marL="1143000" indent="-228600" algn="l" rtl="0" eaLnBrk="0" fontAlgn="base" hangingPunct="0">
+              <a:spcBef>
+                <a:spcPct val="20000"/>
+              </a:spcBef>
+              <a:spcAft>
+                <a:spcPct val="0"/>
+              </a:spcAft>
+              <a:buFont typeface="Arial" panose="020B0604020202020204" pitchFamily="34" charset="0"/>
+              <a:buChar char="•"/>
+              <a:defRPr sz="2400" kern="1200">
+                <a:solidFill>
+                  <a:schemeClr val="tx1">
+                    <a:lumMod val="50000"/>
+                    <a:lumOff val="50000"/>
+                  </a:schemeClr>
+                </a:solidFill>
+                <a:latin typeface="+mn-lt"/>
+                <a:ea typeface="+mn-ea"/>
+                <a:cs typeface="+mn-cs"/>
+              </a:defRPr>
+            </a:lvl3pPr>
+            <a:lvl4pPr marL="1600200" indent="-228600" algn="l" rtl="0" eaLnBrk="0" fontAlgn="base" hangingPunct="0">
+              <a:spcBef>
+                <a:spcPct val="20000"/>
+              </a:spcBef>
+              <a:spcAft>
+                <a:spcPct val="0"/>
+              </a:spcAft>
+              <a:buFont typeface="Arial" panose="020B0604020202020204" pitchFamily="34" charset="0"/>
+              <a:buChar char="–"/>
+              <a:defRPr sz="2000" kern="1200">
+                <a:solidFill>
+                  <a:schemeClr val="tx1">
+                    <a:lumMod val="50000"/>
+                    <a:lumOff val="50000"/>
+                  </a:schemeClr>
+                </a:solidFill>
+                <a:latin typeface="+mn-lt"/>
+                <a:ea typeface="+mn-ea"/>
+                <a:cs typeface="+mn-cs"/>
+              </a:defRPr>
+            </a:lvl4pPr>
+            <a:lvl5pPr marL="2057400" indent="-228600" algn="l" rtl="0" eaLnBrk="0" fontAlgn="base" hangingPunct="0">
+              <a:spcBef>
+                <a:spcPct val="20000"/>
+              </a:spcBef>
+              <a:spcAft>
+                <a:spcPct val="0"/>
+              </a:spcAft>
+              <a:buFont typeface="Arial" panose="020B0604020202020204" pitchFamily="34" charset="0"/>
+              <a:buChar char="»"/>
+              <a:defRPr sz="2000" kern="1200">
+                <a:solidFill>
+                  <a:schemeClr val="tx1">
+                    <a:lumMod val="50000"/>
+                    <a:lumOff val="50000"/>
+                  </a:schemeClr>
+                </a:solidFill>
+                <a:latin typeface="+mn-lt"/>
+                <a:ea typeface="+mn-ea"/>
+                <a:cs typeface="+mn-cs"/>
+              </a:defRPr>
+            </a:lvl5pPr>
+            <a:lvl6pPr marL="2514600" indent="-228600" algn="l" defTabSz="914400" rtl="0" eaLnBrk="1" latinLnBrk="0" hangingPunct="1">
+              <a:spcBef>
+                <a:spcPct val="20000"/>
+              </a:spcBef>
+              <a:buFont typeface="Arial" pitchFamily="34" charset="0"/>
+              <a:buChar char="•"/>
+              <a:defRPr sz="2000" kern="1200">
+                <a:solidFill>
+                  <a:schemeClr val="tx1"/>
+                </a:solidFill>
+                <a:latin typeface="+mn-lt"/>
+                <a:ea typeface="+mn-ea"/>
+                <a:cs typeface="+mn-cs"/>
+              </a:defRPr>
+            </a:lvl6pPr>
+            <a:lvl7pPr marL="2971800" indent="-228600" algn="l" defTabSz="914400" rtl="0" eaLnBrk="1" latinLnBrk="0" hangingPunct="1">
+              <a:spcBef>
+                <a:spcPct val="20000"/>
+              </a:spcBef>
+              <a:buFont typeface="Arial" pitchFamily="34" charset="0"/>
+              <a:buChar char="•"/>
+              <a:defRPr sz="2000" kern="1200">
+                <a:solidFill>
+                  <a:schemeClr val="tx1"/>
+                </a:solidFill>
+                <a:latin typeface="+mn-lt"/>
+                <a:ea typeface="+mn-ea"/>
+                <a:cs typeface="+mn-cs"/>
+              </a:defRPr>
+            </a:lvl7pPr>
+            <a:lvl8pPr marL="3429000" indent="-228600" algn="l" defTabSz="914400" rtl="0" eaLnBrk="1" latinLnBrk="0" hangingPunct="1">
+              <a:spcBef>
+                <a:spcPct val="20000"/>
+              </a:spcBef>
+              <a:buFont typeface="Arial" pitchFamily="34" charset="0"/>
+              <a:buChar char="•"/>
+              <a:defRPr sz="2000" kern="1200">
+                <a:solidFill>
+                  <a:schemeClr val="tx1"/>
+                </a:solidFill>
+                <a:latin typeface="+mn-lt"/>
+                <a:ea typeface="+mn-ea"/>
+                <a:cs typeface="+mn-cs"/>
+              </a:defRPr>
+            </a:lvl8pPr>
+            <a:lvl9pPr marL="3886200" indent="-228600" algn="l" defTabSz="914400" rtl="0" eaLnBrk="1" latinLnBrk="0" hangingPunct="1">
+              <a:spcBef>
+                <a:spcPct val="20000"/>
+              </a:spcBef>
+              <a:buFont typeface="Arial" pitchFamily="34" charset="0"/>
+              <a:buChar char="•"/>
+              <a:defRPr sz="2000" kern="1200">
+                <a:solidFill>
+                  <a:schemeClr val="tx1"/>
+                </a:solidFill>
+                <a:latin typeface="+mn-lt"/>
+                <a:ea typeface="+mn-ea"/>
+                <a:cs typeface="+mn-cs"/>
+              </a:defRPr>
+            </a:lvl9pPr>
+          </a:lstStyle>
+          <a:p>
+            <a:pPr marL="0" indent="0">
+              <a:buFont typeface="Arial" panose="020B0604020202020204" pitchFamily="34" charset="0"/>
+              <a:buNone/>
+            </a:pPr>
+            <a:r>
+              <a:rPr lang="en-US" sz="2000" dirty="0">
+                <a:solidFill>
+                  <a:schemeClr val="tx1"/>
+                </a:solidFill>
+              </a:rPr>
+              <a:t>Consumer task</a:t>
+            </a:r>
+            <a:endParaRPr lang="en-IN" sz="2000" dirty="0">
+              <a:solidFill>
+                <a:schemeClr val="tx1"/>
+              </a:solidFill>
+            </a:endParaRPr>
+          </a:p>
+        </p:txBody>
+      </p:sp>
+    </p:spTree>
+    <p:extLst>
+      <p:ext uri="{BB962C8B-B14F-4D97-AF65-F5344CB8AC3E}">
+        <p14:creationId xmlns:p14="http://schemas.microsoft.com/office/powerpoint/2010/main" val="3754470707"/>
+      </p:ext>
+    </p:extLst>
   </p:cSld>
   <p:clrMapOvr>
     <a:masterClrMapping/>
